--- a/ParallelLSTM/result/Parallel LSTM 결과 보고.pptx
+++ b/ParallelLSTM/result/Parallel LSTM 결과 보고.pptx
@@ -3162,6 +3162,178 @@
           </a:p>
         </p:txBody>
       </p:sp>
+      <p:sp>
+        <p:nvSpPr>
+          <p:cNvPr id="4" name="TextBox 3">
+            <a:extLst>
+              <a:ext uri="{FF2B5EF4-FFF2-40B4-BE49-F238E27FC236}">
+                <a16:creationId xmlns:a16="http://schemas.microsoft.com/office/drawing/2014/main" id="{D5096C0C-6C11-4C0B-824D-E65F785508ED}"/>
+              </a:ext>
+            </a:extLst>
+          </p:cNvPr>
+          <p:cNvSpPr txBox="1"/>
+          <p:nvPr/>
+        </p:nvSpPr>
+        <p:spPr>
+          <a:xfrm>
+            <a:off x="2273387" y="4206035"/>
+            <a:ext cx="7645225" cy="400110"/>
+          </a:xfrm>
+          <a:prstGeom prst="rect">
+            <a:avLst/>
+          </a:prstGeom>
+          <a:noFill/>
+        </p:spPr>
+        <p:txBody>
+          <a:bodyPr wrap="square" rtlCol="0">
+            <a:spAutoFit/>
+          </a:bodyPr>
+          <a:lstStyle/>
+          <a:p>
+            <a:pPr algn="ctr"/>
+            <a:r>
+              <a:rPr lang="ko-KR" altLang="en-US" sz="1000" dirty="0">
+                <a:latin typeface="+mn-ea"/>
+              </a:rPr>
+              <a:t>누적 강우 </a:t>
+            </a:r>
+            <a:r>
+              <a:rPr lang="en-US" altLang="ko-KR" sz="1000" dirty="0">
+                <a:latin typeface="+mn-ea"/>
+              </a:rPr>
+              <a:t>110mm </a:t>
+            </a:r>
+            <a:r>
+              <a:rPr lang="ko-KR" altLang="en-US" sz="1000" dirty="0">
+                <a:latin typeface="+mn-ea"/>
+              </a:rPr>
+              <a:t>이상 </a:t>
+            </a:r>
+            <a:r>
+              <a:rPr lang="en-US" altLang="ko-KR" sz="1000" dirty="0">
+                <a:latin typeface="+mn-ea"/>
+              </a:rPr>
+              <a:t>1 ~ 6</a:t>
+            </a:r>
+            <a:r>
+              <a:rPr lang="ko-KR" altLang="en-US" sz="1000" dirty="0">
+                <a:latin typeface="+mn-ea"/>
+              </a:rPr>
+              <a:t>은</a:t>
+            </a:r>
+            <a:r>
+              <a:rPr lang="en-US" altLang="ko-KR" sz="1000" dirty="0">
+                <a:latin typeface="+mn-ea"/>
+              </a:rPr>
+              <a:t>, </a:t>
+            </a:r>
+            <a:r>
+              <a:rPr lang="ko-KR" altLang="en-US" sz="1000" dirty="0">
+                <a:latin typeface="+mn-ea"/>
+              </a:rPr>
+              <a:t>동일한 ‘ 집중호우 </a:t>
+            </a:r>
+            <a:r>
+              <a:rPr lang="en-US" altLang="ko-KR" sz="1000" dirty="0">
+                <a:latin typeface="+mn-ea"/>
+              </a:rPr>
+              <a:t>(12</a:t>
+            </a:r>
+            <a:r>
+              <a:rPr lang="ko-KR" altLang="en-US" sz="1000" dirty="0">
+                <a:latin typeface="+mn-ea"/>
+              </a:rPr>
+              <a:t>시간 </a:t>
+            </a:r>
+            <a:r>
+              <a:rPr lang="en-US" altLang="ko-KR" sz="1000" dirty="0">
+                <a:latin typeface="+mn-ea"/>
+              </a:rPr>
+              <a:t>110mm </a:t>
+            </a:r>
+            <a:r>
+              <a:rPr lang="ko-KR" altLang="en-US" sz="1000" dirty="0">
+                <a:latin typeface="+mn-ea"/>
+              </a:rPr>
+              <a:t>이상</a:t>
+            </a:r>
+            <a:r>
+              <a:rPr lang="en-US" altLang="ko-KR" sz="1000" dirty="0">
+                <a:latin typeface="+mn-ea"/>
+              </a:rPr>
+              <a:t>) ’ </a:t>
+            </a:r>
+            <a:r>
+              <a:rPr lang="ko-KR" altLang="en-US" sz="1000" dirty="0">
+                <a:latin typeface="+mn-ea"/>
+              </a:rPr>
+              <a:t>조건에서</a:t>
+            </a:r>
+            <a:br>
+              <a:rPr lang="ko-KR" altLang="en-US" sz="1000" dirty="0">
+                <a:latin typeface="+mn-ea"/>
+              </a:rPr>
+            </a:br>
+            <a:r>
+              <a:rPr lang="ko-KR" altLang="en-US" sz="1000" dirty="0">
+                <a:latin typeface="+mn-ea"/>
+              </a:rPr>
+              <a:t>학습 </a:t>
+            </a:r>
+            <a:r>
+              <a:rPr lang="en-US" altLang="ko-KR" sz="1000" dirty="0">
+                <a:latin typeface="+mn-ea"/>
+              </a:rPr>
+              <a:t>· </a:t>
+            </a:r>
+            <a:r>
+              <a:rPr lang="ko-KR" altLang="en-US" sz="1000" dirty="0">
+                <a:latin typeface="+mn-ea"/>
+              </a:rPr>
+              <a:t>검증 </a:t>
+            </a:r>
+            <a:r>
+              <a:rPr lang="en-US" altLang="ko-KR" sz="1000" dirty="0">
+                <a:latin typeface="+mn-ea"/>
+              </a:rPr>
+              <a:t>· </a:t>
+            </a:r>
+            <a:r>
+              <a:rPr lang="ko-KR" altLang="en-US" sz="1000" dirty="0">
+                <a:latin typeface="+mn-ea"/>
+              </a:rPr>
+              <a:t>테스트 데이터 구성 방식을 달리한 </a:t>
+            </a:r>
+            <a:r>
+              <a:rPr lang="en-US" altLang="ko-KR" sz="1000" dirty="0">
+                <a:latin typeface="+mn-ea"/>
+              </a:rPr>
+              <a:t>6</a:t>
+            </a:r>
+            <a:r>
+              <a:rPr lang="ko-KR" altLang="en-US" sz="1000" dirty="0">
+                <a:latin typeface="+mn-ea"/>
+              </a:rPr>
+              <a:t>가지 실험 시나리오 中 </a:t>
+            </a:r>
+            <a:r>
+              <a:rPr lang="en-US" altLang="ko-KR" sz="1000" dirty="0">
+                <a:latin typeface="+mn-ea"/>
+              </a:rPr>
+              <a:t>4 , 5 </a:t>
+            </a:r>
+            <a:r>
+              <a:rPr lang="ko-KR" altLang="en-US" sz="1000" dirty="0">
+                <a:latin typeface="+mn-ea"/>
+              </a:rPr>
+              <a:t>번째 시나리오</a:t>
+            </a:r>
+            <a:endParaRPr lang="en-US" altLang="ko-KR" sz="1000" b="1" dirty="0">
+              <a:latin typeface="+mn-ea"/>
+            </a:endParaRPr>
+          </a:p>
+        </p:txBody>
+      </p:sp>
     </p:spTree>
     <p:extLst>
       <p:ext uri="{BB962C8B-B14F-4D97-AF65-F5344CB8AC3E}">
@@ -6699,18 +6871,6 @@
           </a:p>
           <a:p>
             <a:r>
-              <a:rPr lang="ko-KR" altLang="en-US" dirty="0" err="1">
-                <a:solidFill>
-                  <a:schemeClr val="bg2">
-                    <a:lumMod val="50000"/>
-                  </a:schemeClr>
-                </a:solidFill>
-                <a:latin typeface="나눔고딕" panose="020D0604000000000000" pitchFamily="50" charset="-127"/>
-                <a:ea typeface="나눔고딕" panose="020D0604000000000000" pitchFamily="50" charset="-127"/>
-              </a:rPr>
-              <a:t>고강우</a:t>
-            </a:r>
-            <a:r>
               <a:rPr lang="ko-KR" altLang="en-US" dirty="0">
                 <a:solidFill>
                   <a:schemeClr val="bg2">
@@ -6720,7 +6880,7 @@
                 <a:latin typeface="나눔고딕" panose="020D0604000000000000" pitchFamily="50" charset="-127"/>
                 <a:ea typeface="나눔고딕" panose="020D0604000000000000" pitchFamily="50" charset="-127"/>
               </a:rPr>
-              <a:t> 이벤트 성능은 향상</a:t>
+              <a:t>피크 이벤트 성능은 향상</a:t>
             </a:r>
             <a:endParaRPr lang="en-US" altLang="ko-KR" dirty="0">
               <a:solidFill>
@@ -6759,10 +6919,10 @@
       </p:sp>
       <p:sp>
         <p:nvSpPr>
-          <p:cNvPr id="11" name="TextBox 10">
-            <a:extLst>
-              <a:ext uri="{FF2B5EF4-FFF2-40B4-BE49-F238E27FC236}">
-                <a16:creationId xmlns:a16="http://schemas.microsoft.com/office/drawing/2014/main" id="{1AF80948-5DC9-4DBF-84D7-51E5FA534D7D}"/>
+          <p:cNvPr id="9" name="TextBox 8">
+            <a:extLst>
+              <a:ext uri="{FF2B5EF4-FFF2-40B4-BE49-F238E27FC236}">
+                <a16:creationId xmlns:a16="http://schemas.microsoft.com/office/drawing/2014/main" id="{88E51686-94D6-4A56-9631-FEB663D44C00}"/>
               </a:ext>
             </a:extLst>
           </p:cNvPr>
@@ -6771,8 +6931,179 @@
         </p:nvSpPr>
         <p:spPr>
           <a:xfrm>
-            <a:off x="0" y="431511"/>
-            <a:ext cx="2455334" cy="419101"/>
+            <a:off x="237067" y="6333135"/>
+            <a:ext cx="7645225" cy="400110"/>
+          </a:xfrm>
+          <a:prstGeom prst="rect">
+            <a:avLst/>
+          </a:prstGeom>
+          <a:noFill/>
+        </p:spPr>
+        <p:txBody>
+          <a:bodyPr wrap="square" rtlCol="0">
+            <a:spAutoFit/>
+          </a:bodyPr>
+          <a:lstStyle/>
+          <a:p>
+            <a:r>
+              <a:rPr lang="ko-KR" altLang="en-US" sz="1000" dirty="0" err="1">
+                <a:latin typeface="+mn-ea"/>
+              </a:rPr>
+              <a:t>누적강우</a:t>
+            </a:r>
+            <a:r>
+              <a:rPr lang="ko-KR" altLang="en-US" sz="1000" dirty="0">
+                <a:latin typeface="+mn-ea"/>
+              </a:rPr>
+              <a:t> </a:t>
+            </a:r>
+            <a:r>
+              <a:rPr lang="en-US" altLang="ko-KR" sz="1000" dirty="0">
+                <a:latin typeface="+mn-ea"/>
+              </a:rPr>
+              <a:t>110mm </a:t>
+            </a:r>
+            <a:r>
+              <a:rPr lang="ko-KR" altLang="en-US" sz="1000" dirty="0">
+                <a:latin typeface="+mn-ea"/>
+              </a:rPr>
+              <a:t>이상 </a:t>
+            </a:r>
+            <a:r>
+              <a:rPr lang="en-US" altLang="ko-KR" sz="1000" dirty="0">
+                <a:latin typeface="+mn-ea"/>
+              </a:rPr>
+              <a:t>1 ~ 6</a:t>
+            </a:r>
+            <a:r>
+              <a:rPr lang="ko-KR" altLang="en-US" sz="1000" dirty="0">
+                <a:latin typeface="+mn-ea"/>
+              </a:rPr>
+              <a:t>은</a:t>
+            </a:r>
+            <a:r>
+              <a:rPr lang="en-US" altLang="ko-KR" sz="1000" dirty="0">
+                <a:latin typeface="+mn-ea"/>
+              </a:rPr>
+              <a:t>, </a:t>
+            </a:r>
+            <a:r>
+              <a:rPr lang="ko-KR" altLang="en-US" sz="1000" dirty="0">
+                <a:latin typeface="+mn-ea"/>
+              </a:rPr>
+              <a:t>동일한 ‘ 집중호우 </a:t>
+            </a:r>
+            <a:r>
+              <a:rPr lang="en-US" altLang="ko-KR" sz="1000" dirty="0">
+                <a:latin typeface="+mn-ea"/>
+              </a:rPr>
+              <a:t>(12</a:t>
+            </a:r>
+            <a:r>
+              <a:rPr lang="ko-KR" altLang="en-US" sz="1000" dirty="0">
+                <a:latin typeface="+mn-ea"/>
+              </a:rPr>
+              <a:t>시간 </a:t>
+            </a:r>
+            <a:r>
+              <a:rPr lang="en-US" altLang="ko-KR" sz="1000" dirty="0">
+                <a:latin typeface="+mn-ea"/>
+              </a:rPr>
+              <a:t>110mm </a:t>
+            </a:r>
+            <a:r>
+              <a:rPr lang="ko-KR" altLang="en-US" sz="1000" dirty="0">
+                <a:latin typeface="+mn-ea"/>
+              </a:rPr>
+              <a:t>이상</a:t>
+            </a:r>
+            <a:r>
+              <a:rPr lang="en-US" altLang="ko-KR" sz="1000" dirty="0">
+                <a:latin typeface="+mn-ea"/>
+              </a:rPr>
+              <a:t>) ’ </a:t>
+            </a:r>
+            <a:r>
+              <a:rPr lang="ko-KR" altLang="en-US" sz="1000" dirty="0">
+                <a:latin typeface="+mn-ea"/>
+              </a:rPr>
+              <a:t>조건에서</a:t>
+            </a:r>
+            <a:br>
+              <a:rPr lang="ko-KR" altLang="en-US" sz="1000" dirty="0">
+                <a:latin typeface="+mn-ea"/>
+              </a:rPr>
+            </a:br>
+            <a:r>
+              <a:rPr lang="ko-KR" altLang="en-US" sz="1000" dirty="0">
+                <a:latin typeface="+mn-ea"/>
+              </a:rPr>
+              <a:t>학습 </a:t>
+            </a:r>
+            <a:r>
+              <a:rPr lang="en-US" altLang="ko-KR" sz="1000" dirty="0">
+                <a:latin typeface="+mn-ea"/>
+              </a:rPr>
+              <a:t>· </a:t>
+            </a:r>
+            <a:r>
+              <a:rPr lang="ko-KR" altLang="en-US" sz="1000" dirty="0">
+                <a:latin typeface="+mn-ea"/>
+              </a:rPr>
+              <a:t>검증 </a:t>
+            </a:r>
+            <a:r>
+              <a:rPr lang="en-US" altLang="ko-KR" sz="1000" dirty="0">
+                <a:latin typeface="+mn-ea"/>
+              </a:rPr>
+              <a:t>· </a:t>
+            </a:r>
+            <a:r>
+              <a:rPr lang="ko-KR" altLang="en-US" sz="1000" dirty="0">
+                <a:latin typeface="+mn-ea"/>
+              </a:rPr>
+              <a:t>테스트 데이터 구성 방식을 달리한 </a:t>
+            </a:r>
+            <a:r>
+              <a:rPr lang="en-US" altLang="ko-KR" sz="1000" dirty="0">
+                <a:latin typeface="+mn-ea"/>
+              </a:rPr>
+              <a:t>6</a:t>
+            </a:r>
+            <a:r>
+              <a:rPr lang="ko-KR" altLang="en-US" sz="1000" dirty="0">
+                <a:latin typeface="+mn-ea"/>
+              </a:rPr>
+              <a:t>가지 실험 시나리오 中 시나리오 </a:t>
+            </a:r>
+            <a:r>
+              <a:rPr lang="en-US" altLang="ko-KR" sz="1000" dirty="0">
+                <a:latin typeface="+mn-ea"/>
+              </a:rPr>
+              <a:t>4</a:t>
+            </a:r>
+            <a:endParaRPr lang="en-US" altLang="ko-KR" sz="1000" b="1" dirty="0">
+              <a:latin typeface="+mn-ea"/>
+            </a:endParaRPr>
+          </a:p>
+        </p:txBody>
+      </p:sp>
+      <p:sp>
+        <p:nvSpPr>
+          <p:cNvPr id="13" name="TextBox 12">
+            <a:extLst>
+              <a:ext uri="{FF2B5EF4-FFF2-40B4-BE49-F238E27FC236}">
+                <a16:creationId xmlns:a16="http://schemas.microsoft.com/office/drawing/2014/main" id="{814C24FE-71A5-45FE-BA8A-4D02088E6447}"/>
+              </a:ext>
+            </a:extLst>
+          </p:cNvPr>
+          <p:cNvSpPr txBox="1"/>
+          <p:nvPr/>
+        </p:nvSpPr>
+        <p:spPr>
+          <a:xfrm>
+            <a:off x="5018530" y="2914649"/>
+            <a:ext cx="6877480" cy="419101"/>
           </a:xfrm>
           <a:prstGeom prst="rect">
             <a:avLst/>
@@ -6889,22 +7220,58 @@
             </a:lvl9pPr>
           </a:lstStyle>
           <a:p>
-            <a:pPr marL="174625" indent="0" algn="dist">
+            <a:pPr marL="174625" indent="0">
               <a:buNone/>
             </a:pPr>
             <a:r>
-              <a:rPr lang="ko-KR" altLang="en-US" sz="1200" dirty="0"/>
-              <a:t>이전 모델 대비 </a:t>
-            </a:r>
-            <a:r>
-              <a:rPr lang="en-US" altLang="ko-KR" sz="1200" dirty="0"/>
-              <a:t>: </a:t>
-            </a:r>
-            <a:r>
-              <a:rPr lang="ko-KR" altLang="en-US" sz="1200" dirty="0"/>
-              <a:t>● 유사 </a:t>
-            </a:r>
-            <a:endParaRPr lang="en-US" altLang="ko-KR" sz="1200" dirty="0">
+              <a:rPr lang="ko-KR" altLang="en-US" dirty="0"/>
+              <a:t>이전 모델 대비 평균 </a:t>
+            </a:r>
+            <a:r>
+              <a:rPr lang="en-US" altLang="ko-KR" dirty="0"/>
+              <a:t>R2   :  </a:t>
+            </a:r>
+            <a:r>
+              <a:rPr lang="ko-KR" altLang="en-US" dirty="0" err="1"/>
+              <a:t>궁내교</a:t>
+            </a:r>
+            <a:r>
+              <a:rPr lang="ko-KR" altLang="en-US" dirty="0"/>
+              <a:t>  </a:t>
+            </a:r>
+            <a:r>
+              <a:rPr lang="ko-KR" altLang="en-US" dirty="0">
+                <a:solidFill>
+                  <a:srgbClr val="FF0000"/>
+                </a:solidFill>
+              </a:rPr>
+              <a:t>▼ 저하  </a:t>
+            </a:r>
+            <a:r>
+              <a:rPr lang="en-US" altLang="ko-KR" dirty="0"/>
+              <a:t>( - 5.9% )  ,  </a:t>
+            </a:r>
+            <a:r>
+              <a:rPr lang="ko-KR" altLang="en-US" dirty="0" err="1"/>
+              <a:t>대곡교</a:t>
+            </a:r>
+            <a:r>
+              <a:rPr lang="ko-KR" altLang="en-US" dirty="0"/>
+              <a:t>  </a:t>
+            </a:r>
+            <a:r>
+              <a:rPr lang="ko-KR" altLang="en-US" dirty="0">
+                <a:solidFill>
+                  <a:srgbClr val="FF0000"/>
+                </a:solidFill>
+              </a:rPr>
+              <a:t>▼ 저하  </a:t>
+            </a:r>
+            <a:r>
+              <a:rPr lang="en-US" altLang="ko-KR" dirty="0"/>
+              <a:t>( -7.1% ) </a:t>
+            </a:r>
+            <a:endParaRPr lang="en-US" altLang="ko-KR" dirty="0">
               <a:solidFill>
                 <a:schemeClr val="bg2">
                   <a:lumMod val="50000"/>
@@ -6960,8 +7327,8 @@
         </p:nvSpPr>
         <p:spPr>
           <a:xfrm>
-            <a:off x="449914" y="5537725"/>
-            <a:ext cx="1175686" cy="246221"/>
+            <a:off x="270933" y="5537725"/>
+            <a:ext cx="1354667" cy="276999"/>
           </a:xfrm>
           <a:prstGeom prst="rect">
             <a:avLst/>
@@ -6976,10 +7343,10 @@
           <a:p>
             <a:pPr algn="ctr" latinLnBrk="1"/>
             <a:r>
-              <a:rPr lang="en-US" altLang="ko-KR" sz="1000" b="1" dirty="0"/>
+              <a:rPr lang="en-US" altLang="ko-KR" sz="1200" b="1" dirty="0"/>
               <a:t>testdata_230711</a:t>
             </a:r>
-            <a:endParaRPr lang="ko-KR" altLang="en-US" sz="1000" b="1" dirty="0"/>
+            <a:endParaRPr lang="ko-KR" altLang="en-US" sz="1200" b="1" dirty="0"/>
           </a:p>
         </p:txBody>
       </p:sp>
@@ -6997,8 +7364,8 @@
         </p:nvSpPr>
         <p:spPr>
           <a:xfrm>
-            <a:off x="453401" y="3552110"/>
-            <a:ext cx="1175686" cy="246221"/>
+            <a:off x="274420" y="3552110"/>
+            <a:ext cx="1354667" cy="276999"/>
           </a:xfrm>
           <a:prstGeom prst="rect">
             <a:avLst/>
@@ -7013,14 +7380,14 @@
           <a:p>
             <a:pPr latinLnBrk="1"/>
             <a:r>
-              <a:rPr lang="en-US" altLang="ko-KR" sz="1000" b="1" dirty="0" err="1"/>
+              <a:rPr lang="en-US" altLang="ko-KR" sz="1200" b="1" dirty="0" err="1"/>
               <a:t>testdata</a:t>
             </a:r>
             <a:r>
-              <a:rPr lang="en-US" altLang="ko-KR" sz="1000" b="1" dirty="0"/>
+              <a:rPr lang="en-US" altLang="ko-KR" sz="1200" b="1" dirty="0"/>
               <a:t>_ 220712</a:t>
             </a:r>
-            <a:endParaRPr lang="ko-KR" altLang="en-US" sz="1000" b="1" dirty="0"/>
+            <a:endParaRPr lang="ko-KR" altLang="en-US" sz="1200" b="1" dirty="0"/>
           </a:p>
         </p:txBody>
       </p:sp>
@@ -7038,8 +7405,8 @@
         </p:nvSpPr>
         <p:spPr>
           <a:xfrm>
-            <a:off x="449914" y="1566310"/>
-            <a:ext cx="1175686" cy="246221"/>
+            <a:off x="270933" y="1566310"/>
+            <a:ext cx="1354667" cy="276999"/>
           </a:xfrm>
           <a:prstGeom prst="rect">
             <a:avLst/>
@@ -7054,14 +7421,14 @@
           <a:p>
             <a:pPr algn="ctr" latinLnBrk="1"/>
             <a:r>
-              <a:rPr lang="en-US" altLang="ko-KR" sz="1000" b="1" dirty="0" err="1"/>
+              <a:rPr lang="en-US" altLang="ko-KR" sz="1200" b="1" dirty="0" err="1"/>
               <a:t>testdata</a:t>
             </a:r>
             <a:r>
-              <a:rPr lang="en-US" altLang="ko-KR" sz="1000" b="1" dirty="0"/>
+              <a:rPr lang="en-US" altLang="ko-KR" sz="1200" b="1" dirty="0"/>
               <a:t>_ 200802</a:t>
             </a:r>
-            <a:endParaRPr lang="ko-KR" altLang="en-US" sz="1000" b="1" dirty="0"/>
+            <a:endParaRPr lang="ko-KR" altLang="en-US" sz="1200" b="1" dirty="0"/>
           </a:p>
         </p:txBody>
       </p:sp>
@@ -7129,8 +7496,8 @@
         </p:nvSpPr>
         <p:spPr>
           <a:xfrm>
-            <a:off x="6344256" y="5503969"/>
-            <a:ext cx="1175686" cy="246221"/>
+            <a:off x="6165275" y="5503969"/>
+            <a:ext cx="1354667" cy="276999"/>
           </a:xfrm>
           <a:prstGeom prst="rect">
             <a:avLst/>
@@ -7145,10 +7512,10 @@
           <a:p>
             <a:pPr algn="ctr" latinLnBrk="1"/>
             <a:r>
-              <a:rPr lang="en-US" altLang="ko-KR" sz="1000" b="1" dirty="0"/>
+              <a:rPr lang="en-US" altLang="ko-KR" sz="1200" b="1" dirty="0"/>
               <a:t>testdata_250814</a:t>
             </a:r>
-            <a:endParaRPr lang="ko-KR" altLang="en-US" sz="1000" b="1" dirty="0"/>
+            <a:endParaRPr lang="ko-KR" altLang="en-US" sz="1200" b="1" dirty="0"/>
           </a:p>
         </p:txBody>
       </p:sp>
@@ -7166,8 +7533,8 @@
         </p:nvSpPr>
         <p:spPr>
           <a:xfrm>
-            <a:off x="6344256" y="3478697"/>
-            <a:ext cx="1175686" cy="246221"/>
+            <a:off x="6165275" y="3478697"/>
+            <a:ext cx="1354667" cy="276999"/>
           </a:xfrm>
           <a:prstGeom prst="rect">
             <a:avLst/>
@@ -7182,14 +7549,14 @@
           <a:p>
             <a:pPr latinLnBrk="1"/>
             <a:r>
-              <a:rPr lang="en-US" altLang="ko-KR" sz="1000" b="1" dirty="0" err="1"/>
+              <a:rPr lang="en-US" altLang="ko-KR" sz="1200" b="1" dirty="0" err="1"/>
               <a:t>testdata</a:t>
             </a:r>
             <a:r>
-              <a:rPr lang="en-US" altLang="ko-KR" sz="1000" b="1" dirty="0"/>
+              <a:rPr lang="en-US" altLang="ko-KR" sz="1200" b="1" dirty="0"/>
               <a:t>_ 250716</a:t>
             </a:r>
-            <a:endParaRPr lang="ko-KR" altLang="en-US" sz="1000" b="1" dirty="0"/>
+            <a:endParaRPr lang="ko-KR" altLang="en-US" sz="1200" b="1" dirty="0"/>
           </a:p>
         </p:txBody>
       </p:sp>
@@ -7207,8 +7574,8 @@
         </p:nvSpPr>
         <p:spPr>
           <a:xfrm>
-            <a:off x="6351124" y="1473154"/>
-            <a:ext cx="1175686" cy="246221"/>
+            <a:off x="6172143" y="1473154"/>
+            <a:ext cx="1354667" cy="276999"/>
           </a:xfrm>
           <a:prstGeom prst="rect">
             <a:avLst/>
@@ -7223,14 +7590,14 @@
           <a:p>
             <a:pPr algn="ctr" latinLnBrk="1"/>
             <a:r>
-              <a:rPr lang="en-US" altLang="ko-KR" sz="1000" b="1" dirty="0" err="1"/>
+              <a:rPr lang="en-US" altLang="ko-KR" sz="1200" b="1" dirty="0" err="1"/>
               <a:t>testdata</a:t>
             </a:r>
             <a:r>
-              <a:rPr lang="en-US" altLang="ko-KR" sz="1000" b="1" dirty="0"/>
+              <a:rPr lang="en-US" altLang="ko-KR" sz="1200" b="1" dirty="0"/>
               <a:t>_ 240723</a:t>
             </a:r>
-            <a:endParaRPr lang="ko-KR" altLang="en-US" sz="1000" b="1" dirty="0"/>
+            <a:endParaRPr lang="ko-KR" altLang="en-US" sz="1200" b="1" dirty="0"/>
           </a:p>
         </p:txBody>
       </p:sp>
@@ -8148,8 +8515,8 @@
         </p:nvSpPr>
         <p:spPr>
           <a:xfrm>
-            <a:off x="449914" y="5877102"/>
-            <a:ext cx="1175686" cy="246221"/>
+            <a:off x="270933" y="5877102"/>
+            <a:ext cx="1354667" cy="276999"/>
           </a:xfrm>
           <a:prstGeom prst="rect">
             <a:avLst/>
@@ -8164,14 +8531,14 @@
           <a:p>
             <a:pPr algn="ctr" latinLnBrk="1"/>
             <a:r>
-              <a:rPr lang="en-US" altLang="ko-KR" sz="1000" b="1" dirty="0"/>
+              <a:rPr lang="en-US" altLang="ko-KR" sz="1200" b="1" dirty="0"/>
               <a:t>R2 : </a:t>
             </a:r>
             <a:r>
-              <a:rPr lang="en-US" altLang="ko-KR" sz="1000" dirty="0"/>
+              <a:rPr lang="en-US" altLang="ko-KR" sz="1200" dirty="0"/>
               <a:t>0.8533</a:t>
             </a:r>
-            <a:endParaRPr lang="ko-KR" altLang="en-US" sz="1000" b="1" dirty="0"/>
+            <a:endParaRPr lang="ko-KR" altLang="en-US" sz="1200" b="1" dirty="0"/>
           </a:p>
         </p:txBody>
       </p:sp>
@@ -8189,8 +8556,8 @@
         </p:nvSpPr>
         <p:spPr>
           <a:xfrm>
-            <a:off x="453401" y="3891487"/>
-            <a:ext cx="1175686" cy="246221"/>
+            <a:off x="274420" y="3891487"/>
+            <a:ext cx="1354667" cy="276999"/>
           </a:xfrm>
           <a:prstGeom prst="rect">
             <a:avLst/>
@@ -8205,18 +8572,18 @@
           <a:p>
             <a:pPr algn="ctr" latinLnBrk="1"/>
             <a:r>
-              <a:rPr lang="en-US" altLang="ko-KR" sz="1000" b="1" dirty="0"/>
+              <a:rPr lang="en-US" altLang="ko-KR" sz="1200" b="1" dirty="0"/>
               <a:t>R2 : </a:t>
             </a:r>
             <a:r>
-              <a:rPr lang="en-US" altLang="ko-KR" sz="1000" dirty="0">
+              <a:rPr lang="en-US" altLang="ko-KR" sz="1200" dirty="0">
                 <a:solidFill>
                   <a:srgbClr val="FF0000"/>
                 </a:solidFill>
               </a:rPr>
               <a:t>0.3192</a:t>
             </a:r>
-            <a:endParaRPr lang="ko-KR" altLang="en-US" sz="1000" b="1" dirty="0"/>
+            <a:endParaRPr lang="ko-KR" altLang="en-US" sz="1200" b="1" dirty="0"/>
           </a:p>
         </p:txBody>
       </p:sp>
@@ -8234,8 +8601,8 @@
         </p:nvSpPr>
         <p:spPr>
           <a:xfrm>
-            <a:off x="449914" y="1905687"/>
-            <a:ext cx="1175686" cy="246221"/>
+            <a:off x="270933" y="1905687"/>
+            <a:ext cx="1354667" cy="276999"/>
           </a:xfrm>
           <a:prstGeom prst="rect">
             <a:avLst/>
@@ -8250,18 +8617,18 @@
           <a:p>
             <a:pPr algn="ctr" latinLnBrk="1"/>
             <a:r>
-              <a:rPr lang="en-US" altLang="ko-KR" sz="1000" b="1" dirty="0"/>
+              <a:rPr lang="en-US" altLang="ko-KR" sz="1200" b="1" dirty="0"/>
               <a:t>R2 : </a:t>
             </a:r>
             <a:r>
-              <a:rPr lang="en-US" altLang="ko-KR" sz="1000" dirty="0">
+              <a:rPr lang="en-US" altLang="ko-KR" sz="1200" dirty="0">
                 <a:solidFill>
                   <a:srgbClr val="FF0000"/>
                 </a:solidFill>
               </a:rPr>
               <a:t>0.7237</a:t>
             </a:r>
-            <a:endParaRPr lang="ko-KR" altLang="en-US" sz="1000" b="1" dirty="0"/>
+            <a:endParaRPr lang="ko-KR" altLang="en-US" sz="1200" b="1" dirty="0"/>
           </a:p>
         </p:txBody>
       </p:sp>
@@ -8279,8 +8646,8 @@
         </p:nvSpPr>
         <p:spPr>
           <a:xfrm>
-            <a:off x="6344256" y="5843346"/>
-            <a:ext cx="1175686" cy="246221"/>
+            <a:off x="6165275" y="5843346"/>
+            <a:ext cx="1354667" cy="276999"/>
           </a:xfrm>
           <a:prstGeom prst="rect">
             <a:avLst/>
@@ -8295,14 +8662,14 @@
           <a:p>
             <a:pPr algn="ctr" latinLnBrk="1"/>
             <a:r>
-              <a:rPr lang="en-US" altLang="ko-KR" sz="1000" b="1" dirty="0"/>
+              <a:rPr lang="en-US" altLang="ko-KR" sz="1200" b="1" dirty="0"/>
               <a:t>R2 : </a:t>
             </a:r>
             <a:r>
-              <a:rPr lang="en-US" altLang="ko-KR" sz="1000" dirty="0"/>
+              <a:rPr lang="en-US" altLang="ko-KR" sz="1200" dirty="0"/>
               <a:t>0.8475</a:t>
             </a:r>
-            <a:endParaRPr lang="ko-KR" altLang="en-US" sz="1000" b="1" dirty="0"/>
+            <a:endParaRPr lang="ko-KR" altLang="en-US" sz="1200" b="1" dirty="0"/>
           </a:p>
         </p:txBody>
       </p:sp>
@@ -8320,8 +8687,8 @@
         </p:nvSpPr>
         <p:spPr>
           <a:xfrm>
-            <a:off x="6344256" y="3818074"/>
-            <a:ext cx="1175686" cy="246221"/>
+            <a:off x="6165275" y="3818074"/>
+            <a:ext cx="1354667" cy="276999"/>
           </a:xfrm>
           <a:prstGeom prst="rect">
             <a:avLst/>
@@ -8336,14 +8703,14 @@
           <a:p>
             <a:pPr algn="ctr" latinLnBrk="1"/>
             <a:r>
-              <a:rPr lang="en-US" altLang="ko-KR" sz="1000" b="1" dirty="0"/>
+              <a:rPr lang="en-US" altLang="ko-KR" sz="1200" b="1" dirty="0"/>
               <a:t>R2 : </a:t>
             </a:r>
             <a:r>
-              <a:rPr lang="en-US" altLang="ko-KR" sz="1000" dirty="0"/>
+              <a:rPr lang="en-US" altLang="ko-KR" sz="1200" dirty="0"/>
               <a:t>0.8108</a:t>
             </a:r>
-            <a:endParaRPr lang="ko-KR" altLang="en-US" sz="1000" b="1" dirty="0"/>
+            <a:endParaRPr lang="ko-KR" altLang="en-US" sz="1200" b="1" dirty="0"/>
           </a:p>
         </p:txBody>
       </p:sp>
@@ -8361,8 +8728,8 @@
         </p:nvSpPr>
         <p:spPr>
           <a:xfrm>
-            <a:off x="6351124" y="1812531"/>
-            <a:ext cx="1175686" cy="246221"/>
+            <a:off x="6172143" y="1812531"/>
+            <a:ext cx="1354667" cy="276999"/>
           </a:xfrm>
           <a:prstGeom prst="rect">
             <a:avLst/>
@@ -8377,18 +8744,18 @@
           <a:p>
             <a:pPr algn="ctr" latinLnBrk="1"/>
             <a:r>
-              <a:rPr lang="en-US" altLang="ko-KR" sz="1000" b="1" dirty="0"/>
+              <a:rPr lang="en-US" altLang="ko-KR" sz="1200" b="1" dirty="0"/>
               <a:t>R2 : </a:t>
             </a:r>
             <a:r>
-              <a:rPr lang="en-US" altLang="ko-KR" sz="1000" dirty="0">
+              <a:rPr lang="en-US" altLang="ko-KR" sz="1200" dirty="0">
                 <a:solidFill>
                   <a:srgbClr val="FF0000"/>
                 </a:solidFill>
               </a:rPr>
               <a:t>0.7623</a:t>
             </a:r>
-            <a:endParaRPr lang="pt-BR" altLang="ko-KR" sz="1000" dirty="0"/>
+            <a:endParaRPr lang="pt-BR" altLang="ko-KR" sz="1200" dirty="0"/>
           </a:p>
         </p:txBody>
       </p:sp>
@@ -8436,8 +8803,8 @@
         </p:nvSpPr>
         <p:spPr>
           <a:xfrm>
-            <a:off x="449914" y="5537725"/>
-            <a:ext cx="1175686" cy="246221"/>
+            <a:off x="347133" y="5537725"/>
+            <a:ext cx="1278467" cy="276999"/>
           </a:xfrm>
           <a:prstGeom prst="rect">
             <a:avLst/>
@@ -8452,10 +8819,10 @@
           <a:p>
             <a:pPr algn="ctr" latinLnBrk="1"/>
             <a:r>
-              <a:rPr lang="en-US" altLang="ko-KR" sz="1000" b="1" dirty="0"/>
+              <a:rPr lang="en-US" altLang="ko-KR" sz="1200" b="1" dirty="0"/>
               <a:t>testdata_230711</a:t>
             </a:r>
-            <a:endParaRPr lang="ko-KR" altLang="en-US" sz="1000" b="1" dirty="0"/>
+            <a:endParaRPr lang="ko-KR" altLang="en-US" sz="1200" b="1" dirty="0"/>
           </a:p>
         </p:txBody>
       </p:sp>
@@ -8473,8 +8840,8 @@
         </p:nvSpPr>
         <p:spPr>
           <a:xfrm>
-            <a:off x="453401" y="3552110"/>
-            <a:ext cx="1175686" cy="246221"/>
+            <a:off x="350620" y="3552110"/>
+            <a:ext cx="1278467" cy="276999"/>
           </a:xfrm>
           <a:prstGeom prst="rect">
             <a:avLst/>
@@ -8489,14 +8856,14 @@
           <a:p>
             <a:pPr latinLnBrk="1"/>
             <a:r>
-              <a:rPr lang="en-US" altLang="ko-KR" sz="1000" b="1" dirty="0" err="1"/>
+              <a:rPr lang="en-US" altLang="ko-KR" sz="1200" b="1" dirty="0" err="1"/>
               <a:t>testdata</a:t>
             </a:r>
             <a:r>
-              <a:rPr lang="en-US" altLang="ko-KR" sz="1000" b="1" dirty="0"/>
+              <a:rPr lang="en-US" altLang="ko-KR" sz="1200" b="1" dirty="0"/>
               <a:t>_ 220712</a:t>
             </a:r>
-            <a:endParaRPr lang="ko-KR" altLang="en-US" sz="1000" b="1" dirty="0"/>
+            <a:endParaRPr lang="ko-KR" altLang="en-US" sz="1200" b="1" dirty="0"/>
           </a:p>
         </p:txBody>
       </p:sp>
@@ -8514,8 +8881,8 @@
         </p:nvSpPr>
         <p:spPr>
           <a:xfrm>
-            <a:off x="449914" y="1566310"/>
-            <a:ext cx="1175686" cy="246221"/>
+            <a:off x="347133" y="1566310"/>
+            <a:ext cx="1278467" cy="276999"/>
           </a:xfrm>
           <a:prstGeom prst="rect">
             <a:avLst/>
@@ -8530,14 +8897,14 @@
           <a:p>
             <a:pPr algn="ctr" latinLnBrk="1"/>
             <a:r>
-              <a:rPr lang="en-US" altLang="ko-KR" sz="1000" b="1" dirty="0" err="1"/>
+              <a:rPr lang="en-US" altLang="ko-KR" sz="1200" b="1" dirty="0" err="1"/>
               <a:t>testdata</a:t>
             </a:r>
             <a:r>
-              <a:rPr lang="en-US" altLang="ko-KR" sz="1000" b="1" dirty="0"/>
+              <a:rPr lang="en-US" altLang="ko-KR" sz="1200" b="1" dirty="0"/>
               <a:t>_ 200802</a:t>
             </a:r>
-            <a:endParaRPr lang="ko-KR" altLang="en-US" sz="1000" b="1" dirty="0"/>
+            <a:endParaRPr lang="ko-KR" altLang="en-US" sz="1200" b="1" dirty="0"/>
           </a:p>
         </p:txBody>
       </p:sp>
@@ -8605,8 +8972,8 @@
         </p:nvSpPr>
         <p:spPr>
           <a:xfrm>
-            <a:off x="6344256" y="5503969"/>
-            <a:ext cx="1175686" cy="246221"/>
+            <a:off x="6241475" y="5503969"/>
+            <a:ext cx="1278467" cy="276999"/>
           </a:xfrm>
           <a:prstGeom prst="rect">
             <a:avLst/>
@@ -8621,10 +8988,10 @@
           <a:p>
             <a:pPr algn="ctr" latinLnBrk="1"/>
             <a:r>
-              <a:rPr lang="en-US" altLang="ko-KR" sz="1000" b="1" dirty="0"/>
+              <a:rPr lang="en-US" altLang="ko-KR" sz="1200" b="1" dirty="0"/>
               <a:t>testdata_250814</a:t>
             </a:r>
-            <a:endParaRPr lang="ko-KR" altLang="en-US" sz="1000" b="1" dirty="0"/>
+            <a:endParaRPr lang="ko-KR" altLang="en-US" sz="1200" b="1" dirty="0"/>
           </a:p>
         </p:txBody>
       </p:sp>
@@ -8642,8 +9009,8 @@
         </p:nvSpPr>
         <p:spPr>
           <a:xfrm>
-            <a:off x="6344256" y="3478697"/>
-            <a:ext cx="1175686" cy="246221"/>
+            <a:off x="6241475" y="3478697"/>
+            <a:ext cx="1278467" cy="276999"/>
           </a:xfrm>
           <a:prstGeom prst="rect">
             <a:avLst/>
@@ -8658,14 +9025,14 @@
           <a:p>
             <a:pPr latinLnBrk="1"/>
             <a:r>
-              <a:rPr lang="en-US" altLang="ko-KR" sz="1000" b="1" dirty="0" err="1"/>
+              <a:rPr lang="en-US" altLang="ko-KR" sz="1200" b="1" dirty="0" err="1"/>
               <a:t>testdata</a:t>
             </a:r>
             <a:r>
-              <a:rPr lang="en-US" altLang="ko-KR" sz="1000" b="1" dirty="0"/>
+              <a:rPr lang="en-US" altLang="ko-KR" sz="1200" b="1" dirty="0"/>
               <a:t>_ 250716</a:t>
             </a:r>
-            <a:endParaRPr lang="ko-KR" altLang="en-US" sz="1000" b="1" dirty="0"/>
+            <a:endParaRPr lang="ko-KR" altLang="en-US" sz="1200" b="1" dirty="0"/>
           </a:p>
         </p:txBody>
       </p:sp>
@@ -8683,8 +9050,8 @@
         </p:nvSpPr>
         <p:spPr>
           <a:xfrm>
-            <a:off x="6351124" y="1473154"/>
-            <a:ext cx="1175686" cy="246221"/>
+            <a:off x="6248343" y="1473154"/>
+            <a:ext cx="1278467" cy="276999"/>
           </a:xfrm>
           <a:prstGeom prst="rect">
             <a:avLst/>
@@ -8699,14 +9066,14 @@
           <a:p>
             <a:pPr algn="ctr" latinLnBrk="1"/>
             <a:r>
-              <a:rPr lang="en-US" altLang="ko-KR" sz="1000" b="1" dirty="0" err="1"/>
+              <a:rPr lang="en-US" altLang="ko-KR" sz="1200" b="1" dirty="0" err="1"/>
               <a:t>testdata</a:t>
             </a:r>
             <a:r>
-              <a:rPr lang="en-US" altLang="ko-KR" sz="1000" b="1" dirty="0"/>
+              <a:rPr lang="en-US" altLang="ko-KR" sz="1200" b="1" dirty="0"/>
               <a:t>_ 240723</a:t>
             </a:r>
-            <a:endParaRPr lang="ko-KR" altLang="en-US" sz="1000" b="1" dirty="0"/>
+            <a:endParaRPr lang="ko-KR" altLang="en-US" sz="1200" b="1" dirty="0"/>
           </a:p>
         </p:txBody>
       </p:sp>
@@ -9411,8 +9778,8 @@
         </p:nvSpPr>
         <p:spPr>
           <a:xfrm>
-            <a:off x="449914" y="5877102"/>
-            <a:ext cx="1175686" cy="246221"/>
+            <a:off x="347133" y="5877102"/>
+            <a:ext cx="1278467" cy="276999"/>
           </a:xfrm>
           <a:prstGeom prst="rect">
             <a:avLst/>
@@ -9427,18 +9794,18 @@
           <a:p>
             <a:pPr algn="ctr" latinLnBrk="1"/>
             <a:r>
-              <a:rPr lang="en-US" altLang="ko-KR" sz="1000" b="1" dirty="0"/>
+              <a:rPr lang="en-US" altLang="ko-KR" sz="1200" b="1" dirty="0"/>
               <a:t>R2 : </a:t>
             </a:r>
             <a:r>
-              <a:rPr lang="en-US" altLang="ko-KR" sz="1000" dirty="0">
+              <a:rPr lang="en-US" altLang="ko-KR" sz="1200" dirty="0">
                 <a:solidFill>
                   <a:srgbClr val="FF0000"/>
                 </a:solidFill>
               </a:rPr>
               <a:t>0.7456</a:t>
             </a:r>
-            <a:endParaRPr lang="ko-KR" altLang="en-US" sz="1000" b="1" dirty="0"/>
+            <a:endParaRPr lang="ko-KR" altLang="en-US" sz="1200" b="1" dirty="0"/>
           </a:p>
         </p:txBody>
       </p:sp>
@@ -9456,8 +9823,8 @@
         </p:nvSpPr>
         <p:spPr>
           <a:xfrm>
-            <a:off x="453401" y="3891487"/>
-            <a:ext cx="1175686" cy="246221"/>
+            <a:off x="350620" y="3891487"/>
+            <a:ext cx="1278467" cy="276999"/>
           </a:xfrm>
           <a:prstGeom prst="rect">
             <a:avLst/>
@@ -9472,11 +9839,11 @@
           <a:p>
             <a:pPr algn="ctr" latinLnBrk="1"/>
             <a:r>
-              <a:rPr lang="en-US" altLang="ko-KR" sz="1000" b="1" dirty="0"/>
+              <a:rPr lang="en-US" altLang="ko-KR" sz="1200" b="1" dirty="0"/>
               <a:t>R2 : </a:t>
             </a:r>
             <a:r>
-              <a:rPr lang="pt-BR" altLang="ko-KR" sz="1000" dirty="0">
+              <a:rPr lang="pt-BR" altLang="ko-KR" sz="1200" dirty="0">
                 <a:solidFill>
                   <a:srgbClr val="FF0000"/>
                 </a:solidFill>
@@ -9484,14 +9851,14 @@
               <a:t>-</a:t>
             </a:r>
             <a:r>
-              <a:rPr lang="en-US" altLang="ko-KR" sz="1000" dirty="0">
+              <a:rPr lang="en-US" altLang="ko-KR" sz="1200" dirty="0">
                 <a:solidFill>
                   <a:srgbClr val="FF0000"/>
                 </a:solidFill>
               </a:rPr>
               <a:t>0.0424</a:t>
             </a:r>
-            <a:endParaRPr lang="ko-KR" altLang="en-US" sz="1000" dirty="0"/>
+            <a:endParaRPr lang="ko-KR" altLang="en-US" sz="1200" dirty="0"/>
           </a:p>
         </p:txBody>
       </p:sp>
@@ -9509,8 +9876,8 @@
         </p:nvSpPr>
         <p:spPr>
           <a:xfrm>
-            <a:off x="449914" y="1905687"/>
-            <a:ext cx="1175686" cy="246221"/>
+            <a:off x="347133" y="1905687"/>
+            <a:ext cx="1278467" cy="276999"/>
           </a:xfrm>
           <a:prstGeom prst="rect">
             <a:avLst/>
@@ -9525,14 +9892,14 @@
           <a:p>
             <a:pPr algn="ctr" latinLnBrk="1"/>
             <a:r>
-              <a:rPr lang="en-US" altLang="ko-KR" sz="1000" b="1" dirty="0"/>
+              <a:rPr lang="en-US" altLang="ko-KR" sz="1200" b="1" dirty="0"/>
               <a:t>R2 : </a:t>
             </a:r>
             <a:r>
-              <a:rPr lang="en-US" altLang="ko-KR" sz="1000" dirty="0"/>
+              <a:rPr lang="en-US" altLang="ko-KR" sz="1200" dirty="0"/>
               <a:t>0.8350</a:t>
             </a:r>
-            <a:endParaRPr lang="ko-KR" altLang="en-US" sz="1000" b="1" dirty="0"/>
+            <a:endParaRPr lang="ko-KR" altLang="en-US" sz="1200" b="1" dirty="0"/>
           </a:p>
         </p:txBody>
       </p:sp>
@@ -9550,8 +9917,8 @@
         </p:nvSpPr>
         <p:spPr>
           <a:xfrm>
-            <a:off x="6344256" y="5843346"/>
-            <a:ext cx="1175686" cy="246221"/>
+            <a:off x="6241475" y="5843346"/>
+            <a:ext cx="1278467" cy="276999"/>
           </a:xfrm>
           <a:prstGeom prst="rect">
             <a:avLst/>
@@ -9566,18 +9933,18 @@
           <a:p>
             <a:pPr algn="ctr" latinLnBrk="1"/>
             <a:r>
-              <a:rPr lang="en-US" altLang="ko-KR" sz="1000" b="1" dirty="0"/>
+              <a:rPr lang="en-US" altLang="ko-KR" sz="1200" b="1" dirty="0"/>
               <a:t>R2 : </a:t>
             </a:r>
             <a:r>
-              <a:rPr lang="en-US" altLang="ko-KR" sz="1000" dirty="0">
+              <a:rPr lang="en-US" altLang="ko-KR" sz="1200" dirty="0">
                 <a:solidFill>
                   <a:srgbClr val="FF0000"/>
                 </a:solidFill>
               </a:rPr>
               <a:t>0.5011</a:t>
             </a:r>
-            <a:endParaRPr lang="ko-KR" altLang="en-US" sz="1000" b="1" dirty="0"/>
+            <a:endParaRPr lang="ko-KR" altLang="en-US" sz="1200" b="1" dirty="0"/>
           </a:p>
         </p:txBody>
       </p:sp>
@@ -9595,8 +9962,8 @@
         </p:nvSpPr>
         <p:spPr>
           <a:xfrm>
-            <a:off x="6344256" y="3818074"/>
-            <a:ext cx="1175686" cy="246221"/>
+            <a:off x="6241475" y="3818074"/>
+            <a:ext cx="1278467" cy="276999"/>
           </a:xfrm>
           <a:prstGeom prst="rect">
             <a:avLst/>
@@ -9611,14 +9978,14 @@
           <a:p>
             <a:pPr algn="ctr" latinLnBrk="1"/>
             <a:r>
-              <a:rPr lang="en-US" altLang="ko-KR" sz="1000" b="1" dirty="0"/>
+              <a:rPr lang="en-US" altLang="ko-KR" sz="1200" b="1" dirty="0"/>
               <a:t>R2 : </a:t>
             </a:r>
             <a:r>
-              <a:rPr lang="en-US" altLang="ko-KR" sz="1000" dirty="0"/>
+              <a:rPr lang="en-US" altLang="ko-KR" sz="1200" dirty="0"/>
               <a:t>0.8305</a:t>
             </a:r>
-            <a:endParaRPr lang="ko-KR" altLang="en-US" sz="1000" b="1" dirty="0"/>
+            <a:endParaRPr lang="ko-KR" altLang="en-US" sz="1200" b="1" dirty="0"/>
           </a:p>
         </p:txBody>
       </p:sp>
@@ -9636,8 +10003,8 @@
         </p:nvSpPr>
         <p:spPr>
           <a:xfrm>
-            <a:off x="6351124" y="1812531"/>
-            <a:ext cx="1175686" cy="400110"/>
+            <a:off x="6248343" y="1812531"/>
+            <a:ext cx="1278467" cy="461665"/>
           </a:xfrm>
           <a:prstGeom prst="rect">
             <a:avLst/>
@@ -9652,22 +10019,22 @@
           <a:p>
             <a:pPr algn="ctr" latinLnBrk="1"/>
             <a:r>
-              <a:rPr lang="en-US" altLang="ko-KR" sz="1000" b="1" dirty="0"/>
+              <a:rPr lang="en-US" altLang="ko-KR" sz="1200" b="1" dirty="0"/>
               <a:t>R2 : </a:t>
             </a:r>
             <a:r>
-              <a:rPr lang="en-US" altLang="ko-KR" sz="1000" dirty="0">
+              <a:rPr lang="en-US" altLang="ko-KR" sz="1200" dirty="0">
                 <a:solidFill>
                   <a:srgbClr val="FF0000"/>
                 </a:solidFill>
               </a:rPr>
               <a:t>0.0871</a:t>
             </a:r>
-            <a:endParaRPr lang="ko-KR" altLang="en-US" sz="1000" dirty="0"/>
+            <a:endParaRPr lang="ko-KR" altLang="en-US" sz="1200" dirty="0"/>
           </a:p>
           <a:p>
             <a:pPr algn="ctr" latinLnBrk="1"/>
-            <a:endParaRPr lang="ko-KR" altLang="en-US" sz="1000" b="1" dirty="0"/>
+            <a:endParaRPr lang="ko-KR" altLang="en-US" sz="1200" b="1" dirty="0"/>
           </a:p>
         </p:txBody>
       </p:sp>
@@ -11560,10 +11927,10 @@
       </p:sp>
       <p:sp>
         <p:nvSpPr>
-          <p:cNvPr id="11" name="TextBox 10">
-            <a:extLst>
-              <a:ext uri="{FF2B5EF4-FFF2-40B4-BE49-F238E27FC236}">
-                <a16:creationId xmlns:a16="http://schemas.microsoft.com/office/drawing/2014/main" id="{1B923EF6-9F3C-4E8B-ADA5-53803AD13E6E}"/>
+          <p:cNvPr id="9" name="TextBox 8">
+            <a:extLst>
+              <a:ext uri="{FF2B5EF4-FFF2-40B4-BE49-F238E27FC236}">
+                <a16:creationId xmlns:a16="http://schemas.microsoft.com/office/drawing/2014/main" id="{99BBF4F3-5E4A-4A12-817B-CE1688DD301D}"/>
               </a:ext>
             </a:extLst>
           </p:cNvPr>
@@ -11572,8 +11939,179 @@
         </p:nvSpPr>
         <p:spPr>
           <a:xfrm>
-            <a:off x="0" y="431511"/>
-            <a:ext cx="2455334" cy="419101"/>
+            <a:off x="237067" y="6333135"/>
+            <a:ext cx="7645225" cy="400110"/>
+          </a:xfrm>
+          <a:prstGeom prst="rect">
+            <a:avLst/>
+          </a:prstGeom>
+          <a:noFill/>
+        </p:spPr>
+        <p:txBody>
+          <a:bodyPr wrap="square" rtlCol="0">
+            <a:spAutoFit/>
+          </a:bodyPr>
+          <a:lstStyle/>
+          <a:p>
+            <a:r>
+              <a:rPr lang="ko-KR" altLang="en-US" sz="1000" dirty="0" err="1">
+                <a:latin typeface="+mn-ea"/>
+              </a:rPr>
+              <a:t>누적강우</a:t>
+            </a:r>
+            <a:r>
+              <a:rPr lang="ko-KR" altLang="en-US" sz="1000" dirty="0">
+                <a:latin typeface="+mn-ea"/>
+              </a:rPr>
+              <a:t> </a:t>
+            </a:r>
+            <a:r>
+              <a:rPr lang="en-US" altLang="ko-KR" sz="1000" dirty="0">
+                <a:latin typeface="+mn-ea"/>
+              </a:rPr>
+              <a:t>110mm </a:t>
+            </a:r>
+            <a:r>
+              <a:rPr lang="ko-KR" altLang="en-US" sz="1000" dirty="0">
+                <a:latin typeface="+mn-ea"/>
+              </a:rPr>
+              <a:t>이상 </a:t>
+            </a:r>
+            <a:r>
+              <a:rPr lang="en-US" altLang="ko-KR" sz="1000" dirty="0">
+                <a:latin typeface="+mn-ea"/>
+              </a:rPr>
+              <a:t>1 ~ 6</a:t>
+            </a:r>
+            <a:r>
+              <a:rPr lang="ko-KR" altLang="en-US" sz="1000" dirty="0">
+                <a:latin typeface="+mn-ea"/>
+              </a:rPr>
+              <a:t>은</a:t>
+            </a:r>
+            <a:r>
+              <a:rPr lang="en-US" altLang="ko-KR" sz="1000" dirty="0">
+                <a:latin typeface="+mn-ea"/>
+              </a:rPr>
+              <a:t>, </a:t>
+            </a:r>
+            <a:r>
+              <a:rPr lang="ko-KR" altLang="en-US" sz="1000" dirty="0">
+                <a:latin typeface="+mn-ea"/>
+              </a:rPr>
+              <a:t>동일한 ‘ 집중호우 </a:t>
+            </a:r>
+            <a:r>
+              <a:rPr lang="en-US" altLang="ko-KR" sz="1000" dirty="0">
+                <a:latin typeface="+mn-ea"/>
+              </a:rPr>
+              <a:t>(12</a:t>
+            </a:r>
+            <a:r>
+              <a:rPr lang="ko-KR" altLang="en-US" sz="1000" dirty="0">
+                <a:latin typeface="+mn-ea"/>
+              </a:rPr>
+              <a:t>시간 </a:t>
+            </a:r>
+            <a:r>
+              <a:rPr lang="en-US" altLang="ko-KR" sz="1000" dirty="0">
+                <a:latin typeface="+mn-ea"/>
+              </a:rPr>
+              <a:t>110mm </a:t>
+            </a:r>
+            <a:r>
+              <a:rPr lang="ko-KR" altLang="en-US" sz="1000" dirty="0">
+                <a:latin typeface="+mn-ea"/>
+              </a:rPr>
+              <a:t>이상</a:t>
+            </a:r>
+            <a:r>
+              <a:rPr lang="en-US" altLang="ko-KR" sz="1000" dirty="0">
+                <a:latin typeface="+mn-ea"/>
+              </a:rPr>
+              <a:t>) ’ </a:t>
+            </a:r>
+            <a:r>
+              <a:rPr lang="ko-KR" altLang="en-US" sz="1000" dirty="0">
+                <a:latin typeface="+mn-ea"/>
+              </a:rPr>
+              <a:t>조건에서</a:t>
+            </a:r>
+            <a:br>
+              <a:rPr lang="ko-KR" altLang="en-US" sz="1000" dirty="0">
+                <a:latin typeface="+mn-ea"/>
+              </a:rPr>
+            </a:br>
+            <a:r>
+              <a:rPr lang="ko-KR" altLang="en-US" sz="1000" dirty="0">
+                <a:latin typeface="+mn-ea"/>
+              </a:rPr>
+              <a:t>학습 </a:t>
+            </a:r>
+            <a:r>
+              <a:rPr lang="en-US" altLang="ko-KR" sz="1000" dirty="0">
+                <a:latin typeface="+mn-ea"/>
+              </a:rPr>
+              <a:t>· </a:t>
+            </a:r>
+            <a:r>
+              <a:rPr lang="ko-KR" altLang="en-US" sz="1000" dirty="0">
+                <a:latin typeface="+mn-ea"/>
+              </a:rPr>
+              <a:t>검증 </a:t>
+            </a:r>
+            <a:r>
+              <a:rPr lang="en-US" altLang="ko-KR" sz="1000" dirty="0">
+                <a:latin typeface="+mn-ea"/>
+              </a:rPr>
+              <a:t>· </a:t>
+            </a:r>
+            <a:r>
+              <a:rPr lang="ko-KR" altLang="en-US" sz="1000" dirty="0">
+                <a:latin typeface="+mn-ea"/>
+              </a:rPr>
+              <a:t>테스트 데이터 구성 방식을 달리한 </a:t>
+            </a:r>
+            <a:r>
+              <a:rPr lang="en-US" altLang="ko-KR" sz="1000" dirty="0">
+                <a:latin typeface="+mn-ea"/>
+              </a:rPr>
+              <a:t>6</a:t>
+            </a:r>
+            <a:r>
+              <a:rPr lang="ko-KR" altLang="en-US" sz="1000" dirty="0">
+                <a:latin typeface="+mn-ea"/>
+              </a:rPr>
+              <a:t>가지 실험 시나리오 中 시나리오 </a:t>
+            </a:r>
+            <a:r>
+              <a:rPr lang="en-US" altLang="ko-KR" sz="1000" dirty="0">
+                <a:latin typeface="+mn-ea"/>
+              </a:rPr>
+              <a:t>5</a:t>
+            </a:r>
+            <a:endParaRPr lang="en-US" altLang="ko-KR" sz="1000" b="1" dirty="0">
+              <a:latin typeface="+mn-ea"/>
+            </a:endParaRPr>
+          </a:p>
+        </p:txBody>
+      </p:sp>
+      <p:sp>
+        <p:nvSpPr>
+          <p:cNvPr id="14" name="TextBox 13">
+            <a:extLst>
+              <a:ext uri="{FF2B5EF4-FFF2-40B4-BE49-F238E27FC236}">
+                <a16:creationId xmlns:a16="http://schemas.microsoft.com/office/drawing/2014/main" id="{2C723420-1D1A-46CB-A691-6B9D6395FA3A}"/>
+              </a:ext>
+            </a:extLst>
+          </p:cNvPr>
+          <p:cNvSpPr txBox="1"/>
+          <p:nvPr/>
+        </p:nvSpPr>
+        <p:spPr>
+          <a:xfrm>
+            <a:off x="5018529" y="2914649"/>
+            <a:ext cx="6911003" cy="419101"/>
           </a:xfrm>
           <a:prstGeom prst="rect">
             <a:avLst/>
@@ -11690,22 +12228,58 @@
             </a:lvl9pPr>
           </a:lstStyle>
           <a:p>
-            <a:pPr marL="174625" indent="0" algn="dist">
+            <a:pPr marL="174625" indent="0">
               <a:buNone/>
             </a:pPr>
             <a:r>
-              <a:rPr lang="ko-KR" altLang="en-US" sz="1200" dirty="0"/>
-              <a:t>이전 모델 대비 </a:t>
-            </a:r>
-            <a:r>
-              <a:rPr lang="en-US" altLang="ko-KR" sz="1200" dirty="0"/>
-              <a:t>: </a:t>
-            </a:r>
-            <a:r>
-              <a:rPr lang="ko-KR" altLang="en-US" sz="1200" dirty="0"/>
-              <a:t>● 유사 </a:t>
-            </a:r>
-            <a:endParaRPr lang="en-US" altLang="ko-KR" sz="1200" dirty="0">
+              <a:rPr lang="ko-KR" altLang="en-US" dirty="0"/>
+              <a:t>이전 모델 대비 평균 </a:t>
+            </a:r>
+            <a:r>
+              <a:rPr lang="en-US" altLang="ko-KR" dirty="0"/>
+              <a:t>R2   :  </a:t>
+            </a:r>
+            <a:r>
+              <a:rPr lang="ko-KR" altLang="en-US" dirty="0" err="1"/>
+              <a:t>궁내교</a:t>
+            </a:r>
+            <a:r>
+              <a:rPr lang="ko-KR" altLang="en-US" dirty="0"/>
+              <a:t>  </a:t>
+            </a:r>
+            <a:r>
+              <a:rPr lang="ko-KR" altLang="en-US" dirty="0">
+                <a:solidFill>
+                  <a:srgbClr val="FF0000"/>
+                </a:solidFill>
+              </a:rPr>
+              <a:t>▼ 저하  </a:t>
+            </a:r>
+            <a:r>
+              <a:rPr lang="en-US" altLang="ko-KR" dirty="0"/>
+              <a:t>( - 4.3% )  ,  </a:t>
+            </a:r>
+            <a:r>
+              <a:rPr lang="ko-KR" altLang="en-US" dirty="0" err="1"/>
+              <a:t>대곡교</a:t>
+            </a:r>
+            <a:r>
+              <a:rPr lang="ko-KR" altLang="en-US" dirty="0"/>
+              <a:t>  </a:t>
+            </a:r>
+            <a:r>
+              <a:rPr lang="ko-KR" altLang="en-US" dirty="0">
+                <a:solidFill>
+                  <a:srgbClr val="FF0000"/>
+                </a:solidFill>
+              </a:rPr>
+              <a:t>▲ 개선  </a:t>
+            </a:r>
+            <a:r>
+              <a:rPr lang="en-US" altLang="ko-KR" dirty="0"/>
+              <a:t>( +11.1% ) </a:t>
+            </a:r>
+            <a:endParaRPr lang="en-US" altLang="ko-KR" dirty="0">
               <a:solidFill>
                 <a:schemeClr val="bg2">
                   <a:lumMod val="50000"/>
@@ -11761,8 +12335,8 @@
         </p:nvSpPr>
         <p:spPr>
           <a:xfrm>
-            <a:off x="449914" y="5537725"/>
-            <a:ext cx="1175686" cy="246221"/>
+            <a:off x="330200" y="5537725"/>
+            <a:ext cx="1295400" cy="276999"/>
           </a:xfrm>
           <a:prstGeom prst="rect">
             <a:avLst/>
@@ -11777,10 +12351,10 @@
           <a:p>
             <a:pPr algn="ctr" latinLnBrk="1"/>
             <a:r>
-              <a:rPr lang="en-US" altLang="ko-KR" sz="1000" b="1" dirty="0"/>
+              <a:rPr lang="en-US" altLang="ko-KR" sz="1200" b="1" dirty="0"/>
               <a:t>testdata_230711</a:t>
             </a:r>
-            <a:endParaRPr lang="ko-KR" altLang="en-US" sz="1000" b="1" dirty="0"/>
+            <a:endParaRPr lang="ko-KR" altLang="en-US" sz="1200" b="1" dirty="0"/>
           </a:p>
         </p:txBody>
       </p:sp>
@@ -11798,8 +12372,8 @@
         </p:nvSpPr>
         <p:spPr>
           <a:xfrm>
-            <a:off x="453401" y="3552110"/>
-            <a:ext cx="1175686" cy="246221"/>
+            <a:off x="333687" y="3552110"/>
+            <a:ext cx="1295400" cy="276999"/>
           </a:xfrm>
           <a:prstGeom prst="rect">
             <a:avLst/>
@@ -11814,14 +12388,14 @@
           <a:p>
             <a:pPr latinLnBrk="1"/>
             <a:r>
-              <a:rPr lang="en-US" altLang="ko-KR" sz="1000" b="1" dirty="0" err="1"/>
+              <a:rPr lang="en-US" altLang="ko-KR" sz="1200" b="1" dirty="0" err="1"/>
               <a:t>testdata</a:t>
             </a:r>
             <a:r>
-              <a:rPr lang="en-US" altLang="ko-KR" sz="1000" b="1" dirty="0"/>
+              <a:rPr lang="en-US" altLang="ko-KR" sz="1200" b="1" dirty="0"/>
               <a:t>_ 220712</a:t>
             </a:r>
-            <a:endParaRPr lang="ko-KR" altLang="en-US" sz="1000" b="1" dirty="0"/>
+            <a:endParaRPr lang="ko-KR" altLang="en-US" sz="1200" b="1" dirty="0"/>
           </a:p>
         </p:txBody>
       </p:sp>
@@ -11839,8 +12413,8 @@
         </p:nvSpPr>
         <p:spPr>
           <a:xfrm>
-            <a:off x="449914" y="1566310"/>
-            <a:ext cx="1175686" cy="246221"/>
+            <a:off x="330200" y="1566310"/>
+            <a:ext cx="1295400" cy="276999"/>
           </a:xfrm>
           <a:prstGeom prst="rect">
             <a:avLst/>
@@ -11855,14 +12429,14 @@
           <a:p>
             <a:pPr algn="ctr" latinLnBrk="1"/>
             <a:r>
-              <a:rPr lang="en-US" altLang="ko-KR" sz="1000" b="1" dirty="0" err="1"/>
+              <a:rPr lang="en-US" altLang="ko-KR" sz="1200" b="1" dirty="0" err="1"/>
               <a:t>testdata</a:t>
             </a:r>
             <a:r>
-              <a:rPr lang="en-US" altLang="ko-KR" sz="1000" b="1" dirty="0"/>
+              <a:rPr lang="en-US" altLang="ko-KR" sz="1200" b="1" dirty="0"/>
               <a:t>_ 200802</a:t>
             </a:r>
-            <a:endParaRPr lang="ko-KR" altLang="en-US" sz="1000" b="1" dirty="0"/>
+            <a:endParaRPr lang="ko-KR" altLang="en-US" sz="1200" b="1" dirty="0"/>
           </a:p>
         </p:txBody>
       </p:sp>
@@ -11930,8 +12504,8 @@
         </p:nvSpPr>
         <p:spPr>
           <a:xfrm>
-            <a:off x="6344256" y="5503969"/>
-            <a:ext cx="1175686" cy="246221"/>
+            <a:off x="6224542" y="5503969"/>
+            <a:ext cx="1295400" cy="276999"/>
           </a:xfrm>
           <a:prstGeom prst="rect">
             <a:avLst/>
@@ -11946,10 +12520,10 @@
           <a:p>
             <a:pPr algn="ctr" latinLnBrk="1"/>
             <a:r>
-              <a:rPr lang="en-US" altLang="ko-KR" sz="1000" b="1" dirty="0"/>
+              <a:rPr lang="en-US" altLang="ko-KR" sz="1200" b="1" dirty="0"/>
               <a:t>testdata_250814</a:t>
             </a:r>
-            <a:endParaRPr lang="ko-KR" altLang="en-US" sz="1000" b="1" dirty="0"/>
+            <a:endParaRPr lang="ko-KR" altLang="en-US" sz="1200" b="1" dirty="0"/>
           </a:p>
         </p:txBody>
       </p:sp>
@@ -11967,8 +12541,8 @@
         </p:nvSpPr>
         <p:spPr>
           <a:xfrm>
-            <a:off x="6344256" y="3478697"/>
-            <a:ext cx="1175686" cy="246221"/>
+            <a:off x="6224542" y="3478697"/>
+            <a:ext cx="1295400" cy="276999"/>
           </a:xfrm>
           <a:prstGeom prst="rect">
             <a:avLst/>
@@ -11983,14 +12557,14 @@
           <a:p>
             <a:pPr latinLnBrk="1"/>
             <a:r>
-              <a:rPr lang="en-US" altLang="ko-KR" sz="1000" b="1" dirty="0" err="1"/>
+              <a:rPr lang="en-US" altLang="ko-KR" sz="1200" b="1" dirty="0" err="1"/>
               <a:t>testdata</a:t>
             </a:r>
             <a:r>
-              <a:rPr lang="en-US" altLang="ko-KR" sz="1000" b="1" dirty="0"/>
+              <a:rPr lang="en-US" altLang="ko-KR" sz="1200" b="1" dirty="0"/>
               <a:t>_ 250716</a:t>
             </a:r>
-            <a:endParaRPr lang="ko-KR" altLang="en-US" sz="1000" b="1" dirty="0"/>
+            <a:endParaRPr lang="ko-KR" altLang="en-US" sz="1200" b="1" dirty="0"/>
           </a:p>
         </p:txBody>
       </p:sp>
@@ -12008,8 +12582,8 @@
         </p:nvSpPr>
         <p:spPr>
           <a:xfrm>
-            <a:off x="6351124" y="1473154"/>
-            <a:ext cx="1175686" cy="246221"/>
+            <a:off x="6231410" y="1473154"/>
+            <a:ext cx="1295400" cy="276999"/>
           </a:xfrm>
           <a:prstGeom prst="rect">
             <a:avLst/>
@@ -12024,14 +12598,14 @@
           <a:p>
             <a:pPr algn="ctr" latinLnBrk="1"/>
             <a:r>
-              <a:rPr lang="en-US" altLang="ko-KR" sz="1000" b="1" dirty="0" err="1"/>
+              <a:rPr lang="en-US" altLang="ko-KR" sz="1200" b="1" dirty="0" err="1"/>
               <a:t>testdata</a:t>
             </a:r>
             <a:r>
-              <a:rPr lang="en-US" altLang="ko-KR" sz="1000" b="1" dirty="0"/>
+              <a:rPr lang="en-US" altLang="ko-KR" sz="1200" b="1" dirty="0"/>
               <a:t>_ 240723</a:t>
             </a:r>
-            <a:endParaRPr lang="ko-KR" altLang="en-US" sz="1000" b="1" dirty="0"/>
+            <a:endParaRPr lang="ko-KR" altLang="en-US" sz="1200" b="1" dirty="0"/>
           </a:p>
         </p:txBody>
       </p:sp>
@@ -12769,8 +13343,8 @@
         </p:nvSpPr>
         <p:spPr>
           <a:xfrm>
-            <a:off x="449914" y="5877102"/>
-            <a:ext cx="1175686" cy="246221"/>
+            <a:off x="330200" y="5877102"/>
+            <a:ext cx="1295400" cy="276999"/>
           </a:xfrm>
           <a:prstGeom prst="rect">
             <a:avLst/>
@@ -12785,14 +13359,14 @@
           <a:p>
             <a:pPr algn="ctr" latinLnBrk="1"/>
             <a:r>
-              <a:rPr lang="en-US" altLang="ko-KR" sz="1000" b="1" dirty="0"/>
+              <a:rPr lang="en-US" altLang="ko-KR" sz="1200" b="1" dirty="0"/>
               <a:t>R2 : </a:t>
             </a:r>
             <a:r>
-              <a:rPr lang="en-US" altLang="ko-KR" sz="1000" dirty="0"/>
+              <a:rPr lang="en-US" altLang="ko-KR" sz="1200" dirty="0"/>
               <a:t>0.8028</a:t>
             </a:r>
-            <a:endParaRPr lang="ko-KR" altLang="en-US" sz="1000" b="1" dirty="0"/>
+            <a:endParaRPr lang="ko-KR" altLang="en-US" sz="1200" b="1" dirty="0"/>
           </a:p>
         </p:txBody>
       </p:sp>
@@ -12810,8 +13384,8 @@
         </p:nvSpPr>
         <p:spPr>
           <a:xfrm>
-            <a:off x="453401" y="3891487"/>
-            <a:ext cx="1175686" cy="246221"/>
+            <a:off x="333687" y="3891487"/>
+            <a:ext cx="1295400" cy="276999"/>
           </a:xfrm>
           <a:prstGeom prst="rect">
             <a:avLst/>
@@ -12826,18 +13400,18 @@
           <a:p>
             <a:pPr algn="ctr" latinLnBrk="1"/>
             <a:r>
-              <a:rPr lang="en-US" altLang="ko-KR" sz="1000" b="1" dirty="0"/>
+              <a:rPr lang="en-US" altLang="ko-KR" sz="1200" b="1" dirty="0"/>
               <a:t>R2 : </a:t>
             </a:r>
             <a:r>
-              <a:rPr lang="en-US" altLang="ko-KR" sz="1000" dirty="0">
+              <a:rPr lang="en-US" altLang="ko-KR" sz="1200" dirty="0">
                 <a:solidFill>
                   <a:srgbClr val="FF0000"/>
                 </a:solidFill>
               </a:rPr>
               <a:t>0.0586</a:t>
             </a:r>
-            <a:endParaRPr lang="ko-KR" altLang="en-US" sz="1000" b="1" dirty="0"/>
+            <a:endParaRPr lang="ko-KR" altLang="en-US" sz="1200" b="1" dirty="0"/>
           </a:p>
         </p:txBody>
       </p:sp>
@@ -12855,8 +13429,8 @@
         </p:nvSpPr>
         <p:spPr>
           <a:xfrm>
-            <a:off x="449914" y="1905687"/>
-            <a:ext cx="1175686" cy="246221"/>
+            <a:off x="330200" y="1905687"/>
+            <a:ext cx="1295400" cy="276999"/>
           </a:xfrm>
           <a:prstGeom prst="rect">
             <a:avLst/>
@@ -12871,14 +13445,14 @@
           <a:p>
             <a:pPr algn="ctr" latinLnBrk="1"/>
             <a:r>
-              <a:rPr lang="en-US" altLang="ko-KR" sz="1000" b="1" dirty="0"/>
+              <a:rPr lang="en-US" altLang="ko-KR" sz="1200" b="1" dirty="0"/>
               <a:t>R2 : </a:t>
             </a:r>
             <a:r>
-              <a:rPr lang="en-US" altLang="ko-KR" sz="1000" dirty="0"/>
+              <a:rPr lang="en-US" altLang="ko-KR" sz="1200" dirty="0"/>
               <a:t>0.8774</a:t>
             </a:r>
-            <a:endParaRPr lang="ko-KR" altLang="en-US" sz="1000" b="1" dirty="0"/>
+            <a:endParaRPr lang="ko-KR" altLang="en-US" sz="1200" b="1" dirty="0"/>
           </a:p>
         </p:txBody>
       </p:sp>
@@ -12896,8 +13470,8 @@
         </p:nvSpPr>
         <p:spPr>
           <a:xfrm>
-            <a:off x="6344256" y="5843346"/>
-            <a:ext cx="1175686" cy="246221"/>
+            <a:off x="6224542" y="5843346"/>
+            <a:ext cx="1295400" cy="276999"/>
           </a:xfrm>
           <a:prstGeom prst="rect">
             <a:avLst/>
@@ -12912,14 +13486,14 @@
           <a:p>
             <a:pPr algn="ctr" latinLnBrk="1"/>
             <a:r>
-              <a:rPr lang="en-US" altLang="ko-KR" sz="1000" b="1" dirty="0"/>
+              <a:rPr lang="en-US" altLang="ko-KR" sz="1200" b="1" dirty="0"/>
               <a:t>R2 : </a:t>
             </a:r>
             <a:r>
-              <a:rPr lang="en-US" altLang="ko-KR" sz="1000" dirty="0"/>
+              <a:rPr lang="en-US" altLang="ko-KR" sz="1200" dirty="0"/>
               <a:t>0.8673</a:t>
             </a:r>
-            <a:endParaRPr lang="ko-KR" altLang="en-US" sz="1000" b="1" dirty="0"/>
+            <a:endParaRPr lang="ko-KR" altLang="en-US" sz="1200" b="1" dirty="0"/>
           </a:p>
         </p:txBody>
       </p:sp>
@@ -12937,8 +13511,8 @@
         </p:nvSpPr>
         <p:spPr>
           <a:xfrm>
-            <a:off x="6344256" y="3818074"/>
-            <a:ext cx="1175686" cy="246221"/>
+            <a:off x="6224542" y="3818074"/>
+            <a:ext cx="1295400" cy="276999"/>
           </a:xfrm>
           <a:prstGeom prst="rect">
             <a:avLst/>
@@ -12953,18 +13527,18 @@
           <a:p>
             <a:pPr algn="ctr" latinLnBrk="1"/>
             <a:r>
-              <a:rPr lang="en-US" altLang="ko-KR" sz="1000" b="1" dirty="0"/>
+              <a:rPr lang="en-US" altLang="ko-KR" sz="1200" b="1" dirty="0"/>
               <a:t>R2 : </a:t>
             </a:r>
             <a:r>
-              <a:rPr lang="en-US" altLang="ko-KR" sz="1000" dirty="0">
+              <a:rPr lang="en-US" altLang="ko-KR" sz="1200" dirty="0">
                 <a:solidFill>
                   <a:srgbClr val="FF0000"/>
                 </a:solidFill>
               </a:rPr>
               <a:t>0.7764</a:t>
             </a:r>
-            <a:endParaRPr lang="ko-KR" altLang="en-US" sz="1000" b="1" dirty="0"/>
+            <a:endParaRPr lang="ko-KR" altLang="en-US" sz="1200" b="1" dirty="0"/>
           </a:p>
         </p:txBody>
       </p:sp>
@@ -12982,8 +13556,8 @@
         </p:nvSpPr>
         <p:spPr>
           <a:xfrm>
-            <a:off x="6351124" y="1812531"/>
-            <a:ext cx="1175686" cy="246221"/>
+            <a:off x="6231410" y="1812531"/>
+            <a:ext cx="1295400" cy="276999"/>
           </a:xfrm>
           <a:prstGeom prst="rect">
             <a:avLst/>
@@ -12998,18 +13572,18 @@
           <a:p>
             <a:pPr algn="ctr" latinLnBrk="1"/>
             <a:r>
-              <a:rPr lang="en-US" altLang="ko-KR" sz="1000" b="1" dirty="0"/>
+              <a:rPr lang="en-US" altLang="ko-KR" sz="1200" b="1" dirty="0"/>
               <a:t>R2 : </a:t>
             </a:r>
             <a:r>
-              <a:rPr lang="en-US" altLang="ko-KR" sz="1000" dirty="0">
+              <a:rPr lang="en-US" altLang="ko-KR" sz="1200" dirty="0">
                 <a:solidFill>
                   <a:srgbClr val="FF0000"/>
                 </a:solidFill>
               </a:rPr>
               <a:t>0.7051</a:t>
             </a:r>
-            <a:endParaRPr lang="ko-KR" altLang="en-US" sz="1000" b="1" dirty="0"/>
+            <a:endParaRPr lang="ko-KR" altLang="en-US" sz="1200" b="1" dirty="0"/>
           </a:p>
         </p:txBody>
       </p:sp>
@@ -13057,8 +13631,8 @@
         </p:nvSpPr>
         <p:spPr>
           <a:xfrm>
-            <a:off x="449914" y="5537725"/>
-            <a:ext cx="1175686" cy="246221"/>
+            <a:off x="270933" y="5537725"/>
+            <a:ext cx="1354667" cy="276999"/>
           </a:xfrm>
           <a:prstGeom prst="rect">
             <a:avLst/>
@@ -13073,10 +13647,10 @@
           <a:p>
             <a:pPr algn="ctr" latinLnBrk="1"/>
             <a:r>
-              <a:rPr lang="en-US" altLang="ko-KR" sz="1000" b="1" dirty="0"/>
+              <a:rPr lang="en-US" altLang="ko-KR" sz="1200" b="1" dirty="0"/>
               <a:t>testdata_230711</a:t>
             </a:r>
-            <a:endParaRPr lang="ko-KR" altLang="en-US" sz="1000" b="1" dirty="0"/>
+            <a:endParaRPr lang="ko-KR" altLang="en-US" sz="1200" b="1" dirty="0"/>
           </a:p>
         </p:txBody>
       </p:sp>
@@ -13094,8 +13668,8 @@
         </p:nvSpPr>
         <p:spPr>
           <a:xfrm>
-            <a:off x="453401" y="3552110"/>
-            <a:ext cx="1175686" cy="246221"/>
+            <a:off x="274420" y="3552110"/>
+            <a:ext cx="1354667" cy="276999"/>
           </a:xfrm>
           <a:prstGeom prst="rect">
             <a:avLst/>
@@ -13110,14 +13684,14 @@
           <a:p>
             <a:pPr latinLnBrk="1"/>
             <a:r>
-              <a:rPr lang="en-US" altLang="ko-KR" sz="1000" b="1" dirty="0" err="1"/>
+              <a:rPr lang="en-US" altLang="ko-KR" sz="1200" b="1" dirty="0" err="1"/>
               <a:t>testdata</a:t>
             </a:r>
             <a:r>
-              <a:rPr lang="en-US" altLang="ko-KR" sz="1000" b="1" dirty="0"/>
+              <a:rPr lang="en-US" altLang="ko-KR" sz="1200" b="1" dirty="0"/>
               <a:t>_ 220712</a:t>
             </a:r>
-            <a:endParaRPr lang="ko-KR" altLang="en-US" sz="1000" b="1" dirty="0"/>
+            <a:endParaRPr lang="ko-KR" altLang="en-US" sz="1200" b="1" dirty="0"/>
           </a:p>
         </p:txBody>
       </p:sp>
@@ -13135,8 +13709,8 @@
         </p:nvSpPr>
         <p:spPr>
           <a:xfrm>
-            <a:off x="449914" y="1566310"/>
-            <a:ext cx="1175686" cy="246221"/>
+            <a:off x="270933" y="1566310"/>
+            <a:ext cx="1354667" cy="276999"/>
           </a:xfrm>
           <a:prstGeom prst="rect">
             <a:avLst/>
@@ -13151,14 +13725,14 @@
           <a:p>
             <a:pPr algn="ctr" latinLnBrk="1"/>
             <a:r>
-              <a:rPr lang="en-US" altLang="ko-KR" sz="1000" b="1" dirty="0" err="1"/>
+              <a:rPr lang="en-US" altLang="ko-KR" sz="1200" b="1" dirty="0" err="1"/>
               <a:t>testdata</a:t>
             </a:r>
             <a:r>
-              <a:rPr lang="en-US" altLang="ko-KR" sz="1000" b="1" dirty="0"/>
+              <a:rPr lang="en-US" altLang="ko-KR" sz="1200" b="1" dirty="0"/>
               <a:t>_ 200802</a:t>
             </a:r>
-            <a:endParaRPr lang="ko-KR" altLang="en-US" sz="1000" b="1" dirty="0"/>
+            <a:endParaRPr lang="ko-KR" altLang="en-US" sz="1200" b="1" dirty="0"/>
           </a:p>
         </p:txBody>
       </p:sp>
@@ -13226,8 +13800,8 @@
         </p:nvSpPr>
         <p:spPr>
           <a:xfrm>
-            <a:off x="6344256" y="5503969"/>
-            <a:ext cx="1175686" cy="246221"/>
+            <a:off x="6165275" y="5503969"/>
+            <a:ext cx="1354667" cy="276999"/>
           </a:xfrm>
           <a:prstGeom prst="rect">
             <a:avLst/>
@@ -13242,10 +13816,10 @@
           <a:p>
             <a:pPr algn="ctr" latinLnBrk="1"/>
             <a:r>
-              <a:rPr lang="en-US" altLang="ko-KR" sz="1000" b="1" dirty="0"/>
+              <a:rPr lang="en-US" altLang="ko-KR" sz="1200" b="1" dirty="0"/>
               <a:t>testdata_250814</a:t>
             </a:r>
-            <a:endParaRPr lang="ko-KR" altLang="en-US" sz="1000" b="1" dirty="0"/>
+            <a:endParaRPr lang="ko-KR" altLang="en-US" sz="1200" b="1" dirty="0"/>
           </a:p>
         </p:txBody>
       </p:sp>
@@ -13263,8 +13837,8 @@
         </p:nvSpPr>
         <p:spPr>
           <a:xfrm>
-            <a:off x="6344256" y="3478697"/>
-            <a:ext cx="1175686" cy="246221"/>
+            <a:off x="6165275" y="3478697"/>
+            <a:ext cx="1354667" cy="276999"/>
           </a:xfrm>
           <a:prstGeom prst="rect">
             <a:avLst/>
@@ -13279,14 +13853,14 @@
           <a:p>
             <a:pPr latinLnBrk="1"/>
             <a:r>
-              <a:rPr lang="en-US" altLang="ko-KR" sz="1000" b="1" dirty="0" err="1"/>
+              <a:rPr lang="en-US" altLang="ko-KR" sz="1200" b="1" dirty="0" err="1"/>
               <a:t>testdata</a:t>
             </a:r>
             <a:r>
-              <a:rPr lang="en-US" altLang="ko-KR" sz="1000" b="1" dirty="0"/>
+              <a:rPr lang="en-US" altLang="ko-KR" sz="1200" b="1" dirty="0"/>
               <a:t>_ 250716</a:t>
             </a:r>
-            <a:endParaRPr lang="ko-KR" altLang="en-US" sz="1000" b="1" dirty="0"/>
+            <a:endParaRPr lang="ko-KR" altLang="en-US" sz="1200" b="1" dirty="0"/>
           </a:p>
         </p:txBody>
       </p:sp>
@@ -13304,8 +13878,8 @@
         </p:nvSpPr>
         <p:spPr>
           <a:xfrm>
-            <a:off x="6351124" y="1473154"/>
-            <a:ext cx="1175686" cy="246221"/>
+            <a:off x="6172143" y="1473154"/>
+            <a:ext cx="1354667" cy="276999"/>
           </a:xfrm>
           <a:prstGeom prst="rect">
             <a:avLst/>
@@ -13320,14 +13894,14 @@
           <a:p>
             <a:pPr algn="ctr" latinLnBrk="1"/>
             <a:r>
-              <a:rPr lang="en-US" altLang="ko-KR" sz="1000" b="1" dirty="0" err="1"/>
+              <a:rPr lang="en-US" altLang="ko-KR" sz="1200" b="1" dirty="0" err="1"/>
               <a:t>testdata</a:t>
             </a:r>
             <a:r>
-              <a:rPr lang="en-US" altLang="ko-KR" sz="1000" b="1" dirty="0"/>
+              <a:rPr lang="en-US" altLang="ko-KR" sz="1200" b="1" dirty="0"/>
               <a:t>_ 240723</a:t>
             </a:r>
-            <a:endParaRPr lang="ko-KR" altLang="en-US" sz="1000" b="1" dirty="0"/>
+            <a:endParaRPr lang="ko-KR" altLang="en-US" sz="1200" b="1" dirty="0"/>
           </a:p>
         </p:txBody>
       </p:sp>
@@ -14032,8 +14606,8 @@
         </p:nvSpPr>
         <p:spPr>
           <a:xfrm>
-            <a:off x="449914" y="5877102"/>
-            <a:ext cx="1175686" cy="246221"/>
+            <a:off x="270933" y="5877102"/>
+            <a:ext cx="1354667" cy="276999"/>
           </a:xfrm>
           <a:prstGeom prst="rect">
             <a:avLst/>
@@ -14048,14 +14622,14 @@
           <a:p>
             <a:pPr algn="ctr" latinLnBrk="1"/>
             <a:r>
-              <a:rPr lang="en-US" altLang="ko-KR" sz="1000" b="1" dirty="0"/>
+              <a:rPr lang="en-US" altLang="ko-KR" sz="1200" b="1" dirty="0"/>
               <a:t>R2 : </a:t>
             </a:r>
             <a:r>
-              <a:rPr lang="en-US" altLang="ko-KR" sz="1000" dirty="0"/>
+              <a:rPr lang="en-US" altLang="ko-KR" sz="1200" dirty="0"/>
               <a:t>0.8276</a:t>
             </a:r>
-            <a:endParaRPr lang="ko-KR" altLang="en-US" sz="1000" b="1" dirty="0"/>
+            <a:endParaRPr lang="ko-KR" altLang="en-US" sz="1200" b="1" dirty="0"/>
           </a:p>
         </p:txBody>
       </p:sp>
@@ -14073,8 +14647,8 @@
         </p:nvSpPr>
         <p:spPr>
           <a:xfrm>
-            <a:off x="453401" y="3891487"/>
-            <a:ext cx="1175686" cy="400110"/>
+            <a:off x="274420" y="3891487"/>
+            <a:ext cx="1354667" cy="461665"/>
           </a:xfrm>
           <a:prstGeom prst="rect">
             <a:avLst/>
@@ -14089,11 +14663,11 @@
           <a:p>
             <a:pPr algn="ctr" latinLnBrk="1"/>
             <a:r>
-              <a:rPr lang="en-US" altLang="ko-KR" sz="1000" b="1" dirty="0"/>
+              <a:rPr lang="en-US" altLang="ko-KR" sz="1200" b="1" dirty="0"/>
               <a:t>R2 : </a:t>
             </a:r>
             <a:r>
-              <a:rPr lang="pt-BR" altLang="ko-KR" sz="1000" dirty="0">
+              <a:rPr lang="pt-BR" altLang="ko-KR" sz="1200" dirty="0">
                 <a:solidFill>
                   <a:srgbClr val="FF0000"/>
                 </a:solidFill>
@@ -14101,18 +14675,18 @@
               <a:t>-</a:t>
             </a:r>
             <a:r>
-              <a:rPr lang="en-US" altLang="ko-KR" sz="1000" dirty="0">
+              <a:rPr lang="en-US" altLang="ko-KR" sz="1200" dirty="0">
                 <a:solidFill>
                   <a:srgbClr val="FF0000"/>
                 </a:solidFill>
               </a:rPr>
               <a:t>0.1000</a:t>
             </a:r>
-            <a:endParaRPr lang="ko-KR" altLang="en-US" sz="1000" dirty="0"/>
+            <a:endParaRPr lang="ko-KR" altLang="en-US" sz="1200" dirty="0"/>
           </a:p>
           <a:p>
             <a:pPr algn="ctr" latinLnBrk="1"/>
-            <a:endParaRPr lang="ko-KR" altLang="en-US" sz="1000" b="1" dirty="0"/>
+            <a:endParaRPr lang="ko-KR" altLang="en-US" sz="1200" b="1" dirty="0"/>
           </a:p>
         </p:txBody>
       </p:sp>
@@ -14130,8 +14704,8 @@
         </p:nvSpPr>
         <p:spPr>
           <a:xfrm>
-            <a:off x="449914" y="1905687"/>
-            <a:ext cx="1175686" cy="246221"/>
+            <a:off x="270933" y="1905687"/>
+            <a:ext cx="1354667" cy="276999"/>
           </a:xfrm>
           <a:prstGeom prst="rect">
             <a:avLst/>
@@ -14146,14 +14720,14 @@
           <a:p>
             <a:pPr algn="ctr" latinLnBrk="1"/>
             <a:r>
-              <a:rPr lang="en-US" altLang="ko-KR" sz="1000" b="1" dirty="0"/>
+              <a:rPr lang="en-US" altLang="ko-KR" sz="1200" b="1" dirty="0"/>
               <a:t>R2 : </a:t>
             </a:r>
             <a:r>
-              <a:rPr lang="en-US" altLang="ko-KR" sz="1000" dirty="0"/>
+              <a:rPr lang="en-US" altLang="ko-KR" sz="1200" dirty="0"/>
               <a:t>0.9246</a:t>
             </a:r>
-            <a:endParaRPr lang="ko-KR" altLang="en-US" sz="1000" b="1" dirty="0"/>
+            <a:endParaRPr lang="ko-KR" altLang="en-US" sz="1200" b="1" dirty="0"/>
           </a:p>
         </p:txBody>
       </p:sp>
@@ -14171,8 +14745,8 @@
         </p:nvSpPr>
         <p:spPr>
           <a:xfrm>
-            <a:off x="6344256" y="5843346"/>
-            <a:ext cx="1175686" cy="246221"/>
+            <a:off x="6165275" y="5843346"/>
+            <a:ext cx="1354667" cy="276999"/>
           </a:xfrm>
           <a:prstGeom prst="rect">
             <a:avLst/>
@@ -14187,18 +14761,18 @@
           <a:p>
             <a:pPr algn="ctr" latinLnBrk="1"/>
             <a:r>
-              <a:rPr lang="en-US" altLang="ko-KR" sz="1000" b="1" dirty="0"/>
+              <a:rPr lang="en-US" altLang="ko-KR" sz="1200" b="1" dirty="0"/>
               <a:t>R2 : </a:t>
             </a:r>
             <a:r>
-              <a:rPr lang="en-US" altLang="ko-KR" sz="1000" dirty="0">
+              <a:rPr lang="en-US" altLang="ko-KR" sz="1200" dirty="0">
                 <a:solidFill>
                   <a:srgbClr val="FF0000"/>
                 </a:solidFill>
               </a:rPr>
               <a:t>0.6115</a:t>
             </a:r>
-            <a:endParaRPr lang="ko-KR" altLang="en-US" sz="1000" b="1" dirty="0"/>
+            <a:endParaRPr lang="ko-KR" altLang="en-US" sz="1200" b="1" dirty="0"/>
           </a:p>
         </p:txBody>
       </p:sp>
@@ -14216,8 +14790,8 @@
         </p:nvSpPr>
         <p:spPr>
           <a:xfrm>
-            <a:off x="6344256" y="3818074"/>
-            <a:ext cx="1175686" cy="246221"/>
+            <a:off x="6165275" y="3818074"/>
+            <a:ext cx="1354667" cy="276999"/>
           </a:xfrm>
           <a:prstGeom prst="rect">
             <a:avLst/>
@@ -14232,14 +14806,14 @@
           <a:p>
             <a:pPr algn="ctr" latinLnBrk="1"/>
             <a:r>
-              <a:rPr lang="en-US" altLang="ko-KR" sz="1000" b="1" dirty="0"/>
+              <a:rPr lang="en-US" altLang="ko-KR" sz="1200" b="1" dirty="0"/>
               <a:t>R2 : </a:t>
             </a:r>
             <a:r>
-              <a:rPr lang="en-US" altLang="ko-KR" sz="1000" dirty="0"/>
+              <a:rPr lang="en-US" altLang="ko-KR" sz="1200" dirty="0"/>
               <a:t>0.9577</a:t>
             </a:r>
-            <a:endParaRPr lang="ko-KR" altLang="en-US" sz="1000" b="1" dirty="0"/>
+            <a:endParaRPr lang="ko-KR" altLang="en-US" sz="1200" b="1" dirty="0"/>
           </a:p>
         </p:txBody>
       </p:sp>
@@ -14257,8 +14831,8 @@
         </p:nvSpPr>
         <p:spPr>
           <a:xfrm>
-            <a:off x="6351124" y="1812531"/>
-            <a:ext cx="1175686" cy="400110"/>
+            <a:off x="6172143" y="1812531"/>
+            <a:ext cx="1354667" cy="461665"/>
           </a:xfrm>
           <a:prstGeom prst="rect">
             <a:avLst/>
@@ -14273,22 +14847,22 @@
           <a:p>
             <a:pPr algn="ctr" latinLnBrk="1"/>
             <a:r>
-              <a:rPr lang="en-US" altLang="ko-KR" sz="1000" b="1" dirty="0"/>
+              <a:rPr lang="en-US" altLang="ko-KR" sz="1200" b="1" dirty="0"/>
               <a:t>R2 : </a:t>
             </a:r>
             <a:r>
-              <a:rPr lang="en-US" altLang="ko-KR" sz="1000" dirty="0">
+              <a:rPr lang="en-US" altLang="ko-KR" sz="1200" dirty="0">
                 <a:solidFill>
                   <a:srgbClr val="FF0000"/>
                 </a:solidFill>
               </a:rPr>
               <a:t>0.5130</a:t>
             </a:r>
-            <a:endParaRPr lang="ko-KR" altLang="en-US" sz="1000" dirty="0"/>
+            <a:endParaRPr lang="ko-KR" altLang="en-US" sz="1200" dirty="0"/>
           </a:p>
           <a:p>
             <a:pPr algn="ctr" latinLnBrk="1"/>
-            <a:endParaRPr lang="ko-KR" altLang="en-US" sz="1000" b="1" dirty="0"/>
+            <a:endParaRPr lang="ko-KR" altLang="en-US" sz="1200" b="1" dirty="0"/>
           </a:p>
         </p:txBody>
       </p:sp>
@@ -17864,10 +18438,10 @@
       </p:sp>
       <p:sp>
         <p:nvSpPr>
-          <p:cNvPr id="9" name="TextBox 8">
-            <a:extLst>
-              <a:ext uri="{FF2B5EF4-FFF2-40B4-BE49-F238E27FC236}">
-                <a16:creationId xmlns:a16="http://schemas.microsoft.com/office/drawing/2014/main" id="{40045DF9-201D-401D-B30E-AE2BD2A1BE08}"/>
+          <p:cNvPr id="11" name="TextBox 10">
+            <a:extLst>
+              <a:ext uri="{FF2B5EF4-FFF2-40B4-BE49-F238E27FC236}">
+                <a16:creationId xmlns:a16="http://schemas.microsoft.com/office/drawing/2014/main" id="{62133630-FB2D-41DD-A286-A0C97A4C9F7A}"/>
               </a:ext>
             </a:extLst>
           </p:cNvPr>
@@ -17876,8 +18450,8 @@
         </p:nvSpPr>
         <p:spPr>
           <a:xfrm>
-            <a:off x="0" y="431511"/>
-            <a:ext cx="2455334" cy="419101"/>
+            <a:off x="5018529" y="2914649"/>
+            <a:ext cx="6911003" cy="419101"/>
           </a:xfrm>
           <a:prstGeom prst="rect">
             <a:avLst/>
@@ -17994,22 +18568,58 @@
             </a:lvl9pPr>
           </a:lstStyle>
           <a:p>
-            <a:pPr marL="174625" indent="0" algn="dist">
+            <a:pPr marL="174625" indent="0">
               <a:buNone/>
             </a:pPr>
             <a:r>
-              <a:rPr lang="ko-KR" altLang="en-US" sz="1200" dirty="0"/>
-              <a:t>이전 모델 대비 </a:t>
-            </a:r>
-            <a:r>
-              <a:rPr lang="en-US" altLang="ko-KR" sz="1200" dirty="0"/>
-              <a:t>: </a:t>
-            </a:r>
-            <a:r>
-              <a:rPr lang="ko-KR" altLang="en-US" sz="1200" dirty="0"/>
-              <a:t>▲ 개선</a:t>
-            </a:r>
-            <a:endParaRPr lang="en-US" altLang="ko-KR" sz="1200" b="1" dirty="0">
+              <a:rPr lang="ko-KR" altLang="en-US" dirty="0"/>
+              <a:t>이전 모델 대비 평균 </a:t>
+            </a:r>
+            <a:r>
+              <a:rPr lang="en-US" altLang="ko-KR" dirty="0"/>
+              <a:t>R2   :  </a:t>
+            </a:r>
+            <a:r>
+              <a:rPr lang="ko-KR" altLang="en-US" dirty="0" err="1"/>
+              <a:t>궁내교</a:t>
+            </a:r>
+            <a:r>
+              <a:rPr lang="ko-KR" altLang="en-US" dirty="0"/>
+              <a:t>  </a:t>
+            </a:r>
+            <a:r>
+              <a:rPr lang="ko-KR" altLang="en-US" dirty="0">
+                <a:solidFill>
+                  <a:srgbClr val="FF0000"/>
+                </a:solidFill>
+              </a:rPr>
+              <a:t>▼ 저하  </a:t>
+            </a:r>
+            <a:r>
+              <a:rPr lang="en-US" altLang="ko-KR" dirty="0"/>
+              <a:t>( - 6.6% )  ,  </a:t>
+            </a:r>
+            <a:r>
+              <a:rPr lang="ko-KR" altLang="en-US" dirty="0" err="1"/>
+              <a:t>대곡교</a:t>
+            </a:r>
+            <a:r>
+              <a:rPr lang="ko-KR" altLang="en-US" dirty="0"/>
+              <a:t>  </a:t>
+            </a:r>
+            <a:r>
+              <a:rPr lang="ko-KR" altLang="en-US" dirty="0">
+                <a:solidFill>
+                  <a:srgbClr val="FF0000"/>
+                </a:solidFill>
+              </a:rPr>
+              <a:t>▲ 개선  </a:t>
+            </a:r>
+            <a:r>
+              <a:rPr lang="en-US" altLang="ko-KR" dirty="0"/>
+              <a:t>( +20.6% ) </a:t>
+            </a:r>
+            <a:endParaRPr lang="en-US" altLang="ko-KR" dirty="0">
               <a:solidFill>
                 <a:schemeClr val="bg2">
                   <a:lumMod val="50000"/>
@@ -18065,8 +18675,8 @@
         </p:nvSpPr>
         <p:spPr>
           <a:xfrm>
-            <a:off x="449914" y="5537725"/>
-            <a:ext cx="1175686" cy="246221"/>
+            <a:off x="241022" y="5537725"/>
+            <a:ext cx="1384578" cy="276999"/>
           </a:xfrm>
           <a:prstGeom prst="rect">
             <a:avLst/>
@@ -18081,10 +18691,10 @@
           <a:p>
             <a:pPr algn="ctr" latinLnBrk="1"/>
             <a:r>
-              <a:rPr lang="en-US" altLang="ko-KR" sz="1000" b="1" dirty="0"/>
+              <a:rPr lang="en-US" altLang="ko-KR" sz="1200" b="1" dirty="0"/>
               <a:t>testdata_230711</a:t>
             </a:r>
-            <a:endParaRPr lang="ko-KR" altLang="en-US" sz="1000" b="1" dirty="0"/>
+            <a:endParaRPr lang="ko-KR" altLang="en-US" sz="1200" b="1" dirty="0"/>
           </a:p>
         </p:txBody>
       </p:sp>
@@ -18102,8 +18712,8 @@
         </p:nvSpPr>
         <p:spPr>
           <a:xfrm>
-            <a:off x="453401" y="3552110"/>
-            <a:ext cx="1175686" cy="246221"/>
+            <a:off x="244509" y="3552110"/>
+            <a:ext cx="1384578" cy="276999"/>
           </a:xfrm>
           <a:prstGeom prst="rect">
             <a:avLst/>
@@ -18118,14 +18728,14 @@
           <a:p>
             <a:pPr latinLnBrk="1"/>
             <a:r>
-              <a:rPr lang="en-US" altLang="ko-KR" sz="1000" b="1" dirty="0" err="1"/>
+              <a:rPr lang="en-US" altLang="ko-KR" sz="1200" b="1" dirty="0" err="1"/>
               <a:t>testdata</a:t>
             </a:r>
             <a:r>
-              <a:rPr lang="en-US" altLang="ko-KR" sz="1000" b="1" dirty="0"/>
+              <a:rPr lang="en-US" altLang="ko-KR" sz="1200" b="1" dirty="0"/>
               <a:t>_ 220712</a:t>
             </a:r>
-            <a:endParaRPr lang="ko-KR" altLang="en-US" sz="1000" b="1" dirty="0"/>
+            <a:endParaRPr lang="ko-KR" altLang="en-US" sz="1200" b="1" dirty="0"/>
           </a:p>
         </p:txBody>
       </p:sp>
@@ -18143,8 +18753,8 @@
         </p:nvSpPr>
         <p:spPr>
           <a:xfrm>
-            <a:off x="449914" y="1566310"/>
-            <a:ext cx="1175686" cy="246221"/>
+            <a:off x="241022" y="1566310"/>
+            <a:ext cx="1384578" cy="276999"/>
           </a:xfrm>
           <a:prstGeom prst="rect">
             <a:avLst/>
@@ -18159,14 +18769,14 @@
           <a:p>
             <a:pPr algn="ctr" latinLnBrk="1"/>
             <a:r>
-              <a:rPr lang="en-US" altLang="ko-KR" sz="1000" b="1" dirty="0" err="1"/>
+              <a:rPr lang="en-US" altLang="ko-KR" sz="1200" b="1" dirty="0" err="1"/>
               <a:t>testdata</a:t>
             </a:r>
             <a:r>
-              <a:rPr lang="en-US" altLang="ko-KR" sz="1000" b="1" dirty="0"/>
+              <a:rPr lang="en-US" altLang="ko-KR" sz="1200" b="1" dirty="0"/>
               <a:t>_ 200802</a:t>
             </a:r>
-            <a:endParaRPr lang="ko-KR" altLang="en-US" sz="1000" b="1" dirty="0"/>
+            <a:endParaRPr lang="ko-KR" altLang="en-US" sz="1200" b="1" dirty="0"/>
           </a:p>
         </p:txBody>
       </p:sp>
@@ -18234,8 +18844,8 @@
         </p:nvSpPr>
         <p:spPr>
           <a:xfrm>
-            <a:off x="6344256" y="5503969"/>
-            <a:ext cx="1175686" cy="246221"/>
+            <a:off x="6135364" y="5503969"/>
+            <a:ext cx="1384578" cy="276999"/>
           </a:xfrm>
           <a:prstGeom prst="rect">
             <a:avLst/>
@@ -18250,10 +18860,10 @@
           <a:p>
             <a:pPr algn="ctr" latinLnBrk="1"/>
             <a:r>
-              <a:rPr lang="en-US" altLang="ko-KR" sz="1000" b="1" dirty="0"/>
+              <a:rPr lang="en-US" altLang="ko-KR" sz="1200" b="1" dirty="0"/>
               <a:t>testdata_250814</a:t>
             </a:r>
-            <a:endParaRPr lang="ko-KR" altLang="en-US" sz="1000" b="1" dirty="0"/>
+            <a:endParaRPr lang="ko-KR" altLang="en-US" sz="1200" b="1" dirty="0"/>
           </a:p>
         </p:txBody>
       </p:sp>
@@ -18271,8 +18881,8 @@
         </p:nvSpPr>
         <p:spPr>
           <a:xfrm>
-            <a:off x="6344256" y="3478697"/>
-            <a:ext cx="1175686" cy="246221"/>
+            <a:off x="6135364" y="3478697"/>
+            <a:ext cx="1384578" cy="276999"/>
           </a:xfrm>
           <a:prstGeom prst="rect">
             <a:avLst/>
@@ -18287,14 +18897,14 @@
           <a:p>
             <a:pPr latinLnBrk="1"/>
             <a:r>
-              <a:rPr lang="en-US" altLang="ko-KR" sz="1000" b="1" dirty="0" err="1"/>
+              <a:rPr lang="en-US" altLang="ko-KR" sz="1200" b="1" dirty="0" err="1"/>
               <a:t>testdata</a:t>
             </a:r>
             <a:r>
-              <a:rPr lang="en-US" altLang="ko-KR" sz="1000" b="1" dirty="0"/>
+              <a:rPr lang="en-US" altLang="ko-KR" sz="1200" b="1" dirty="0"/>
               <a:t>_ 250716</a:t>
             </a:r>
-            <a:endParaRPr lang="ko-KR" altLang="en-US" sz="1000" b="1" dirty="0"/>
+            <a:endParaRPr lang="ko-KR" altLang="en-US" sz="1200" b="1" dirty="0"/>
           </a:p>
         </p:txBody>
       </p:sp>
@@ -18312,8 +18922,8 @@
         </p:nvSpPr>
         <p:spPr>
           <a:xfrm>
-            <a:off x="6351124" y="1473154"/>
-            <a:ext cx="1175686" cy="246221"/>
+            <a:off x="6142232" y="1473154"/>
+            <a:ext cx="1384578" cy="276999"/>
           </a:xfrm>
           <a:prstGeom prst="rect">
             <a:avLst/>
@@ -18328,14 +18938,14 @@
           <a:p>
             <a:pPr algn="ctr" latinLnBrk="1"/>
             <a:r>
-              <a:rPr lang="en-US" altLang="ko-KR" sz="1000" b="1" dirty="0" err="1"/>
+              <a:rPr lang="en-US" altLang="ko-KR" sz="1200" b="1" dirty="0" err="1"/>
               <a:t>testdata</a:t>
             </a:r>
             <a:r>
-              <a:rPr lang="en-US" altLang="ko-KR" sz="1000" b="1" dirty="0"/>
+              <a:rPr lang="en-US" altLang="ko-KR" sz="1200" b="1" dirty="0"/>
               <a:t>_ 240723</a:t>
             </a:r>
-            <a:endParaRPr lang="ko-KR" altLang="en-US" sz="1000" b="1" dirty="0"/>
+            <a:endParaRPr lang="ko-KR" altLang="en-US" sz="1200" b="1" dirty="0"/>
           </a:p>
         </p:txBody>
       </p:sp>
@@ -19073,8 +19683,8 @@
         </p:nvSpPr>
         <p:spPr>
           <a:xfrm>
-            <a:off x="449914" y="5877102"/>
-            <a:ext cx="1175686" cy="246221"/>
+            <a:off x="241022" y="5877102"/>
+            <a:ext cx="1384578" cy="276999"/>
           </a:xfrm>
           <a:prstGeom prst="rect">
             <a:avLst/>
@@ -19089,14 +19699,14 @@
           <a:p>
             <a:pPr algn="ctr" latinLnBrk="1"/>
             <a:r>
-              <a:rPr lang="en-US" altLang="ko-KR" sz="1000" b="1" dirty="0"/>
+              <a:rPr lang="en-US" altLang="ko-KR" sz="1200" b="1" dirty="0"/>
               <a:t>R2 : </a:t>
             </a:r>
             <a:r>
-              <a:rPr lang="en-US" altLang="ko-KR" sz="1000" dirty="0"/>
+              <a:rPr lang="en-US" altLang="ko-KR" sz="1200" dirty="0"/>
               <a:t>0.8622</a:t>
             </a:r>
-            <a:endParaRPr lang="ko-KR" altLang="en-US" sz="1000" b="1" dirty="0"/>
+            <a:endParaRPr lang="ko-KR" altLang="en-US" sz="1200" b="1" dirty="0"/>
           </a:p>
         </p:txBody>
       </p:sp>
@@ -19114,8 +19724,8 @@
         </p:nvSpPr>
         <p:spPr>
           <a:xfrm>
-            <a:off x="453401" y="3891487"/>
-            <a:ext cx="1175686" cy="246221"/>
+            <a:off x="244509" y="3891487"/>
+            <a:ext cx="1384578" cy="276999"/>
           </a:xfrm>
           <a:prstGeom prst="rect">
             <a:avLst/>
@@ -19130,18 +19740,18 @@
           <a:p>
             <a:pPr algn="ctr" latinLnBrk="1"/>
             <a:r>
-              <a:rPr lang="en-US" altLang="ko-KR" sz="1000" b="1" dirty="0"/>
+              <a:rPr lang="en-US" altLang="ko-KR" sz="1200" b="1" dirty="0"/>
               <a:t>R2 : </a:t>
             </a:r>
             <a:r>
-              <a:rPr lang="en-US" altLang="ko-KR" sz="1000" dirty="0">
+              <a:rPr lang="en-US" altLang="ko-KR" sz="1200" dirty="0">
                 <a:solidFill>
                   <a:srgbClr val="FF0000"/>
                 </a:solidFill>
               </a:rPr>
               <a:t>0.4201</a:t>
             </a:r>
-            <a:endParaRPr lang="ko-KR" altLang="en-US" sz="1000" b="1" dirty="0"/>
+            <a:endParaRPr lang="ko-KR" altLang="en-US" sz="1200" b="1" dirty="0"/>
           </a:p>
         </p:txBody>
       </p:sp>
@@ -19159,8 +19769,8 @@
         </p:nvSpPr>
         <p:spPr>
           <a:xfrm>
-            <a:off x="449914" y="1905687"/>
-            <a:ext cx="1175686" cy="246221"/>
+            <a:off x="241022" y="1905687"/>
+            <a:ext cx="1384578" cy="276999"/>
           </a:xfrm>
           <a:prstGeom prst="rect">
             <a:avLst/>
@@ -19175,14 +19785,14 @@
           <a:p>
             <a:pPr algn="ctr" latinLnBrk="1"/>
             <a:r>
-              <a:rPr lang="en-US" altLang="ko-KR" sz="1000" b="1" dirty="0"/>
+              <a:rPr lang="en-US" altLang="ko-KR" sz="1200" b="1" dirty="0"/>
               <a:t>R2 : </a:t>
             </a:r>
             <a:r>
-              <a:rPr lang="en-US" altLang="ko-KR" sz="1000" dirty="0"/>
+              <a:rPr lang="en-US" altLang="ko-KR" sz="1200" dirty="0"/>
               <a:t>0.9656</a:t>
             </a:r>
-            <a:endParaRPr lang="ko-KR" altLang="en-US" sz="1000" b="1" dirty="0"/>
+            <a:endParaRPr lang="ko-KR" altLang="en-US" sz="1200" b="1" dirty="0"/>
           </a:p>
         </p:txBody>
       </p:sp>
@@ -19200,8 +19810,8 @@
         </p:nvSpPr>
         <p:spPr>
           <a:xfrm>
-            <a:off x="6344256" y="5843346"/>
-            <a:ext cx="1175686" cy="246221"/>
+            <a:off x="6135364" y="5843346"/>
+            <a:ext cx="1384578" cy="276999"/>
           </a:xfrm>
           <a:prstGeom prst="rect">
             <a:avLst/>
@@ -19216,18 +19826,18 @@
           <a:p>
             <a:pPr algn="ctr" latinLnBrk="1"/>
             <a:r>
-              <a:rPr lang="en-US" altLang="ko-KR" sz="1000" b="1" dirty="0"/>
+              <a:rPr lang="en-US" altLang="ko-KR" sz="1200" b="1" dirty="0"/>
               <a:t>R2 : </a:t>
             </a:r>
             <a:r>
-              <a:rPr lang="en-US" altLang="ko-KR" sz="1000" dirty="0">
+              <a:rPr lang="en-US" altLang="ko-KR" sz="1200" dirty="0">
                 <a:solidFill>
                   <a:srgbClr val="FF0000"/>
                 </a:solidFill>
               </a:rPr>
               <a:t>0.5087</a:t>
             </a:r>
-            <a:endParaRPr lang="ko-KR" altLang="en-US" sz="1000" b="1" dirty="0"/>
+            <a:endParaRPr lang="ko-KR" altLang="en-US" sz="1200" b="1" dirty="0"/>
           </a:p>
         </p:txBody>
       </p:sp>
@@ -19245,8 +19855,8 @@
         </p:nvSpPr>
         <p:spPr>
           <a:xfrm>
-            <a:off x="6344256" y="3818074"/>
-            <a:ext cx="1175686" cy="246221"/>
+            <a:off x="6135364" y="3818074"/>
+            <a:ext cx="1384578" cy="276999"/>
           </a:xfrm>
           <a:prstGeom prst="rect">
             <a:avLst/>
@@ -19261,18 +19871,18 @@
           <a:p>
             <a:pPr algn="ctr" latinLnBrk="1"/>
             <a:r>
-              <a:rPr lang="en-US" altLang="ko-KR" sz="1000" b="1" dirty="0"/>
+              <a:rPr lang="en-US" altLang="ko-KR" sz="1200" b="1" dirty="0"/>
               <a:t>R2 : </a:t>
             </a:r>
             <a:r>
-              <a:rPr lang="en-US" altLang="ko-KR" sz="1000" dirty="0">
+              <a:rPr lang="en-US" altLang="ko-KR" sz="1200" dirty="0">
                 <a:solidFill>
                   <a:srgbClr val="FF0000"/>
                 </a:solidFill>
               </a:rPr>
               <a:t>0.7947</a:t>
             </a:r>
-            <a:endParaRPr lang="ko-KR" altLang="en-US" sz="1000" b="1" dirty="0"/>
+            <a:endParaRPr lang="ko-KR" altLang="en-US" sz="1200" b="1" dirty="0"/>
           </a:p>
         </p:txBody>
       </p:sp>
@@ -19290,8 +19900,8 @@
         </p:nvSpPr>
         <p:spPr>
           <a:xfrm>
-            <a:off x="6351124" y="1812531"/>
-            <a:ext cx="1175686" cy="400110"/>
+            <a:off x="6142232" y="1812531"/>
+            <a:ext cx="1384578" cy="461665"/>
           </a:xfrm>
           <a:prstGeom prst="rect">
             <a:avLst/>
@@ -19306,22 +19916,22 @@
           <a:p>
             <a:pPr algn="ctr" latinLnBrk="1"/>
             <a:r>
-              <a:rPr lang="en-US" altLang="ko-KR" sz="1000" b="1" dirty="0"/>
+              <a:rPr lang="en-US" altLang="ko-KR" sz="1200" b="1" dirty="0"/>
               <a:t>R2 : </a:t>
             </a:r>
             <a:r>
-              <a:rPr lang="en-US" altLang="ko-KR" sz="1000" dirty="0">
+              <a:rPr lang="en-US" altLang="ko-KR" sz="1200" dirty="0">
                 <a:solidFill>
                   <a:srgbClr val="FF0000"/>
                 </a:solidFill>
               </a:rPr>
               <a:t>0.7308</a:t>
             </a:r>
-            <a:endParaRPr lang="pt-BR" altLang="ko-KR" sz="1000" dirty="0"/>
+            <a:endParaRPr lang="pt-BR" altLang="ko-KR" sz="1200" dirty="0"/>
           </a:p>
           <a:p>
             <a:pPr algn="ctr" latinLnBrk="1"/>
-            <a:endParaRPr lang="ko-KR" altLang="en-US" sz="1000" b="1" dirty="0"/>
+            <a:endParaRPr lang="ko-KR" altLang="en-US" sz="1200" b="1" dirty="0"/>
           </a:p>
         </p:txBody>
       </p:sp>
@@ -19369,8 +19979,8 @@
         </p:nvSpPr>
         <p:spPr>
           <a:xfrm>
-            <a:off x="449914" y="5537725"/>
-            <a:ext cx="1175686" cy="246221"/>
+            <a:off x="338667" y="5537725"/>
+            <a:ext cx="1286933" cy="276999"/>
           </a:xfrm>
           <a:prstGeom prst="rect">
             <a:avLst/>
@@ -19385,10 +19995,10 @@
           <a:p>
             <a:pPr algn="ctr" latinLnBrk="1"/>
             <a:r>
-              <a:rPr lang="en-US" altLang="ko-KR" sz="1000" b="1" dirty="0"/>
+              <a:rPr lang="en-US" altLang="ko-KR" sz="1200" b="1" dirty="0"/>
               <a:t>testdata_230711</a:t>
             </a:r>
-            <a:endParaRPr lang="ko-KR" altLang="en-US" sz="1000" b="1" dirty="0"/>
+            <a:endParaRPr lang="ko-KR" altLang="en-US" sz="1200" b="1" dirty="0"/>
           </a:p>
         </p:txBody>
       </p:sp>
@@ -19406,8 +20016,8 @@
         </p:nvSpPr>
         <p:spPr>
           <a:xfrm>
-            <a:off x="453401" y="3552110"/>
-            <a:ext cx="1175686" cy="246221"/>
+            <a:off x="342154" y="3552110"/>
+            <a:ext cx="1286933" cy="276999"/>
           </a:xfrm>
           <a:prstGeom prst="rect">
             <a:avLst/>
@@ -19422,14 +20032,14 @@
           <a:p>
             <a:pPr latinLnBrk="1"/>
             <a:r>
-              <a:rPr lang="en-US" altLang="ko-KR" sz="1000" b="1" dirty="0" err="1"/>
+              <a:rPr lang="en-US" altLang="ko-KR" sz="1200" b="1" dirty="0" err="1"/>
               <a:t>testdata</a:t>
             </a:r>
             <a:r>
-              <a:rPr lang="en-US" altLang="ko-KR" sz="1000" b="1" dirty="0"/>
+              <a:rPr lang="en-US" altLang="ko-KR" sz="1200" b="1" dirty="0"/>
               <a:t>_ 220712</a:t>
             </a:r>
-            <a:endParaRPr lang="ko-KR" altLang="en-US" sz="1000" b="1" dirty="0"/>
+            <a:endParaRPr lang="ko-KR" altLang="en-US" sz="1200" b="1" dirty="0"/>
           </a:p>
         </p:txBody>
       </p:sp>
@@ -19447,8 +20057,8 @@
         </p:nvSpPr>
         <p:spPr>
           <a:xfrm>
-            <a:off x="449914" y="1566310"/>
-            <a:ext cx="1175686" cy="246221"/>
+            <a:off x="338667" y="1566310"/>
+            <a:ext cx="1286933" cy="276999"/>
           </a:xfrm>
           <a:prstGeom prst="rect">
             <a:avLst/>
@@ -19463,14 +20073,14 @@
           <a:p>
             <a:pPr algn="ctr" latinLnBrk="1"/>
             <a:r>
-              <a:rPr lang="en-US" altLang="ko-KR" sz="1000" b="1" dirty="0" err="1"/>
+              <a:rPr lang="en-US" altLang="ko-KR" sz="1200" b="1" dirty="0" err="1"/>
               <a:t>testdata</a:t>
             </a:r>
             <a:r>
-              <a:rPr lang="en-US" altLang="ko-KR" sz="1000" b="1" dirty="0"/>
+              <a:rPr lang="en-US" altLang="ko-KR" sz="1200" b="1" dirty="0"/>
               <a:t>_ 200802</a:t>
             </a:r>
-            <a:endParaRPr lang="ko-KR" altLang="en-US" sz="1000" b="1" dirty="0"/>
+            <a:endParaRPr lang="ko-KR" altLang="en-US" sz="1200" b="1" dirty="0"/>
           </a:p>
         </p:txBody>
       </p:sp>
@@ -19538,8 +20148,8 @@
         </p:nvSpPr>
         <p:spPr>
           <a:xfrm>
-            <a:off x="6344256" y="5503969"/>
-            <a:ext cx="1175686" cy="246221"/>
+            <a:off x="6233009" y="5503969"/>
+            <a:ext cx="1286933" cy="276999"/>
           </a:xfrm>
           <a:prstGeom prst="rect">
             <a:avLst/>
@@ -19554,10 +20164,10 @@
           <a:p>
             <a:pPr algn="ctr" latinLnBrk="1"/>
             <a:r>
-              <a:rPr lang="en-US" altLang="ko-KR" sz="1000" b="1" dirty="0"/>
+              <a:rPr lang="en-US" altLang="ko-KR" sz="1200" b="1" dirty="0"/>
               <a:t>testdata_250814</a:t>
             </a:r>
-            <a:endParaRPr lang="ko-KR" altLang="en-US" sz="1000" b="1" dirty="0"/>
+            <a:endParaRPr lang="ko-KR" altLang="en-US" sz="1200" b="1" dirty="0"/>
           </a:p>
         </p:txBody>
       </p:sp>
@@ -19575,8 +20185,8 @@
         </p:nvSpPr>
         <p:spPr>
           <a:xfrm>
-            <a:off x="6344256" y="3478697"/>
-            <a:ext cx="1175686" cy="246221"/>
+            <a:off x="6233009" y="3478697"/>
+            <a:ext cx="1286933" cy="276999"/>
           </a:xfrm>
           <a:prstGeom prst="rect">
             <a:avLst/>
@@ -19591,14 +20201,14 @@
           <a:p>
             <a:pPr latinLnBrk="1"/>
             <a:r>
-              <a:rPr lang="en-US" altLang="ko-KR" sz="1000" b="1" dirty="0" err="1"/>
+              <a:rPr lang="en-US" altLang="ko-KR" sz="1200" b="1" dirty="0" err="1"/>
               <a:t>testdata</a:t>
             </a:r>
             <a:r>
-              <a:rPr lang="en-US" altLang="ko-KR" sz="1000" b="1" dirty="0"/>
+              <a:rPr lang="en-US" altLang="ko-KR" sz="1200" b="1" dirty="0"/>
               <a:t>_ 250716</a:t>
             </a:r>
-            <a:endParaRPr lang="ko-KR" altLang="en-US" sz="1000" b="1" dirty="0"/>
+            <a:endParaRPr lang="ko-KR" altLang="en-US" sz="1200" b="1" dirty="0"/>
           </a:p>
         </p:txBody>
       </p:sp>
@@ -19616,8 +20226,8 @@
         </p:nvSpPr>
         <p:spPr>
           <a:xfrm>
-            <a:off x="6351124" y="1473154"/>
-            <a:ext cx="1175686" cy="246221"/>
+            <a:off x="6239877" y="1473154"/>
+            <a:ext cx="1286933" cy="276999"/>
           </a:xfrm>
           <a:prstGeom prst="rect">
             <a:avLst/>
@@ -19632,14 +20242,14 @@
           <a:p>
             <a:pPr algn="ctr" latinLnBrk="1"/>
             <a:r>
-              <a:rPr lang="en-US" altLang="ko-KR" sz="1000" b="1" dirty="0" err="1"/>
+              <a:rPr lang="en-US" altLang="ko-KR" sz="1200" b="1" dirty="0" err="1"/>
               <a:t>testdata</a:t>
             </a:r>
             <a:r>
-              <a:rPr lang="en-US" altLang="ko-KR" sz="1000" b="1" dirty="0"/>
+              <a:rPr lang="en-US" altLang="ko-KR" sz="1200" b="1" dirty="0"/>
               <a:t>_ 240723</a:t>
             </a:r>
-            <a:endParaRPr lang="ko-KR" altLang="en-US" sz="1000" b="1" dirty="0"/>
+            <a:endParaRPr lang="ko-KR" altLang="en-US" sz="1200" b="1" dirty="0"/>
           </a:p>
         </p:txBody>
       </p:sp>
@@ -20380,8 +20990,8 @@
         </p:nvSpPr>
         <p:spPr>
           <a:xfrm>
-            <a:off x="449914" y="5877102"/>
-            <a:ext cx="1175686" cy="246221"/>
+            <a:off x="338667" y="5877102"/>
+            <a:ext cx="1286933" cy="276999"/>
           </a:xfrm>
           <a:prstGeom prst="rect">
             <a:avLst/>
@@ -20396,14 +21006,14 @@
           <a:p>
             <a:pPr algn="ctr" latinLnBrk="1"/>
             <a:r>
-              <a:rPr lang="en-US" altLang="ko-KR" sz="1000" b="1" dirty="0"/>
+              <a:rPr lang="en-US" altLang="ko-KR" sz="1200" b="1" dirty="0"/>
               <a:t>R2 : </a:t>
             </a:r>
             <a:r>
-              <a:rPr lang="en-US" altLang="ko-KR" sz="1000" dirty="0"/>
+              <a:rPr lang="en-US" altLang="ko-KR" sz="1200" dirty="0"/>
               <a:t>0.9252</a:t>
             </a:r>
-            <a:endParaRPr lang="ko-KR" altLang="en-US" sz="1000" b="1" dirty="0"/>
+            <a:endParaRPr lang="ko-KR" altLang="en-US" sz="1200" b="1" dirty="0"/>
           </a:p>
         </p:txBody>
       </p:sp>
@@ -20421,8 +21031,8 @@
         </p:nvSpPr>
         <p:spPr>
           <a:xfrm>
-            <a:off x="453401" y="3891487"/>
-            <a:ext cx="1175686" cy="246221"/>
+            <a:off x="342154" y="3891487"/>
+            <a:ext cx="1286933" cy="276999"/>
           </a:xfrm>
           <a:prstGeom prst="rect">
             <a:avLst/>
@@ -20437,14 +21047,14 @@
           <a:p>
             <a:pPr algn="ctr" latinLnBrk="1"/>
             <a:r>
-              <a:rPr lang="en-US" altLang="ko-KR" sz="1000" b="1" dirty="0"/>
+              <a:rPr lang="en-US" altLang="ko-KR" sz="1200" b="1" dirty="0"/>
               <a:t>R2 : </a:t>
             </a:r>
             <a:r>
-              <a:rPr lang="en-US" altLang="ko-KR" sz="1000" dirty="0"/>
+              <a:rPr lang="en-US" altLang="ko-KR" sz="1200" dirty="0"/>
               <a:t>0.8939</a:t>
             </a:r>
-            <a:endParaRPr lang="ko-KR" altLang="en-US" sz="1000" b="1" dirty="0"/>
+            <a:endParaRPr lang="ko-KR" altLang="en-US" sz="1200" b="1" dirty="0"/>
           </a:p>
         </p:txBody>
       </p:sp>
@@ -20462,8 +21072,8 @@
         </p:nvSpPr>
         <p:spPr>
           <a:xfrm>
-            <a:off x="449914" y="1905687"/>
-            <a:ext cx="1175686" cy="246221"/>
+            <a:off x="338667" y="1905687"/>
+            <a:ext cx="1286933" cy="276999"/>
           </a:xfrm>
           <a:prstGeom prst="rect">
             <a:avLst/>
@@ -20478,14 +21088,14 @@
           <a:p>
             <a:pPr algn="ctr" latinLnBrk="1"/>
             <a:r>
-              <a:rPr lang="en-US" altLang="ko-KR" sz="1000" b="1" dirty="0"/>
+              <a:rPr lang="en-US" altLang="ko-KR" sz="1200" b="1" dirty="0"/>
               <a:t>R2 : </a:t>
             </a:r>
             <a:r>
-              <a:rPr lang="en-US" altLang="ko-KR" sz="1000" dirty="0"/>
+              <a:rPr lang="en-US" altLang="ko-KR" sz="1200" dirty="0"/>
               <a:t>0.9086</a:t>
             </a:r>
-            <a:endParaRPr lang="ko-KR" altLang="en-US" sz="1000" b="1" dirty="0"/>
+            <a:endParaRPr lang="ko-KR" altLang="en-US" sz="1200" b="1" dirty="0"/>
           </a:p>
         </p:txBody>
       </p:sp>
@@ -20503,8 +21113,8 @@
         </p:nvSpPr>
         <p:spPr>
           <a:xfrm>
-            <a:off x="6344256" y="5843346"/>
-            <a:ext cx="1175686" cy="246221"/>
+            <a:off x="6233009" y="5843346"/>
+            <a:ext cx="1286933" cy="276999"/>
           </a:xfrm>
           <a:prstGeom prst="rect">
             <a:avLst/>
@@ -20519,18 +21129,18 @@
           <a:p>
             <a:pPr algn="ctr" latinLnBrk="1"/>
             <a:r>
-              <a:rPr lang="en-US" altLang="ko-KR" sz="1000" b="1" dirty="0"/>
+              <a:rPr lang="en-US" altLang="ko-KR" sz="1200" b="1" dirty="0"/>
               <a:t>R2 : </a:t>
             </a:r>
             <a:r>
-              <a:rPr lang="en-US" altLang="ko-KR" sz="1000" dirty="0">
+              <a:rPr lang="en-US" altLang="ko-KR" sz="1200" dirty="0">
                 <a:solidFill>
                   <a:srgbClr val="FF0000"/>
                 </a:solidFill>
               </a:rPr>
               <a:t>0.7833</a:t>
             </a:r>
-            <a:endParaRPr lang="ko-KR" altLang="en-US" sz="1000" b="1" dirty="0"/>
+            <a:endParaRPr lang="ko-KR" altLang="en-US" sz="1200" b="1" dirty="0"/>
           </a:p>
         </p:txBody>
       </p:sp>
@@ -20548,8 +21158,8 @@
         </p:nvSpPr>
         <p:spPr>
           <a:xfrm>
-            <a:off x="6344256" y="3818074"/>
-            <a:ext cx="1175686" cy="246221"/>
+            <a:off x="6233009" y="3818074"/>
+            <a:ext cx="1286933" cy="276999"/>
           </a:xfrm>
           <a:prstGeom prst="rect">
             <a:avLst/>
@@ -20564,14 +21174,14 @@
           <a:p>
             <a:pPr algn="ctr" latinLnBrk="1"/>
             <a:r>
-              <a:rPr lang="en-US" altLang="ko-KR" sz="1000" b="1" dirty="0"/>
+              <a:rPr lang="en-US" altLang="ko-KR" sz="1200" b="1" dirty="0"/>
               <a:t>R2 : </a:t>
             </a:r>
             <a:r>
-              <a:rPr lang="en-US" altLang="ko-KR" sz="1000" dirty="0"/>
+              <a:rPr lang="en-US" altLang="ko-KR" sz="1200" dirty="0"/>
               <a:t>0.9579</a:t>
             </a:r>
-            <a:endParaRPr lang="ko-KR" altLang="en-US" sz="1000" b="1" dirty="0"/>
+            <a:endParaRPr lang="ko-KR" altLang="en-US" sz="1200" b="1" dirty="0"/>
           </a:p>
         </p:txBody>
       </p:sp>
@@ -20589,8 +21199,8 @@
         </p:nvSpPr>
         <p:spPr>
           <a:xfrm>
-            <a:off x="6351124" y="1812531"/>
-            <a:ext cx="1175686" cy="400110"/>
+            <a:off x="6239877" y="1812531"/>
+            <a:ext cx="1286933" cy="461665"/>
           </a:xfrm>
           <a:prstGeom prst="rect">
             <a:avLst/>
@@ -20605,22 +21215,22 @@
           <a:p>
             <a:pPr algn="ctr" latinLnBrk="1"/>
             <a:r>
-              <a:rPr lang="en-US" altLang="ko-KR" sz="1000" b="1" dirty="0"/>
+              <a:rPr lang="en-US" altLang="ko-KR" sz="1200" b="1" dirty="0"/>
               <a:t>R2 : </a:t>
             </a:r>
             <a:r>
-              <a:rPr lang="en-US" altLang="ko-KR" sz="1000" dirty="0">
+              <a:rPr lang="en-US" altLang="ko-KR" sz="1200" dirty="0">
                 <a:solidFill>
                   <a:srgbClr val="FF0000"/>
                 </a:solidFill>
               </a:rPr>
               <a:t>0.6749</a:t>
             </a:r>
-            <a:endParaRPr lang="ko-KR" altLang="en-US" sz="1000" dirty="0"/>
+            <a:endParaRPr lang="ko-KR" altLang="en-US" sz="1200" dirty="0"/>
           </a:p>
           <a:p>
             <a:pPr algn="ctr" latinLnBrk="1"/>
-            <a:endParaRPr lang="ko-KR" altLang="en-US" sz="1000" b="1" dirty="0"/>
+            <a:endParaRPr lang="ko-KR" altLang="en-US" sz="1200" b="1" dirty="0"/>
           </a:p>
         </p:txBody>
       </p:sp>
@@ -22263,7 +22873,7 @@
           <p:nvPr>
             <p:extLst>
               <p:ext uri="{D42A27DB-BD31-4B8C-83A1-F6EECF244321}">
-                <p14:modId xmlns:p14="http://schemas.microsoft.com/office/powerpoint/2010/main" val="176605206"/>
+                <p14:modId xmlns:p14="http://schemas.microsoft.com/office/powerpoint/2010/main" val="3847204735"/>
               </p:ext>
             </p:extLst>
           </p:nvPr>
@@ -24007,10 +24617,10 @@
       </p:sp>
       <p:sp>
         <p:nvSpPr>
-          <p:cNvPr id="10" name="TextBox 9">
-            <a:extLst>
-              <a:ext uri="{FF2B5EF4-FFF2-40B4-BE49-F238E27FC236}">
-                <a16:creationId xmlns:a16="http://schemas.microsoft.com/office/drawing/2014/main" id="{3E59D834-EF4C-4611-80FC-2B50A64E0A4A}"/>
+          <p:cNvPr id="11" name="TextBox 10">
+            <a:extLst>
+              <a:ext uri="{FF2B5EF4-FFF2-40B4-BE49-F238E27FC236}">
+                <a16:creationId xmlns:a16="http://schemas.microsoft.com/office/drawing/2014/main" id="{36FEC554-E6CE-46CD-BFA8-01043C9B8D35}"/>
               </a:ext>
             </a:extLst>
           </p:cNvPr>
@@ -24019,8 +24629,8 @@
         </p:nvSpPr>
         <p:spPr>
           <a:xfrm>
-            <a:off x="0" y="431511"/>
-            <a:ext cx="2455334" cy="419101"/>
+            <a:off x="5018529" y="2914649"/>
+            <a:ext cx="6911003" cy="419101"/>
           </a:xfrm>
           <a:prstGeom prst="rect">
             <a:avLst/>
@@ -24137,22 +24747,58 @@
             </a:lvl9pPr>
           </a:lstStyle>
           <a:p>
-            <a:pPr marL="174625" indent="0" algn="dist">
+            <a:pPr marL="174625" indent="0">
               <a:buNone/>
             </a:pPr>
             <a:r>
-              <a:rPr lang="ko-KR" altLang="en-US" sz="1200" dirty="0"/>
-              <a:t>이전 모델 대비 </a:t>
-            </a:r>
-            <a:r>
-              <a:rPr lang="en-US" altLang="ko-KR" sz="1200" dirty="0"/>
-              <a:t>: </a:t>
-            </a:r>
-            <a:r>
-              <a:rPr lang="ko-KR" altLang="en-US" sz="1200" dirty="0"/>
-              <a:t>▲ 개선</a:t>
-            </a:r>
-            <a:endParaRPr lang="en-US" altLang="ko-KR" sz="1200" b="1" dirty="0">
+              <a:rPr lang="ko-KR" altLang="en-US" dirty="0"/>
+              <a:t>이전 모델 대비 평균 </a:t>
+            </a:r>
+            <a:r>
+              <a:rPr lang="en-US" altLang="ko-KR" dirty="0"/>
+              <a:t>R2   :  </a:t>
+            </a:r>
+            <a:r>
+              <a:rPr lang="ko-KR" altLang="en-US" dirty="0" err="1"/>
+              <a:t>궁내교</a:t>
+            </a:r>
+            <a:r>
+              <a:rPr lang="ko-KR" altLang="en-US" dirty="0"/>
+              <a:t> </a:t>
+            </a:r>
+            <a:r>
+              <a:rPr lang="ko-KR" altLang="en-US" dirty="0">
+                <a:solidFill>
+                  <a:srgbClr val="FF0000"/>
+                </a:solidFill>
+              </a:rPr>
+              <a:t>▲ 개선  </a:t>
+            </a:r>
+            <a:r>
+              <a:rPr lang="en-US" altLang="ko-KR" dirty="0"/>
+              <a:t>( +0.8% )  ,  </a:t>
+            </a:r>
+            <a:r>
+              <a:rPr lang="ko-KR" altLang="en-US" dirty="0" err="1"/>
+              <a:t>대곡교</a:t>
+            </a:r>
+            <a:r>
+              <a:rPr lang="ko-KR" altLang="en-US" dirty="0"/>
+              <a:t>  </a:t>
+            </a:r>
+            <a:r>
+              <a:rPr lang="ko-KR" altLang="en-US" dirty="0">
+                <a:solidFill>
+                  <a:srgbClr val="FF0000"/>
+                </a:solidFill>
+              </a:rPr>
+              <a:t>▲ 개선  </a:t>
+            </a:r>
+            <a:r>
+              <a:rPr lang="en-US" altLang="ko-KR" dirty="0"/>
+              <a:t>( +12.6% ) </a:t>
+            </a:r>
+            <a:endParaRPr lang="en-US" altLang="ko-KR" dirty="0">
               <a:solidFill>
                 <a:schemeClr val="bg2">
                   <a:lumMod val="50000"/>
@@ -24208,8 +24854,8 @@
         </p:nvSpPr>
         <p:spPr>
           <a:xfrm>
-            <a:off x="449914" y="5537725"/>
-            <a:ext cx="1175686" cy="246221"/>
+            <a:off x="330200" y="5537725"/>
+            <a:ext cx="1295400" cy="276999"/>
           </a:xfrm>
           <a:prstGeom prst="rect">
             <a:avLst/>
@@ -24224,10 +24870,10 @@
           <a:p>
             <a:pPr algn="ctr" latinLnBrk="1"/>
             <a:r>
-              <a:rPr lang="en-US" altLang="ko-KR" sz="1000" b="1" dirty="0"/>
+              <a:rPr lang="en-US" altLang="ko-KR" sz="1200" b="1" dirty="0"/>
               <a:t>testdata_230711</a:t>
             </a:r>
-            <a:endParaRPr lang="ko-KR" altLang="en-US" sz="1000" b="1" dirty="0"/>
+            <a:endParaRPr lang="ko-KR" altLang="en-US" sz="1200" b="1" dirty="0"/>
           </a:p>
         </p:txBody>
       </p:sp>
@@ -24245,8 +24891,8 @@
         </p:nvSpPr>
         <p:spPr>
           <a:xfrm>
-            <a:off x="453401" y="3552110"/>
-            <a:ext cx="1175686" cy="246221"/>
+            <a:off x="333687" y="3552110"/>
+            <a:ext cx="1295400" cy="276999"/>
           </a:xfrm>
           <a:prstGeom prst="rect">
             <a:avLst/>
@@ -24261,14 +24907,14 @@
           <a:p>
             <a:pPr latinLnBrk="1"/>
             <a:r>
-              <a:rPr lang="en-US" altLang="ko-KR" sz="1000" b="1" dirty="0" err="1"/>
+              <a:rPr lang="en-US" altLang="ko-KR" sz="1200" b="1" dirty="0" err="1"/>
               <a:t>testdata</a:t>
             </a:r>
             <a:r>
-              <a:rPr lang="en-US" altLang="ko-KR" sz="1000" b="1" dirty="0"/>
+              <a:rPr lang="en-US" altLang="ko-KR" sz="1200" b="1" dirty="0"/>
               <a:t>_ 220712</a:t>
             </a:r>
-            <a:endParaRPr lang="ko-KR" altLang="en-US" sz="1000" b="1" dirty="0"/>
+            <a:endParaRPr lang="ko-KR" altLang="en-US" sz="1200" b="1" dirty="0"/>
           </a:p>
         </p:txBody>
       </p:sp>
@@ -24286,8 +24932,8 @@
         </p:nvSpPr>
         <p:spPr>
           <a:xfrm>
-            <a:off x="449914" y="1566310"/>
-            <a:ext cx="1175686" cy="246221"/>
+            <a:off x="330200" y="1566310"/>
+            <a:ext cx="1295400" cy="276999"/>
           </a:xfrm>
           <a:prstGeom prst="rect">
             <a:avLst/>
@@ -24302,14 +24948,14 @@
           <a:p>
             <a:pPr algn="ctr" latinLnBrk="1"/>
             <a:r>
-              <a:rPr lang="en-US" altLang="ko-KR" sz="1000" b="1" dirty="0" err="1"/>
+              <a:rPr lang="en-US" altLang="ko-KR" sz="1200" b="1" dirty="0" err="1"/>
               <a:t>testdata</a:t>
             </a:r>
             <a:r>
-              <a:rPr lang="en-US" altLang="ko-KR" sz="1000" b="1" dirty="0"/>
+              <a:rPr lang="en-US" altLang="ko-KR" sz="1200" b="1" dirty="0"/>
               <a:t>_ 200802</a:t>
             </a:r>
-            <a:endParaRPr lang="ko-KR" altLang="en-US" sz="1000" b="1" dirty="0"/>
+            <a:endParaRPr lang="ko-KR" altLang="en-US" sz="1200" b="1" dirty="0"/>
           </a:p>
         </p:txBody>
       </p:sp>
@@ -24377,8 +25023,8 @@
         </p:nvSpPr>
         <p:spPr>
           <a:xfrm>
-            <a:off x="6344256" y="5503969"/>
-            <a:ext cx="1175686" cy="246221"/>
+            <a:off x="6224542" y="5503969"/>
+            <a:ext cx="1295400" cy="276999"/>
           </a:xfrm>
           <a:prstGeom prst="rect">
             <a:avLst/>
@@ -24393,10 +25039,10 @@
           <a:p>
             <a:pPr algn="ctr" latinLnBrk="1"/>
             <a:r>
-              <a:rPr lang="en-US" altLang="ko-KR" sz="1000" b="1" dirty="0"/>
+              <a:rPr lang="en-US" altLang="ko-KR" sz="1200" b="1" dirty="0"/>
               <a:t>testdata_250814</a:t>
             </a:r>
-            <a:endParaRPr lang="ko-KR" altLang="en-US" sz="1000" b="1" dirty="0"/>
+            <a:endParaRPr lang="ko-KR" altLang="en-US" sz="1200" b="1" dirty="0"/>
           </a:p>
         </p:txBody>
       </p:sp>
@@ -24414,8 +25060,8 @@
         </p:nvSpPr>
         <p:spPr>
           <a:xfrm>
-            <a:off x="6344256" y="3478697"/>
-            <a:ext cx="1175686" cy="246221"/>
+            <a:off x="6224542" y="3478697"/>
+            <a:ext cx="1295400" cy="276999"/>
           </a:xfrm>
           <a:prstGeom prst="rect">
             <a:avLst/>
@@ -24430,14 +25076,14 @@
           <a:p>
             <a:pPr latinLnBrk="1"/>
             <a:r>
-              <a:rPr lang="en-US" altLang="ko-KR" sz="1000" b="1" dirty="0" err="1"/>
+              <a:rPr lang="en-US" altLang="ko-KR" sz="1200" b="1" dirty="0" err="1"/>
               <a:t>testdata</a:t>
             </a:r>
             <a:r>
-              <a:rPr lang="en-US" altLang="ko-KR" sz="1000" b="1" dirty="0"/>
+              <a:rPr lang="en-US" altLang="ko-KR" sz="1200" b="1" dirty="0"/>
               <a:t>_ 250716</a:t>
             </a:r>
-            <a:endParaRPr lang="ko-KR" altLang="en-US" sz="1000" b="1" dirty="0"/>
+            <a:endParaRPr lang="ko-KR" altLang="en-US" sz="1200" b="1" dirty="0"/>
           </a:p>
         </p:txBody>
       </p:sp>
@@ -24455,8 +25101,8 @@
         </p:nvSpPr>
         <p:spPr>
           <a:xfrm>
-            <a:off x="6351124" y="1473154"/>
-            <a:ext cx="1175686" cy="246221"/>
+            <a:off x="6231410" y="1473154"/>
+            <a:ext cx="1295400" cy="276999"/>
           </a:xfrm>
           <a:prstGeom prst="rect">
             <a:avLst/>
@@ -24471,14 +25117,14 @@
           <a:p>
             <a:pPr algn="ctr" latinLnBrk="1"/>
             <a:r>
-              <a:rPr lang="en-US" altLang="ko-KR" sz="1000" b="1" dirty="0" err="1"/>
+              <a:rPr lang="en-US" altLang="ko-KR" sz="1200" b="1" dirty="0" err="1"/>
               <a:t>testdata</a:t>
             </a:r>
             <a:r>
-              <a:rPr lang="en-US" altLang="ko-KR" sz="1000" b="1" dirty="0"/>
+              <a:rPr lang="en-US" altLang="ko-KR" sz="1200" b="1" dirty="0"/>
               <a:t>_ 240723</a:t>
             </a:r>
-            <a:endParaRPr lang="ko-KR" altLang="en-US" sz="1000" b="1" dirty="0"/>
+            <a:endParaRPr lang="ko-KR" altLang="en-US" sz="1200" b="1" dirty="0"/>
           </a:p>
         </p:txBody>
       </p:sp>
@@ -25216,8 +25862,8 @@
         </p:nvSpPr>
         <p:spPr>
           <a:xfrm>
-            <a:off x="449914" y="5877102"/>
-            <a:ext cx="1175686" cy="246221"/>
+            <a:off x="330200" y="5877102"/>
+            <a:ext cx="1295400" cy="276999"/>
           </a:xfrm>
           <a:prstGeom prst="rect">
             <a:avLst/>
@@ -25232,14 +25878,14 @@
           <a:p>
             <a:pPr algn="ctr" latinLnBrk="1"/>
             <a:r>
-              <a:rPr lang="en-US" altLang="ko-KR" sz="1000" b="1" dirty="0"/>
+              <a:rPr lang="en-US" altLang="ko-KR" sz="1200" b="1" dirty="0"/>
               <a:t>R2 : </a:t>
             </a:r>
             <a:r>
-              <a:rPr lang="en-US" altLang="ko-KR" sz="1000" dirty="0"/>
+              <a:rPr lang="en-US" altLang="ko-KR" sz="1200" dirty="0"/>
               <a:t>0.8739</a:t>
             </a:r>
-            <a:endParaRPr lang="ko-KR" altLang="en-US" sz="1000" b="1" dirty="0"/>
+            <a:endParaRPr lang="ko-KR" altLang="en-US" sz="1200" b="1" dirty="0"/>
           </a:p>
         </p:txBody>
       </p:sp>
@@ -25257,8 +25903,8 @@
         </p:nvSpPr>
         <p:spPr>
           <a:xfrm>
-            <a:off x="453401" y="3891487"/>
-            <a:ext cx="1175686" cy="246221"/>
+            <a:off x="333687" y="3891487"/>
+            <a:ext cx="1295400" cy="276999"/>
           </a:xfrm>
           <a:prstGeom prst="rect">
             <a:avLst/>
@@ -25273,18 +25919,18 @@
           <a:p>
             <a:pPr algn="ctr" latinLnBrk="1"/>
             <a:r>
-              <a:rPr lang="en-US" altLang="ko-KR" sz="1000" b="1" dirty="0"/>
+              <a:rPr lang="en-US" altLang="ko-KR" sz="1200" b="1" dirty="0"/>
               <a:t>R2 : </a:t>
             </a:r>
             <a:r>
-              <a:rPr lang="en-US" altLang="ko-KR" sz="1000" dirty="0">
+              <a:rPr lang="en-US" altLang="ko-KR" sz="1200" dirty="0">
                 <a:solidFill>
                   <a:srgbClr val="FF0000"/>
                 </a:solidFill>
               </a:rPr>
               <a:t>0.5280</a:t>
             </a:r>
-            <a:endParaRPr lang="ko-KR" altLang="en-US" sz="1000" b="1" dirty="0"/>
+            <a:endParaRPr lang="ko-KR" altLang="en-US" sz="1200" b="1" dirty="0"/>
           </a:p>
         </p:txBody>
       </p:sp>
@@ -25302,8 +25948,8 @@
         </p:nvSpPr>
         <p:spPr>
           <a:xfrm>
-            <a:off x="449914" y="1905687"/>
-            <a:ext cx="1175686" cy="246221"/>
+            <a:off x="330200" y="1905687"/>
+            <a:ext cx="1295400" cy="276999"/>
           </a:xfrm>
           <a:prstGeom prst="rect">
             <a:avLst/>
@@ -25318,14 +25964,14 @@
           <a:p>
             <a:pPr algn="ctr" latinLnBrk="1"/>
             <a:r>
-              <a:rPr lang="en-US" altLang="ko-KR" sz="1000" b="1" dirty="0"/>
+              <a:rPr lang="en-US" altLang="ko-KR" sz="1200" b="1" dirty="0"/>
               <a:t>R2 : </a:t>
             </a:r>
             <a:r>
-              <a:rPr lang="en-US" altLang="ko-KR" sz="1000" dirty="0"/>
+              <a:rPr lang="en-US" altLang="ko-KR" sz="1200" dirty="0"/>
               <a:t>0.9436</a:t>
             </a:r>
-            <a:endParaRPr lang="ko-KR" altLang="en-US" sz="1000" b="1" dirty="0"/>
+            <a:endParaRPr lang="ko-KR" altLang="en-US" sz="1200" b="1" dirty="0"/>
           </a:p>
         </p:txBody>
       </p:sp>
@@ -25343,8 +25989,8 @@
         </p:nvSpPr>
         <p:spPr>
           <a:xfrm>
-            <a:off x="6344256" y="5843346"/>
-            <a:ext cx="1175686" cy="246221"/>
+            <a:off x="6224542" y="5843346"/>
+            <a:ext cx="1295400" cy="276999"/>
           </a:xfrm>
           <a:prstGeom prst="rect">
             <a:avLst/>
@@ -25359,18 +26005,18 @@
           <a:p>
             <a:pPr algn="ctr" latinLnBrk="1"/>
             <a:r>
-              <a:rPr lang="en-US" altLang="ko-KR" sz="1000" b="1" dirty="0"/>
+              <a:rPr lang="en-US" altLang="ko-KR" sz="1200" b="1" dirty="0"/>
               <a:t>R2 : </a:t>
             </a:r>
             <a:r>
-              <a:rPr lang="en-US" altLang="ko-KR" sz="1000" dirty="0">
+              <a:rPr lang="en-US" altLang="ko-KR" sz="1200" dirty="0">
                 <a:solidFill>
                   <a:srgbClr val="FF0000"/>
                 </a:solidFill>
               </a:rPr>
               <a:t>0.6947</a:t>
             </a:r>
-            <a:endParaRPr lang="ko-KR" altLang="en-US" sz="1000" b="1" dirty="0"/>
+            <a:endParaRPr lang="ko-KR" altLang="en-US" sz="1200" b="1" dirty="0"/>
           </a:p>
         </p:txBody>
       </p:sp>
@@ -25388,8 +26034,8 @@
         </p:nvSpPr>
         <p:spPr>
           <a:xfrm>
-            <a:off x="6344256" y="3818074"/>
-            <a:ext cx="1175686" cy="246221"/>
+            <a:off x="6224542" y="3818074"/>
+            <a:ext cx="1295400" cy="276999"/>
           </a:xfrm>
           <a:prstGeom prst="rect">
             <a:avLst/>
@@ -25404,14 +26050,14 @@
           <a:p>
             <a:pPr algn="ctr" latinLnBrk="1"/>
             <a:r>
-              <a:rPr lang="en-US" altLang="ko-KR" sz="1000" b="1" dirty="0"/>
+              <a:rPr lang="en-US" altLang="ko-KR" sz="1200" b="1" dirty="0"/>
               <a:t>R2 : </a:t>
             </a:r>
             <a:r>
-              <a:rPr lang="en-US" altLang="ko-KR" sz="1000" dirty="0"/>
+              <a:rPr lang="en-US" altLang="ko-KR" sz="1200" dirty="0"/>
               <a:t>0.8570</a:t>
             </a:r>
-            <a:endParaRPr lang="ko-KR" altLang="en-US" sz="1000" b="1" dirty="0"/>
+            <a:endParaRPr lang="ko-KR" altLang="en-US" sz="1200" b="1" dirty="0"/>
           </a:p>
         </p:txBody>
       </p:sp>
@@ -25429,8 +26075,8 @@
         </p:nvSpPr>
         <p:spPr>
           <a:xfrm>
-            <a:off x="6351124" y="1812531"/>
-            <a:ext cx="1175686" cy="246221"/>
+            <a:off x="6231410" y="1812531"/>
+            <a:ext cx="1295400" cy="276999"/>
           </a:xfrm>
           <a:prstGeom prst="rect">
             <a:avLst/>
@@ -25445,18 +26091,18 @@
           <a:p>
             <a:pPr algn="ctr" latinLnBrk="1"/>
             <a:r>
-              <a:rPr lang="en-US" altLang="ko-KR" sz="1000" b="1" dirty="0"/>
+              <a:rPr lang="en-US" altLang="ko-KR" sz="1200" b="1" dirty="0"/>
               <a:t>R2 : </a:t>
             </a:r>
             <a:r>
-              <a:rPr lang="en-US" altLang="ko-KR" sz="1000" dirty="0">
+              <a:rPr lang="en-US" altLang="ko-KR" sz="1200" dirty="0">
                 <a:solidFill>
                   <a:srgbClr val="FF0000"/>
                 </a:solidFill>
               </a:rPr>
               <a:t>0.7258</a:t>
             </a:r>
-            <a:endParaRPr lang="ko-KR" altLang="en-US" sz="1000" b="1" dirty="0"/>
+            <a:endParaRPr lang="ko-KR" altLang="en-US" sz="1200" b="1" dirty="0"/>
           </a:p>
         </p:txBody>
       </p:sp>
@@ -25504,8 +26150,8 @@
         </p:nvSpPr>
         <p:spPr>
           <a:xfrm>
-            <a:off x="449914" y="5537725"/>
-            <a:ext cx="1175686" cy="246221"/>
+            <a:off x="270933" y="5537725"/>
+            <a:ext cx="1354667" cy="276999"/>
           </a:xfrm>
           <a:prstGeom prst="rect">
             <a:avLst/>
@@ -25520,10 +26166,10 @@
           <a:p>
             <a:pPr algn="ctr" latinLnBrk="1"/>
             <a:r>
-              <a:rPr lang="en-US" altLang="ko-KR" sz="1000" b="1" dirty="0"/>
+              <a:rPr lang="en-US" altLang="ko-KR" sz="1200" b="1" dirty="0"/>
               <a:t>testdata_230711</a:t>
             </a:r>
-            <a:endParaRPr lang="ko-KR" altLang="en-US" sz="1000" b="1" dirty="0"/>
+            <a:endParaRPr lang="ko-KR" altLang="en-US" sz="1200" b="1" dirty="0"/>
           </a:p>
         </p:txBody>
       </p:sp>
@@ -25541,8 +26187,8 @@
         </p:nvSpPr>
         <p:spPr>
           <a:xfrm>
-            <a:off x="453401" y="3552110"/>
-            <a:ext cx="1175686" cy="246221"/>
+            <a:off x="274420" y="3552110"/>
+            <a:ext cx="1354667" cy="276999"/>
           </a:xfrm>
           <a:prstGeom prst="rect">
             <a:avLst/>
@@ -25557,14 +26203,14 @@
           <a:p>
             <a:pPr latinLnBrk="1"/>
             <a:r>
-              <a:rPr lang="en-US" altLang="ko-KR" sz="1000" b="1" dirty="0" err="1"/>
+              <a:rPr lang="en-US" altLang="ko-KR" sz="1200" b="1" dirty="0" err="1"/>
               <a:t>testdata</a:t>
             </a:r>
             <a:r>
-              <a:rPr lang="en-US" altLang="ko-KR" sz="1000" b="1" dirty="0"/>
+              <a:rPr lang="en-US" altLang="ko-KR" sz="1200" b="1" dirty="0"/>
               <a:t>_ 220712</a:t>
             </a:r>
-            <a:endParaRPr lang="ko-KR" altLang="en-US" sz="1000" b="1" dirty="0"/>
+            <a:endParaRPr lang="ko-KR" altLang="en-US" sz="1200" b="1" dirty="0"/>
           </a:p>
         </p:txBody>
       </p:sp>
@@ -25582,8 +26228,8 @@
         </p:nvSpPr>
         <p:spPr>
           <a:xfrm>
-            <a:off x="449914" y="1566310"/>
-            <a:ext cx="1175686" cy="246221"/>
+            <a:off x="270933" y="1566310"/>
+            <a:ext cx="1354667" cy="276999"/>
           </a:xfrm>
           <a:prstGeom prst="rect">
             <a:avLst/>
@@ -25598,14 +26244,14 @@
           <a:p>
             <a:pPr algn="ctr" latinLnBrk="1"/>
             <a:r>
-              <a:rPr lang="en-US" altLang="ko-KR" sz="1000" b="1" dirty="0" err="1"/>
+              <a:rPr lang="en-US" altLang="ko-KR" sz="1200" b="1" dirty="0" err="1"/>
               <a:t>testdata</a:t>
             </a:r>
             <a:r>
-              <a:rPr lang="en-US" altLang="ko-KR" sz="1000" b="1" dirty="0"/>
+              <a:rPr lang="en-US" altLang="ko-KR" sz="1200" b="1" dirty="0"/>
               <a:t>_ 200802</a:t>
             </a:r>
-            <a:endParaRPr lang="ko-KR" altLang="en-US" sz="1000" b="1" dirty="0"/>
+            <a:endParaRPr lang="ko-KR" altLang="en-US" sz="1200" b="1" dirty="0"/>
           </a:p>
         </p:txBody>
       </p:sp>
@@ -25673,8 +26319,8 @@
         </p:nvSpPr>
         <p:spPr>
           <a:xfrm>
-            <a:off x="6344256" y="5503969"/>
-            <a:ext cx="1175686" cy="246221"/>
+            <a:off x="6165275" y="5503969"/>
+            <a:ext cx="1354667" cy="276999"/>
           </a:xfrm>
           <a:prstGeom prst="rect">
             <a:avLst/>
@@ -25689,10 +26335,10 @@
           <a:p>
             <a:pPr algn="ctr" latinLnBrk="1"/>
             <a:r>
-              <a:rPr lang="en-US" altLang="ko-KR" sz="1000" b="1" dirty="0"/>
+              <a:rPr lang="en-US" altLang="ko-KR" sz="1200" b="1" dirty="0"/>
               <a:t>testdata_250814</a:t>
             </a:r>
-            <a:endParaRPr lang="ko-KR" altLang="en-US" sz="1000" b="1" dirty="0"/>
+            <a:endParaRPr lang="ko-KR" altLang="en-US" sz="1200" b="1" dirty="0"/>
           </a:p>
         </p:txBody>
       </p:sp>
@@ -25710,8 +26356,8 @@
         </p:nvSpPr>
         <p:spPr>
           <a:xfrm>
-            <a:off x="6344256" y="3478697"/>
-            <a:ext cx="1175686" cy="246221"/>
+            <a:off x="6165275" y="3478697"/>
+            <a:ext cx="1354667" cy="276999"/>
           </a:xfrm>
           <a:prstGeom prst="rect">
             <a:avLst/>
@@ -25726,14 +26372,14 @@
           <a:p>
             <a:pPr latinLnBrk="1"/>
             <a:r>
-              <a:rPr lang="en-US" altLang="ko-KR" sz="1000" b="1" dirty="0" err="1"/>
+              <a:rPr lang="en-US" altLang="ko-KR" sz="1200" b="1" dirty="0" err="1"/>
               <a:t>testdata</a:t>
             </a:r>
             <a:r>
-              <a:rPr lang="en-US" altLang="ko-KR" sz="1000" b="1" dirty="0"/>
+              <a:rPr lang="en-US" altLang="ko-KR" sz="1200" b="1" dirty="0"/>
               <a:t>_ 250716</a:t>
             </a:r>
-            <a:endParaRPr lang="ko-KR" altLang="en-US" sz="1000" b="1" dirty="0"/>
+            <a:endParaRPr lang="ko-KR" altLang="en-US" sz="1200" b="1" dirty="0"/>
           </a:p>
         </p:txBody>
       </p:sp>
@@ -25751,8 +26397,8 @@
         </p:nvSpPr>
         <p:spPr>
           <a:xfrm>
-            <a:off x="6351124" y="1473154"/>
-            <a:ext cx="1175686" cy="246221"/>
+            <a:off x="6172143" y="1473154"/>
+            <a:ext cx="1354667" cy="276999"/>
           </a:xfrm>
           <a:prstGeom prst="rect">
             <a:avLst/>
@@ -25767,14 +26413,14 @@
           <a:p>
             <a:pPr algn="ctr" latinLnBrk="1"/>
             <a:r>
-              <a:rPr lang="en-US" altLang="ko-KR" sz="1000" b="1" dirty="0" err="1"/>
+              <a:rPr lang="en-US" altLang="ko-KR" sz="1200" b="1" dirty="0" err="1"/>
               <a:t>testdata</a:t>
             </a:r>
             <a:r>
-              <a:rPr lang="en-US" altLang="ko-KR" sz="1000" b="1" dirty="0"/>
+              <a:rPr lang="en-US" altLang="ko-KR" sz="1200" b="1" dirty="0"/>
               <a:t>_ 240723</a:t>
             </a:r>
-            <a:endParaRPr lang="ko-KR" altLang="en-US" sz="1000" b="1" dirty="0"/>
+            <a:endParaRPr lang="ko-KR" altLang="en-US" sz="1200" b="1" dirty="0"/>
           </a:p>
         </p:txBody>
       </p:sp>
@@ -26626,8 +27272,8 @@
         </p:nvSpPr>
         <p:spPr>
           <a:xfrm>
-            <a:off x="449914" y="5877102"/>
-            <a:ext cx="1175686" cy="246221"/>
+            <a:off x="270933" y="5877102"/>
+            <a:ext cx="1354667" cy="276999"/>
           </a:xfrm>
           <a:prstGeom prst="rect">
             <a:avLst/>
@@ -26642,14 +27288,14 @@
           <a:p>
             <a:pPr algn="ctr" latinLnBrk="1"/>
             <a:r>
-              <a:rPr lang="en-US" altLang="ko-KR" sz="1000" b="1" dirty="0"/>
+              <a:rPr lang="en-US" altLang="ko-KR" sz="1200" b="1" dirty="0"/>
               <a:t>R2 : </a:t>
             </a:r>
             <a:r>
-              <a:rPr lang="en-US" altLang="ko-KR" sz="1000" dirty="0"/>
+              <a:rPr lang="en-US" altLang="ko-KR" sz="1200" dirty="0"/>
               <a:t>0.8354</a:t>
             </a:r>
-            <a:endParaRPr lang="ko-KR" altLang="en-US" sz="1000" b="1" dirty="0"/>
+            <a:endParaRPr lang="ko-KR" altLang="en-US" sz="1200" b="1" dirty="0"/>
           </a:p>
         </p:txBody>
       </p:sp>
@@ -26667,8 +27313,8 @@
         </p:nvSpPr>
         <p:spPr>
           <a:xfrm>
-            <a:off x="453401" y="3891487"/>
-            <a:ext cx="1175686" cy="246221"/>
+            <a:off x="274420" y="3891487"/>
+            <a:ext cx="1354667" cy="276999"/>
           </a:xfrm>
           <a:prstGeom prst="rect">
             <a:avLst/>
@@ -26683,14 +27329,14 @@
           <a:p>
             <a:pPr algn="ctr" latinLnBrk="1"/>
             <a:r>
-              <a:rPr lang="en-US" altLang="ko-KR" sz="1000" b="1" dirty="0"/>
+              <a:rPr lang="en-US" altLang="ko-KR" sz="1200" b="1" dirty="0"/>
               <a:t>R2 : </a:t>
             </a:r>
             <a:r>
-              <a:rPr lang="en-US" altLang="ko-KR" sz="1000" dirty="0"/>
+              <a:rPr lang="en-US" altLang="ko-KR" sz="1200" dirty="0"/>
               <a:t>0.9114</a:t>
             </a:r>
-            <a:endParaRPr lang="ko-KR" altLang="en-US" sz="1000" b="1" dirty="0"/>
+            <a:endParaRPr lang="ko-KR" altLang="en-US" sz="1200" b="1" dirty="0"/>
           </a:p>
         </p:txBody>
       </p:sp>
@@ -26708,8 +27354,8 @@
         </p:nvSpPr>
         <p:spPr>
           <a:xfrm>
-            <a:off x="449914" y="1905687"/>
-            <a:ext cx="1175686" cy="246221"/>
+            <a:off x="270933" y="1905687"/>
+            <a:ext cx="1354667" cy="276999"/>
           </a:xfrm>
           <a:prstGeom prst="rect">
             <a:avLst/>
@@ -26724,14 +27370,14 @@
           <a:p>
             <a:pPr algn="ctr" latinLnBrk="1"/>
             <a:r>
-              <a:rPr lang="en-US" altLang="ko-KR" sz="1000" b="1" dirty="0"/>
+              <a:rPr lang="en-US" altLang="ko-KR" sz="1200" b="1" dirty="0"/>
               <a:t>R2 : </a:t>
             </a:r>
             <a:r>
-              <a:rPr lang="en-US" altLang="ko-KR" sz="1000" dirty="0"/>
+              <a:rPr lang="en-US" altLang="ko-KR" sz="1200" dirty="0"/>
               <a:t>0.8583</a:t>
             </a:r>
-            <a:endParaRPr lang="ko-KR" altLang="en-US" sz="1000" b="1" dirty="0"/>
+            <a:endParaRPr lang="ko-KR" altLang="en-US" sz="1200" b="1" dirty="0"/>
           </a:p>
         </p:txBody>
       </p:sp>
@@ -26749,8 +27395,8 @@
         </p:nvSpPr>
         <p:spPr>
           <a:xfrm>
-            <a:off x="6344256" y="5843346"/>
-            <a:ext cx="1175686" cy="246221"/>
+            <a:off x="6165275" y="5843346"/>
+            <a:ext cx="1354667" cy="276999"/>
           </a:xfrm>
           <a:prstGeom prst="rect">
             <a:avLst/>
@@ -26765,18 +27411,18 @@
           <a:p>
             <a:pPr algn="ctr" latinLnBrk="1"/>
             <a:r>
-              <a:rPr lang="en-US" altLang="ko-KR" sz="1000" b="1" dirty="0"/>
+              <a:rPr lang="en-US" altLang="ko-KR" sz="1200" b="1" dirty="0"/>
               <a:t>R2 : </a:t>
             </a:r>
             <a:r>
-              <a:rPr lang="en-US" altLang="ko-KR" sz="1000" dirty="0">
+              <a:rPr lang="en-US" altLang="ko-KR" sz="1200" dirty="0">
                 <a:solidFill>
                   <a:srgbClr val="FF0000"/>
                 </a:solidFill>
               </a:rPr>
               <a:t>0.7191</a:t>
             </a:r>
-            <a:endParaRPr lang="ko-KR" altLang="en-US" sz="1000" b="1" dirty="0"/>
+            <a:endParaRPr lang="ko-KR" altLang="en-US" sz="1200" b="1" dirty="0"/>
           </a:p>
         </p:txBody>
       </p:sp>
@@ -26794,8 +27440,8 @@
         </p:nvSpPr>
         <p:spPr>
           <a:xfrm>
-            <a:off x="6344256" y="3818074"/>
-            <a:ext cx="1175686" cy="246221"/>
+            <a:off x="6165275" y="3818074"/>
+            <a:ext cx="1354667" cy="276999"/>
           </a:xfrm>
           <a:prstGeom prst="rect">
             <a:avLst/>
@@ -26810,14 +27456,14 @@
           <a:p>
             <a:pPr algn="ctr" latinLnBrk="1"/>
             <a:r>
-              <a:rPr lang="en-US" altLang="ko-KR" sz="1000" b="1" dirty="0"/>
+              <a:rPr lang="en-US" altLang="ko-KR" sz="1200" b="1" dirty="0"/>
               <a:t>R2 : </a:t>
             </a:r>
             <a:r>
-              <a:rPr lang="en-US" altLang="ko-KR" sz="1000" dirty="0"/>
+              <a:rPr lang="en-US" altLang="ko-KR" sz="1200" dirty="0"/>
               <a:t>0.9566</a:t>
             </a:r>
-            <a:endParaRPr lang="ko-KR" altLang="en-US" sz="1000" b="1" dirty="0"/>
+            <a:endParaRPr lang="ko-KR" altLang="en-US" sz="1200" b="1" dirty="0"/>
           </a:p>
         </p:txBody>
       </p:sp>
@@ -26835,8 +27481,8 @@
         </p:nvSpPr>
         <p:spPr>
           <a:xfrm>
-            <a:off x="6351124" y="1812531"/>
-            <a:ext cx="1175686" cy="400110"/>
+            <a:off x="6172143" y="1812531"/>
+            <a:ext cx="1354667" cy="461665"/>
           </a:xfrm>
           <a:prstGeom prst="rect">
             <a:avLst/>
@@ -26851,22 +27497,22 @@
           <a:p>
             <a:pPr algn="ctr" latinLnBrk="1"/>
             <a:r>
-              <a:rPr lang="en-US" altLang="ko-KR" sz="1000" b="1" dirty="0"/>
+              <a:rPr lang="en-US" altLang="ko-KR" sz="1200" b="1" dirty="0"/>
               <a:t>R2 : </a:t>
             </a:r>
             <a:r>
-              <a:rPr lang="en-US" altLang="ko-KR" sz="1000" dirty="0">
+              <a:rPr lang="en-US" altLang="ko-KR" sz="1200" dirty="0">
                 <a:solidFill>
                   <a:srgbClr val="FF0000"/>
                 </a:solidFill>
               </a:rPr>
               <a:t>0.5169</a:t>
             </a:r>
-            <a:endParaRPr lang="ko-KR" altLang="en-US" sz="1000" dirty="0"/>
+            <a:endParaRPr lang="ko-KR" altLang="en-US" sz="1200" dirty="0"/>
           </a:p>
           <a:p>
             <a:pPr algn="ctr" latinLnBrk="1"/>
-            <a:endParaRPr lang="ko-KR" altLang="en-US" sz="1000" b="1" dirty="0"/>
+            <a:endParaRPr lang="ko-KR" altLang="en-US" sz="1200" b="1" dirty="0"/>
           </a:p>
         </p:txBody>
       </p:sp>
@@ -26954,8 +27600,8 @@
         </p:nvSpPr>
         <p:spPr>
           <a:xfrm>
-            <a:off x="1775825" y="3048000"/>
-            <a:ext cx="8640350" cy="1020216"/>
+            <a:off x="1775825" y="3234266"/>
+            <a:ext cx="8640350" cy="1152688"/>
           </a:xfrm>
           <a:prstGeom prst="rect">
             <a:avLst/>
@@ -26976,24 +27622,24 @@
               <a:buChar char="•"/>
             </a:pPr>
             <a:r>
-              <a:rPr lang="ko-KR" altLang="en-US" sz="1400" b="1" dirty="0">
+              <a:rPr lang="ko-KR" altLang="en-US" sz="1600" b="1" dirty="0">
                 <a:latin typeface="+mj-ea"/>
               </a:rPr>
               <a:t>전체 강우 기반에서는 </a:t>
             </a:r>
             <a:r>
-              <a:rPr lang="en-US" altLang="ko-KR" sz="1400" b="1" dirty="0">
+              <a:rPr lang="en-US" altLang="ko-KR" sz="1600" b="1" dirty="0">
                 <a:latin typeface="+mj-ea"/>
               </a:rPr>
               <a:t>MAE </a:t>
             </a:r>
             <a:r>
-              <a:rPr lang="ko-KR" altLang="en-US" sz="1400" b="1" dirty="0">
+              <a:rPr lang="ko-KR" altLang="en-US" sz="1600" b="1" dirty="0">
                 <a:latin typeface="+mj-ea"/>
               </a:rPr>
               <a:t>모델이 가장 안정적인 일반화 성능을 보임</a:t>
             </a:r>
-            <a:endParaRPr lang="en-US" altLang="ko-KR" sz="1400" b="1" dirty="0">
+            <a:endParaRPr lang="en-US" altLang="ko-KR" sz="1600" b="1" dirty="0">
               <a:latin typeface="+mj-ea"/>
             </a:endParaRPr>
           </a:p>
@@ -27006,36 +27652,36 @@
               <a:buChar char="•"/>
             </a:pPr>
             <a:r>
-              <a:rPr lang="ko-KR" altLang="en-US" sz="1400" b="1" dirty="0">
+              <a:rPr lang="ko-KR" altLang="en-US" sz="1600" b="1" dirty="0">
                 <a:latin typeface="+mj-ea"/>
               </a:rPr>
               <a:t>누적 강우 </a:t>
             </a:r>
             <a:r>
-              <a:rPr lang="en-US" altLang="ko-KR" sz="1400" b="1" dirty="0">
+              <a:rPr lang="en-US" altLang="ko-KR" sz="1600" b="1" dirty="0">
                 <a:latin typeface="+mj-ea"/>
               </a:rPr>
               <a:t>110mm </a:t>
             </a:r>
             <a:r>
-              <a:rPr lang="ko-KR" altLang="en-US" sz="1400" b="1" dirty="0">
+              <a:rPr lang="ko-KR" altLang="en-US" sz="1600" b="1" dirty="0">
                 <a:latin typeface="+mj-ea"/>
               </a:rPr>
               <a:t>이상 모델은 소수 샘플 한계로 </a:t>
             </a:r>
             <a:r>
-              <a:rPr lang="ko-KR" altLang="en-US" sz="1400" b="1" dirty="0" err="1">
+              <a:rPr lang="ko-KR" altLang="en-US" sz="1600" b="1" dirty="0" err="1">
                 <a:latin typeface="+mj-ea"/>
               </a:rPr>
               <a:t>실운영</a:t>
             </a:r>
             <a:r>
-              <a:rPr lang="ko-KR" altLang="en-US" sz="1400" b="1" dirty="0">
+              <a:rPr lang="ko-KR" altLang="en-US" sz="1600" b="1" dirty="0">
                 <a:latin typeface="+mj-ea"/>
               </a:rPr>
               <a:t> 적용이 어려움</a:t>
             </a:r>
-            <a:endParaRPr lang="en-US" altLang="ko-KR" sz="1400" b="1" dirty="0">
+            <a:endParaRPr lang="en-US" altLang="ko-KR" sz="1600" b="1" dirty="0">
               <a:latin typeface="+mj-ea"/>
             </a:endParaRPr>
           </a:p>
@@ -27048,7 +27694,7 @@
               <a:buChar char="•"/>
             </a:pPr>
             <a:r>
-              <a:rPr lang="ko-KR" altLang="en-US" sz="1400" b="1" dirty="0">
+              <a:rPr lang="ko-KR" altLang="en-US" sz="1600" b="1" dirty="0">
                 <a:solidFill>
                   <a:srgbClr val="FF0000"/>
                 </a:solidFill>
@@ -27057,7 +27703,7 @@
               <a:t>관심 수위 이상 </a:t>
             </a:r>
             <a:r>
-              <a:rPr lang="en-US" altLang="ko-KR" sz="1400" b="1" dirty="0">
+              <a:rPr lang="en-US" altLang="ko-KR" sz="1600" b="1" dirty="0">
                 <a:solidFill>
                   <a:srgbClr val="FF0000"/>
                 </a:solidFill>
@@ -27066,7 +27712,7 @@
               <a:t>+ MAE + </a:t>
             </a:r>
             <a:r>
-              <a:rPr lang="ko-KR" altLang="en-US" sz="1400" b="1" dirty="0" err="1">
+              <a:rPr lang="ko-KR" altLang="en-US" sz="1600" b="1" dirty="0" err="1">
                 <a:solidFill>
                   <a:srgbClr val="FF0000"/>
                 </a:solidFill>
@@ -27075,7 +27721,7 @@
               <a:t>학습률</a:t>
             </a:r>
             <a:r>
-              <a:rPr lang="ko-KR" altLang="en-US" sz="1400" b="1" dirty="0">
+              <a:rPr lang="ko-KR" altLang="en-US" sz="1600" b="1" dirty="0">
                 <a:solidFill>
                   <a:srgbClr val="FF0000"/>
                 </a:solidFill>
@@ -27084,7 +27730,7 @@
               <a:t> </a:t>
             </a:r>
             <a:r>
-              <a:rPr lang="en-US" altLang="ko-KR" sz="1400" b="1" dirty="0">
+              <a:rPr lang="en-US" altLang="ko-KR" sz="1600" b="1" dirty="0">
                 <a:solidFill>
                   <a:srgbClr val="FF0000"/>
                 </a:solidFill>
@@ -27093,7 +27739,7 @@
               <a:t>0.0005</a:t>
             </a:r>
             <a:r>
-              <a:rPr lang="ko-KR" altLang="en-US" sz="1400" b="1" dirty="0">
+              <a:rPr lang="ko-KR" altLang="en-US" sz="1600" b="1" dirty="0">
                 <a:solidFill>
                   <a:srgbClr val="FF0000"/>
                 </a:solidFill>
@@ -27101,7 +27747,7 @@
               </a:rPr>
               <a:t> 모델이 피크 예측 성능에서 우수</a:t>
             </a:r>
-            <a:endParaRPr lang="en-US" altLang="ko-KR" sz="1400" b="1" dirty="0">
+            <a:endParaRPr lang="en-US" altLang="ko-KR" sz="1600" b="1" dirty="0">
               <a:solidFill>
                 <a:srgbClr val="FF0000"/>
               </a:solidFill>
@@ -30381,10 +31027,10 @@
       </p:sp>
       <p:sp>
         <p:nvSpPr>
-          <p:cNvPr id="9" name="TextBox 8">
-            <a:extLst>
-              <a:ext uri="{FF2B5EF4-FFF2-40B4-BE49-F238E27FC236}">
-                <a16:creationId xmlns:a16="http://schemas.microsoft.com/office/drawing/2014/main" id="{393112EA-52C6-4109-A21B-09F5A052E4E6}"/>
+          <p:cNvPr id="10" name="TextBox 9">
+            <a:extLst>
+              <a:ext uri="{FF2B5EF4-FFF2-40B4-BE49-F238E27FC236}">
+                <a16:creationId xmlns:a16="http://schemas.microsoft.com/office/drawing/2014/main" id="{93DEA449-DDEE-4743-8194-76E75A493958}"/>
               </a:ext>
             </a:extLst>
           </p:cNvPr>
@@ -30393,8 +31039,8 @@
         </p:nvSpPr>
         <p:spPr>
           <a:xfrm>
-            <a:off x="0" y="431511"/>
-            <a:ext cx="2455334" cy="419101"/>
+            <a:off x="5018530" y="2914649"/>
+            <a:ext cx="6877480" cy="419101"/>
           </a:xfrm>
           <a:prstGeom prst="rect">
             <a:avLst/>
@@ -30511,22 +31157,58 @@
             </a:lvl9pPr>
           </a:lstStyle>
           <a:p>
-            <a:pPr marL="174625" indent="0" algn="dist">
+            <a:pPr marL="174625" indent="0">
               <a:buNone/>
             </a:pPr>
             <a:r>
-              <a:rPr lang="ko-KR" altLang="en-US" sz="1200" dirty="0"/>
-              <a:t>이전 모델 대비 </a:t>
-            </a:r>
-            <a:r>
-              <a:rPr lang="en-US" altLang="ko-KR" sz="1200" dirty="0"/>
-              <a:t>: </a:t>
-            </a:r>
-            <a:r>
-              <a:rPr lang="ko-KR" altLang="en-US" sz="1200" dirty="0"/>
-              <a:t>▼ 저하</a:t>
-            </a:r>
-            <a:endParaRPr lang="en-US" altLang="ko-KR" sz="1200" dirty="0">
+              <a:rPr lang="ko-KR" altLang="en-US" dirty="0"/>
+              <a:t>이전 모델 대비 평균 </a:t>
+            </a:r>
+            <a:r>
+              <a:rPr lang="en-US" altLang="ko-KR" dirty="0"/>
+              <a:t>R2   :  </a:t>
+            </a:r>
+            <a:r>
+              <a:rPr lang="ko-KR" altLang="en-US" dirty="0" err="1"/>
+              <a:t>궁내교</a:t>
+            </a:r>
+            <a:r>
+              <a:rPr lang="ko-KR" altLang="en-US" dirty="0"/>
+              <a:t>  </a:t>
+            </a:r>
+            <a:r>
+              <a:rPr lang="ko-KR" altLang="en-US" dirty="0">
+                <a:solidFill>
+                  <a:srgbClr val="FF0000"/>
+                </a:solidFill>
+              </a:rPr>
+              <a:t>▼ 저하  </a:t>
+            </a:r>
+            <a:r>
+              <a:rPr lang="en-US" altLang="ko-KR" dirty="0"/>
+              <a:t>( -8.4% )  ,  </a:t>
+            </a:r>
+            <a:r>
+              <a:rPr lang="ko-KR" altLang="en-US" dirty="0" err="1"/>
+              <a:t>대곡교</a:t>
+            </a:r>
+            <a:r>
+              <a:rPr lang="ko-KR" altLang="en-US" dirty="0"/>
+              <a:t>  </a:t>
+            </a:r>
+            <a:r>
+              <a:rPr lang="ko-KR" altLang="en-US" dirty="0">
+                <a:solidFill>
+                  <a:srgbClr val="FF0000"/>
+                </a:solidFill>
+              </a:rPr>
+              <a:t>▼ 저하  </a:t>
+            </a:r>
+            <a:r>
+              <a:rPr lang="en-US" altLang="ko-KR" dirty="0"/>
+              <a:t>( -7.4% ) </a:t>
+            </a:r>
+            <a:endParaRPr lang="en-US" altLang="ko-KR" dirty="0">
               <a:solidFill>
                 <a:schemeClr val="bg2">
                   <a:lumMod val="50000"/>
@@ -30660,8 +31342,8 @@
         </p:nvSpPr>
         <p:spPr>
           <a:xfrm>
-            <a:off x="449914" y="5537725"/>
-            <a:ext cx="1175686" cy="246221"/>
+            <a:off x="330201" y="5537725"/>
+            <a:ext cx="1295400" cy="276999"/>
           </a:xfrm>
           <a:prstGeom prst="rect">
             <a:avLst/>
@@ -30676,10 +31358,10 @@
           <a:p>
             <a:pPr algn="ctr" latinLnBrk="1"/>
             <a:r>
-              <a:rPr lang="en-US" altLang="ko-KR" sz="1000" b="1" dirty="0"/>
+              <a:rPr lang="en-US" altLang="ko-KR" sz="1200" b="1" dirty="0"/>
               <a:t>testdata_230711</a:t>
             </a:r>
-            <a:endParaRPr lang="ko-KR" altLang="en-US" sz="1000" b="1" dirty="0"/>
+            <a:endParaRPr lang="ko-KR" altLang="en-US" sz="1200" b="1" dirty="0"/>
           </a:p>
         </p:txBody>
       </p:sp>
@@ -30736,8 +31418,8 @@
         </p:nvSpPr>
         <p:spPr>
           <a:xfrm>
-            <a:off x="453401" y="3552110"/>
-            <a:ext cx="1175686" cy="246221"/>
+            <a:off x="333688" y="3552110"/>
+            <a:ext cx="1295400" cy="276999"/>
           </a:xfrm>
           <a:prstGeom prst="rect">
             <a:avLst/>
@@ -30752,14 +31434,14 @@
           <a:p>
             <a:pPr latinLnBrk="1"/>
             <a:r>
-              <a:rPr lang="en-US" altLang="ko-KR" sz="1000" b="1" dirty="0" err="1"/>
+              <a:rPr lang="en-US" altLang="ko-KR" sz="1200" b="1" dirty="0" err="1"/>
               <a:t>testdata</a:t>
             </a:r>
             <a:r>
-              <a:rPr lang="en-US" altLang="ko-KR" sz="1000" b="1" dirty="0"/>
+              <a:rPr lang="en-US" altLang="ko-KR" sz="1200" b="1" dirty="0"/>
               <a:t>_ 220712</a:t>
             </a:r>
-            <a:endParaRPr lang="ko-KR" altLang="en-US" sz="1000" b="1" dirty="0"/>
+            <a:endParaRPr lang="ko-KR" altLang="en-US" sz="1200" b="1" dirty="0"/>
           </a:p>
         </p:txBody>
       </p:sp>
@@ -30993,8 +31675,8 @@
         </p:nvSpPr>
         <p:spPr>
           <a:xfrm>
-            <a:off x="449914" y="1566310"/>
-            <a:ext cx="1175686" cy="246221"/>
+            <a:off x="330201" y="1566310"/>
+            <a:ext cx="1295400" cy="276999"/>
           </a:xfrm>
           <a:prstGeom prst="rect">
             <a:avLst/>
@@ -31009,14 +31691,14 @@
           <a:p>
             <a:pPr algn="ctr" latinLnBrk="1"/>
             <a:r>
-              <a:rPr lang="en-US" altLang="ko-KR" sz="1000" b="1" dirty="0" err="1"/>
+              <a:rPr lang="en-US" altLang="ko-KR" sz="1200" b="1" dirty="0" err="1"/>
               <a:t>testdata</a:t>
             </a:r>
             <a:r>
-              <a:rPr lang="en-US" altLang="ko-KR" sz="1000" b="1" dirty="0"/>
+              <a:rPr lang="en-US" altLang="ko-KR" sz="1200" b="1" dirty="0"/>
               <a:t>_ 200802</a:t>
             </a:r>
-            <a:endParaRPr lang="ko-KR" altLang="en-US" sz="1000" b="1" dirty="0"/>
+            <a:endParaRPr lang="ko-KR" altLang="en-US" sz="1200" b="1" dirty="0"/>
           </a:p>
         </p:txBody>
       </p:sp>
@@ -31222,8 +31904,8 @@
         </p:nvSpPr>
         <p:spPr>
           <a:xfrm>
-            <a:off x="6344256" y="5503969"/>
-            <a:ext cx="1175686" cy="246221"/>
+            <a:off x="6224543" y="5503969"/>
+            <a:ext cx="1295400" cy="276999"/>
           </a:xfrm>
           <a:prstGeom prst="rect">
             <a:avLst/>
@@ -31238,10 +31920,10 @@
           <a:p>
             <a:pPr algn="ctr" latinLnBrk="1"/>
             <a:r>
-              <a:rPr lang="en-US" altLang="ko-KR" sz="1000" b="1" dirty="0"/>
+              <a:rPr lang="en-US" altLang="ko-KR" sz="1200" b="1" dirty="0"/>
               <a:t>testdata_250814</a:t>
             </a:r>
-            <a:endParaRPr lang="ko-KR" altLang="en-US" sz="1000" b="1" dirty="0"/>
+            <a:endParaRPr lang="ko-KR" altLang="en-US" sz="1200" b="1" dirty="0"/>
           </a:p>
         </p:txBody>
       </p:sp>
@@ -31298,8 +31980,8 @@
         </p:nvSpPr>
         <p:spPr>
           <a:xfrm>
-            <a:off x="6344256" y="3478697"/>
-            <a:ext cx="1175686" cy="246221"/>
+            <a:off x="6224543" y="3478697"/>
+            <a:ext cx="1295400" cy="276999"/>
           </a:xfrm>
           <a:prstGeom prst="rect">
             <a:avLst/>
@@ -31314,14 +31996,14 @@
           <a:p>
             <a:pPr latinLnBrk="1"/>
             <a:r>
-              <a:rPr lang="en-US" altLang="ko-KR" sz="1000" b="1" dirty="0" err="1"/>
+              <a:rPr lang="en-US" altLang="ko-KR" sz="1200" b="1" dirty="0" err="1"/>
               <a:t>testdata</a:t>
             </a:r>
             <a:r>
-              <a:rPr lang="en-US" altLang="ko-KR" sz="1000" b="1" dirty="0"/>
+              <a:rPr lang="en-US" altLang="ko-KR" sz="1200" b="1" dirty="0"/>
               <a:t>_ 250716</a:t>
             </a:r>
-            <a:endParaRPr lang="ko-KR" altLang="en-US" sz="1000" b="1" dirty="0"/>
+            <a:endParaRPr lang="ko-KR" altLang="en-US" sz="1200" b="1" dirty="0"/>
           </a:p>
         </p:txBody>
       </p:sp>
@@ -31558,8 +32240,8 @@
         </p:nvSpPr>
         <p:spPr>
           <a:xfrm>
-            <a:off x="6351124" y="1473154"/>
-            <a:ext cx="1175686" cy="246221"/>
+            <a:off x="6231411" y="1473154"/>
+            <a:ext cx="1295400" cy="276999"/>
           </a:xfrm>
           <a:prstGeom prst="rect">
             <a:avLst/>
@@ -31574,14 +32256,14 @@
           <a:p>
             <a:pPr algn="ctr" latinLnBrk="1"/>
             <a:r>
-              <a:rPr lang="en-US" altLang="ko-KR" sz="1000" b="1" dirty="0" err="1"/>
+              <a:rPr lang="en-US" altLang="ko-KR" sz="1200" b="1" dirty="0" err="1"/>
               <a:t>testdata</a:t>
             </a:r>
             <a:r>
-              <a:rPr lang="en-US" altLang="ko-KR" sz="1000" b="1" dirty="0"/>
+              <a:rPr lang="en-US" altLang="ko-KR" sz="1200" b="1" dirty="0"/>
               <a:t>_ 240723</a:t>
             </a:r>
-            <a:endParaRPr lang="ko-KR" altLang="en-US" sz="1000" b="1" dirty="0"/>
+            <a:endParaRPr lang="ko-KR" altLang="en-US" sz="1200" b="1" dirty="0"/>
           </a:p>
         </p:txBody>
       </p:sp>
@@ -31599,8 +32281,8 @@
         </p:nvSpPr>
         <p:spPr>
           <a:xfrm>
-            <a:off x="449914" y="5877102"/>
-            <a:ext cx="1175686" cy="246221"/>
+            <a:off x="330201" y="5877102"/>
+            <a:ext cx="1295400" cy="276999"/>
           </a:xfrm>
           <a:prstGeom prst="rect">
             <a:avLst/>
@@ -31615,11 +32297,11 @@
           <a:p>
             <a:pPr algn="ctr" latinLnBrk="1"/>
             <a:r>
-              <a:rPr lang="en-US" altLang="ko-KR" sz="1000" b="1" dirty="0"/>
+              <a:rPr lang="en-US" altLang="ko-KR" sz="1200" b="1" dirty="0"/>
               <a:t>R2 : </a:t>
             </a:r>
             <a:r>
-              <a:rPr lang="en-US" altLang="ko-KR" sz="1000" dirty="0">
+              <a:rPr lang="en-US" altLang="ko-KR" sz="1200" dirty="0">
                 <a:solidFill>
                   <a:srgbClr val="FF0000"/>
                 </a:solidFill>
@@ -31627,10 +32309,10 @@
               <a:t>0.6495</a:t>
             </a:r>
             <a:r>
-              <a:rPr lang="en-US" altLang="ko-KR" sz="1000" b="1" dirty="0"/>
+              <a:rPr lang="en-US" altLang="ko-KR" sz="1200" b="1" dirty="0"/>
               <a:t> </a:t>
             </a:r>
-            <a:endParaRPr lang="ko-KR" altLang="en-US" sz="1000" b="1" dirty="0"/>
+            <a:endParaRPr lang="ko-KR" altLang="en-US" sz="1200" b="1" dirty="0"/>
           </a:p>
         </p:txBody>
       </p:sp>
@@ -31648,8 +32330,8 @@
         </p:nvSpPr>
         <p:spPr>
           <a:xfrm>
-            <a:off x="453401" y="3891487"/>
-            <a:ext cx="1175686" cy="246221"/>
+            <a:off x="333688" y="3891487"/>
+            <a:ext cx="1295400" cy="276999"/>
           </a:xfrm>
           <a:prstGeom prst="rect">
             <a:avLst/>
@@ -31664,11 +32346,11 @@
           <a:p>
             <a:pPr algn="ctr" latinLnBrk="1"/>
             <a:r>
-              <a:rPr lang="en-US" altLang="ko-KR" sz="1000" b="1" dirty="0"/>
+              <a:rPr lang="en-US" altLang="ko-KR" sz="1200" b="1" dirty="0"/>
               <a:t>R2 : </a:t>
             </a:r>
             <a:r>
-              <a:rPr lang="en-US" altLang="ko-KR" sz="1000" dirty="0">
+              <a:rPr lang="en-US" altLang="ko-KR" sz="1200" dirty="0">
                 <a:solidFill>
                   <a:srgbClr val="FF0000"/>
                 </a:solidFill>
@@ -31676,10 +32358,10 @@
               <a:t>0.6552</a:t>
             </a:r>
             <a:r>
-              <a:rPr lang="en-US" altLang="ko-KR" sz="1000" b="1" dirty="0"/>
+              <a:rPr lang="en-US" altLang="ko-KR" sz="1200" b="1" dirty="0"/>
               <a:t> </a:t>
             </a:r>
-            <a:endParaRPr lang="ko-KR" altLang="en-US" sz="1000" b="1" dirty="0"/>
+            <a:endParaRPr lang="ko-KR" altLang="en-US" sz="1200" b="1" dirty="0"/>
           </a:p>
         </p:txBody>
       </p:sp>
@@ -31697,8 +32379,8 @@
         </p:nvSpPr>
         <p:spPr>
           <a:xfrm>
-            <a:off x="449914" y="1905687"/>
-            <a:ext cx="1175686" cy="246221"/>
+            <a:off x="330201" y="1905687"/>
+            <a:ext cx="1295400" cy="276999"/>
           </a:xfrm>
           <a:prstGeom prst="rect">
             <a:avLst/>
@@ -31713,14 +32395,14 @@
           <a:p>
             <a:pPr algn="ctr" latinLnBrk="1"/>
             <a:r>
-              <a:rPr lang="en-US" altLang="ko-KR" sz="1000" b="1" dirty="0"/>
+              <a:rPr lang="en-US" altLang="ko-KR" sz="1200" b="1" dirty="0"/>
               <a:t>R2 : </a:t>
             </a:r>
             <a:r>
-              <a:rPr lang="en-US" altLang="ko-KR" sz="1000" dirty="0"/>
+              <a:rPr lang="en-US" altLang="ko-KR" sz="1200" dirty="0"/>
               <a:t>0.8168</a:t>
             </a:r>
-            <a:endParaRPr lang="ko-KR" altLang="en-US" sz="1000" b="1" dirty="0"/>
+            <a:endParaRPr lang="ko-KR" altLang="en-US" sz="1200" b="1" dirty="0"/>
           </a:p>
         </p:txBody>
       </p:sp>
@@ -31738,8 +32420,8 @@
         </p:nvSpPr>
         <p:spPr>
           <a:xfrm>
-            <a:off x="6344256" y="5843346"/>
-            <a:ext cx="1175686" cy="246221"/>
+            <a:off x="6224543" y="5843346"/>
+            <a:ext cx="1295400" cy="276999"/>
           </a:xfrm>
           <a:prstGeom prst="rect">
             <a:avLst/>
@@ -31754,14 +32436,14 @@
           <a:p>
             <a:pPr algn="ctr" latinLnBrk="1"/>
             <a:r>
-              <a:rPr lang="en-US" altLang="ko-KR" sz="1000" b="1" dirty="0"/>
+              <a:rPr lang="en-US" altLang="ko-KR" sz="1200" b="1" dirty="0"/>
               <a:t>R2 : </a:t>
             </a:r>
             <a:r>
-              <a:rPr lang="en-US" altLang="ko-KR" sz="1000" dirty="0"/>
+              <a:rPr lang="en-US" altLang="ko-KR" sz="1200" dirty="0"/>
               <a:t>0.8467</a:t>
             </a:r>
-            <a:endParaRPr lang="ko-KR" altLang="en-US" sz="1000" b="1" dirty="0"/>
+            <a:endParaRPr lang="ko-KR" altLang="en-US" sz="1200" b="1" dirty="0"/>
           </a:p>
         </p:txBody>
       </p:sp>
@@ -31779,8 +32461,8 @@
         </p:nvSpPr>
         <p:spPr>
           <a:xfrm>
-            <a:off x="6344256" y="3818074"/>
-            <a:ext cx="1175686" cy="246221"/>
+            <a:off x="6224543" y="3818074"/>
+            <a:ext cx="1295400" cy="276999"/>
           </a:xfrm>
           <a:prstGeom prst="rect">
             <a:avLst/>
@@ -31795,18 +32477,18 @@
           <a:p>
             <a:pPr algn="ctr" latinLnBrk="1"/>
             <a:r>
-              <a:rPr lang="en-US" altLang="ko-KR" sz="1000" b="1" dirty="0"/>
+              <a:rPr lang="en-US" altLang="ko-KR" sz="1200" b="1" dirty="0"/>
               <a:t>R2 : </a:t>
             </a:r>
             <a:r>
-              <a:rPr lang="en-US" altLang="ko-KR" sz="1000" dirty="0">
+              <a:rPr lang="en-US" altLang="ko-KR" sz="1200" dirty="0">
                 <a:solidFill>
                   <a:srgbClr val="FF0000"/>
                 </a:solidFill>
               </a:rPr>
               <a:t>0.6917</a:t>
             </a:r>
-            <a:endParaRPr lang="ko-KR" altLang="en-US" sz="1000" b="1" dirty="0"/>
+            <a:endParaRPr lang="ko-KR" altLang="en-US" sz="1200" b="1" dirty="0"/>
           </a:p>
         </p:txBody>
       </p:sp>
@@ -31824,8 +32506,8 @@
         </p:nvSpPr>
         <p:spPr>
           <a:xfrm>
-            <a:off x="6351124" y="1812531"/>
-            <a:ext cx="1175686" cy="246221"/>
+            <a:off x="6231411" y="1812531"/>
+            <a:ext cx="1295400" cy="276999"/>
           </a:xfrm>
           <a:prstGeom prst="rect">
             <a:avLst/>
@@ -31840,11 +32522,11 @@
           <a:p>
             <a:pPr algn="ctr" latinLnBrk="1"/>
             <a:r>
-              <a:rPr lang="en-US" altLang="ko-KR" sz="1000" b="1" dirty="0"/>
+              <a:rPr lang="en-US" altLang="ko-KR" sz="1200" b="1" dirty="0"/>
               <a:t>R2 : </a:t>
             </a:r>
             <a:r>
-              <a:rPr lang="en-US" altLang="ko-KR" sz="1000" dirty="0">
+              <a:rPr lang="en-US" altLang="ko-KR" sz="1200" dirty="0">
                 <a:solidFill>
                   <a:srgbClr val="FF0000"/>
                 </a:solidFill>
@@ -31852,10 +32534,10 @@
               <a:t>0.5333</a:t>
             </a:r>
             <a:r>
-              <a:rPr lang="en-US" altLang="ko-KR" sz="1000" b="1" dirty="0"/>
+              <a:rPr lang="en-US" altLang="ko-KR" sz="1200" b="1" dirty="0"/>
               <a:t> </a:t>
             </a:r>
-            <a:endParaRPr lang="ko-KR" altLang="en-US" sz="1000" b="1" dirty="0"/>
+            <a:endParaRPr lang="ko-KR" altLang="en-US" sz="1200" b="1" dirty="0"/>
           </a:p>
         </p:txBody>
       </p:sp>
@@ -31903,8 +32585,8 @@
         </p:nvSpPr>
         <p:spPr>
           <a:xfrm>
-            <a:off x="449914" y="5537725"/>
-            <a:ext cx="1175686" cy="246221"/>
+            <a:off x="338667" y="5537725"/>
+            <a:ext cx="1286933" cy="276999"/>
           </a:xfrm>
           <a:prstGeom prst="rect">
             <a:avLst/>
@@ -31919,10 +32601,10 @@
           <a:p>
             <a:pPr algn="ctr" latinLnBrk="1"/>
             <a:r>
-              <a:rPr lang="en-US" altLang="ko-KR" sz="1000" b="1" dirty="0"/>
+              <a:rPr lang="en-US" altLang="ko-KR" sz="1200" b="1" dirty="0"/>
               <a:t>testdata_230711</a:t>
             </a:r>
-            <a:endParaRPr lang="ko-KR" altLang="en-US" sz="1000" b="1" dirty="0"/>
+            <a:endParaRPr lang="ko-KR" altLang="en-US" sz="1200" b="1" dirty="0"/>
           </a:p>
         </p:txBody>
       </p:sp>
@@ -31940,8 +32622,8 @@
         </p:nvSpPr>
         <p:spPr>
           <a:xfrm>
-            <a:off x="453401" y="3552110"/>
-            <a:ext cx="1175686" cy="246221"/>
+            <a:off x="342154" y="3552110"/>
+            <a:ext cx="1286933" cy="276999"/>
           </a:xfrm>
           <a:prstGeom prst="rect">
             <a:avLst/>
@@ -31956,14 +32638,14 @@
           <a:p>
             <a:pPr latinLnBrk="1"/>
             <a:r>
-              <a:rPr lang="en-US" altLang="ko-KR" sz="1000" b="1" dirty="0" err="1"/>
+              <a:rPr lang="en-US" altLang="ko-KR" sz="1200" b="1" dirty="0" err="1"/>
               <a:t>testdata</a:t>
             </a:r>
             <a:r>
-              <a:rPr lang="en-US" altLang="ko-KR" sz="1000" b="1" dirty="0"/>
+              <a:rPr lang="en-US" altLang="ko-KR" sz="1200" b="1" dirty="0"/>
               <a:t>_ 220712</a:t>
             </a:r>
-            <a:endParaRPr lang="ko-KR" altLang="en-US" sz="1000" b="1" dirty="0"/>
+            <a:endParaRPr lang="ko-KR" altLang="en-US" sz="1200" b="1" dirty="0"/>
           </a:p>
         </p:txBody>
       </p:sp>
@@ -31981,8 +32663,8 @@
         </p:nvSpPr>
         <p:spPr>
           <a:xfrm>
-            <a:off x="449914" y="1566310"/>
-            <a:ext cx="1175686" cy="246221"/>
+            <a:off x="338667" y="1566310"/>
+            <a:ext cx="1286933" cy="276999"/>
           </a:xfrm>
           <a:prstGeom prst="rect">
             <a:avLst/>
@@ -31997,14 +32679,14 @@
           <a:p>
             <a:pPr algn="ctr" latinLnBrk="1"/>
             <a:r>
-              <a:rPr lang="en-US" altLang="ko-KR" sz="1000" b="1" dirty="0" err="1"/>
+              <a:rPr lang="en-US" altLang="ko-KR" sz="1200" b="1" dirty="0" err="1"/>
               <a:t>testdata</a:t>
             </a:r>
             <a:r>
-              <a:rPr lang="en-US" altLang="ko-KR" sz="1000" b="1" dirty="0"/>
+              <a:rPr lang="en-US" altLang="ko-KR" sz="1200" b="1" dirty="0"/>
               <a:t>_ 200802</a:t>
             </a:r>
-            <a:endParaRPr lang="ko-KR" altLang="en-US" sz="1000" b="1" dirty="0"/>
+            <a:endParaRPr lang="ko-KR" altLang="en-US" sz="1200" b="1" dirty="0"/>
           </a:p>
         </p:txBody>
       </p:sp>
@@ -32132,8 +32814,8 @@
         </p:nvSpPr>
         <p:spPr>
           <a:xfrm>
-            <a:off x="6344256" y="5503969"/>
-            <a:ext cx="1175686" cy="246221"/>
+            <a:off x="6233009" y="5503969"/>
+            <a:ext cx="1286933" cy="276999"/>
           </a:xfrm>
           <a:prstGeom prst="rect">
             <a:avLst/>
@@ -32148,10 +32830,10 @@
           <a:p>
             <a:pPr algn="ctr" latinLnBrk="1"/>
             <a:r>
-              <a:rPr lang="en-US" altLang="ko-KR" sz="1000" b="1" dirty="0"/>
+              <a:rPr lang="en-US" altLang="ko-KR" sz="1200" b="1" dirty="0"/>
               <a:t>testdata_250814</a:t>
             </a:r>
-            <a:endParaRPr lang="ko-KR" altLang="en-US" sz="1000" b="1" dirty="0"/>
+            <a:endParaRPr lang="ko-KR" altLang="en-US" sz="1200" b="1" dirty="0"/>
           </a:p>
         </p:txBody>
       </p:sp>
@@ -32169,8 +32851,8 @@
         </p:nvSpPr>
         <p:spPr>
           <a:xfrm>
-            <a:off x="6344256" y="3478697"/>
-            <a:ext cx="1175686" cy="246221"/>
+            <a:off x="6233009" y="3478697"/>
+            <a:ext cx="1286933" cy="276999"/>
           </a:xfrm>
           <a:prstGeom prst="rect">
             <a:avLst/>
@@ -32185,14 +32867,14 @@
           <a:p>
             <a:pPr latinLnBrk="1"/>
             <a:r>
-              <a:rPr lang="en-US" altLang="ko-KR" sz="1000" b="1" dirty="0" err="1"/>
+              <a:rPr lang="en-US" altLang="ko-KR" sz="1200" b="1" dirty="0" err="1"/>
               <a:t>testdata</a:t>
             </a:r>
             <a:r>
-              <a:rPr lang="en-US" altLang="ko-KR" sz="1000" b="1" dirty="0"/>
+              <a:rPr lang="en-US" altLang="ko-KR" sz="1200" b="1" dirty="0"/>
               <a:t>_ 250716</a:t>
             </a:r>
-            <a:endParaRPr lang="ko-KR" altLang="en-US" sz="1000" b="1" dirty="0"/>
+            <a:endParaRPr lang="ko-KR" altLang="en-US" sz="1200" b="1" dirty="0"/>
           </a:p>
         </p:txBody>
       </p:sp>
@@ -32210,8 +32892,8 @@
         </p:nvSpPr>
         <p:spPr>
           <a:xfrm>
-            <a:off x="6351124" y="1473154"/>
-            <a:ext cx="1175686" cy="246221"/>
+            <a:off x="6239877" y="1473154"/>
+            <a:ext cx="1286933" cy="276999"/>
           </a:xfrm>
           <a:prstGeom prst="rect">
             <a:avLst/>
@@ -32226,14 +32908,14 @@
           <a:p>
             <a:pPr algn="ctr" latinLnBrk="1"/>
             <a:r>
-              <a:rPr lang="en-US" altLang="ko-KR" sz="1000" b="1" dirty="0" err="1"/>
+              <a:rPr lang="en-US" altLang="ko-KR" sz="1200" b="1" dirty="0" err="1"/>
               <a:t>testdata</a:t>
             </a:r>
             <a:r>
-              <a:rPr lang="en-US" altLang="ko-KR" sz="1000" b="1" dirty="0"/>
+              <a:rPr lang="en-US" altLang="ko-KR" sz="1200" b="1" dirty="0"/>
               <a:t>_ 240723</a:t>
             </a:r>
-            <a:endParaRPr lang="ko-KR" altLang="en-US" sz="1000" b="1" dirty="0"/>
+            <a:endParaRPr lang="ko-KR" altLang="en-US" sz="1200" b="1" dirty="0"/>
           </a:p>
         </p:txBody>
       </p:sp>
@@ -32887,8 +33569,8 @@
         </p:nvSpPr>
         <p:spPr>
           <a:xfrm>
-            <a:off x="449914" y="5877102"/>
-            <a:ext cx="1175686" cy="246221"/>
+            <a:off x="338667" y="5877102"/>
+            <a:ext cx="1286933" cy="276999"/>
           </a:xfrm>
           <a:prstGeom prst="rect">
             <a:avLst/>
@@ -32903,18 +33585,18 @@
           <a:p>
             <a:pPr algn="ctr" latinLnBrk="1"/>
             <a:r>
-              <a:rPr lang="en-US" altLang="ko-KR" sz="1000" b="1" dirty="0"/>
+              <a:rPr lang="en-US" altLang="ko-KR" sz="1200" b="1" dirty="0"/>
               <a:t>R2 : </a:t>
             </a:r>
             <a:r>
-              <a:rPr lang="en-US" altLang="ko-KR" sz="1000" dirty="0">
+              <a:rPr lang="en-US" altLang="ko-KR" sz="1200" dirty="0">
                 <a:solidFill>
                   <a:srgbClr val="FF0000"/>
                 </a:solidFill>
               </a:rPr>
               <a:t>0.6871</a:t>
             </a:r>
-            <a:endParaRPr lang="ko-KR" altLang="en-US" sz="1000" b="1" dirty="0"/>
+            <a:endParaRPr lang="ko-KR" altLang="en-US" sz="1200" b="1" dirty="0"/>
           </a:p>
         </p:txBody>
       </p:sp>
@@ -32932,8 +33614,8 @@
         </p:nvSpPr>
         <p:spPr>
           <a:xfrm>
-            <a:off x="453401" y="3891487"/>
-            <a:ext cx="1175686" cy="246221"/>
+            <a:off x="342154" y="3891487"/>
+            <a:ext cx="1286933" cy="276999"/>
           </a:xfrm>
           <a:prstGeom prst="rect">
             <a:avLst/>
@@ -32948,18 +33630,18 @@
           <a:p>
             <a:pPr algn="ctr" latinLnBrk="1"/>
             <a:r>
-              <a:rPr lang="en-US" altLang="ko-KR" sz="1000" b="1" dirty="0"/>
+              <a:rPr lang="en-US" altLang="ko-KR" sz="1200" b="1" dirty="0"/>
               <a:t>R2 : </a:t>
             </a:r>
             <a:r>
-              <a:rPr lang="en-US" altLang="ko-KR" sz="1000" dirty="0">
+              <a:rPr lang="en-US" altLang="ko-KR" sz="1200" dirty="0">
                 <a:solidFill>
                   <a:srgbClr val="FF0000"/>
                 </a:solidFill>
               </a:rPr>
               <a:t>0.1371</a:t>
             </a:r>
-            <a:endParaRPr lang="ko-KR" altLang="en-US" sz="1000" b="1" dirty="0"/>
+            <a:endParaRPr lang="ko-KR" altLang="en-US" sz="1200" b="1" dirty="0"/>
           </a:p>
         </p:txBody>
       </p:sp>
@@ -32977,8 +33659,8 @@
         </p:nvSpPr>
         <p:spPr>
           <a:xfrm>
-            <a:off x="449914" y="1905687"/>
-            <a:ext cx="1175686" cy="246221"/>
+            <a:off x="338667" y="1905687"/>
+            <a:ext cx="1286933" cy="276999"/>
           </a:xfrm>
           <a:prstGeom prst="rect">
             <a:avLst/>
@@ -32993,14 +33675,14 @@
           <a:p>
             <a:pPr algn="ctr" latinLnBrk="1"/>
             <a:r>
-              <a:rPr lang="en-US" altLang="ko-KR" sz="1000" b="1" dirty="0"/>
+              <a:rPr lang="en-US" altLang="ko-KR" sz="1200" b="1" dirty="0"/>
               <a:t>R2 : </a:t>
             </a:r>
             <a:r>
-              <a:rPr lang="en-US" altLang="ko-KR" sz="1000" dirty="0"/>
+              <a:rPr lang="en-US" altLang="ko-KR" sz="1200" dirty="0"/>
               <a:t>0.8220</a:t>
             </a:r>
-            <a:endParaRPr lang="ko-KR" altLang="en-US" sz="1000" b="1" dirty="0"/>
+            <a:endParaRPr lang="ko-KR" altLang="en-US" sz="1200" b="1" dirty="0"/>
           </a:p>
         </p:txBody>
       </p:sp>
@@ -33018,8 +33700,8 @@
         </p:nvSpPr>
         <p:spPr>
           <a:xfrm>
-            <a:off x="6344256" y="5843346"/>
-            <a:ext cx="1175686" cy="246221"/>
+            <a:off x="6233009" y="5843346"/>
+            <a:ext cx="1286933" cy="276999"/>
           </a:xfrm>
           <a:prstGeom prst="rect">
             <a:avLst/>
@@ -33034,18 +33716,18 @@
           <a:p>
             <a:pPr algn="ctr" latinLnBrk="1"/>
             <a:r>
-              <a:rPr lang="en-US" altLang="ko-KR" sz="1000" b="1" dirty="0"/>
+              <a:rPr lang="en-US" altLang="ko-KR" sz="1200" b="1" dirty="0"/>
               <a:t>R2 : </a:t>
             </a:r>
             <a:r>
-              <a:rPr lang="en-US" altLang="ko-KR" sz="1000" dirty="0">
+              <a:rPr lang="en-US" altLang="ko-KR" sz="1200" dirty="0">
                 <a:solidFill>
                   <a:srgbClr val="FF0000"/>
                 </a:solidFill>
               </a:rPr>
               <a:t>0.7143</a:t>
             </a:r>
-            <a:endParaRPr lang="ko-KR" altLang="en-US" sz="1000" b="1" dirty="0"/>
+            <a:endParaRPr lang="ko-KR" altLang="en-US" sz="1200" b="1" dirty="0"/>
           </a:p>
         </p:txBody>
       </p:sp>
@@ -33063,8 +33745,8 @@
         </p:nvSpPr>
         <p:spPr>
           <a:xfrm>
-            <a:off x="6344256" y="3818074"/>
-            <a:ext cx="1175686" cy="246221"/>
+            <a:off x="6233009" y="3818074"/>
+            <a:ext cx="1286933" cy="276999"/>
           </a:xfrm>
           <a:prstGeom prst="rect">
             <a:avLst/>
@@ -33079,14 +33761,14 @@
           <a:p>
             <a:pPr algn="ctr" latinLnBrk="1"/>
             <a:r>
-              <a:rPr lang="en-US" altLang="ko-KR" sz="1000" b="1" dirty="0"/>
+              <a:rPr lang="en-US" altLang="ko-KR" sz="1200" b="1" dirty="0"/>
               <a:t>R2 : </a:t>
             </a:r>
             <a:r>
-              <a:rPr lang="en-US" altLang="ko-KR" sz="1000" dirty="0"/>
+              <a:rPr lang="en-US" altLang="ko-KR" sz="1200" dirty="0"/>
               <a:t>0.8524</a:t>
             </a:r>
-            <a:endParaRPr lang="ko-KR" altLang="en-US" sz="1000" b="1" dirty="0"/>
+            <a:endParaRPr lang="ko-KR" altLang="en-US" sz="1200" b="1" dirty="0"/>
           </a:p>
         </p:txBody>
       </p:sp>
@@ -33104,8 +33786,8 @@
         </p:nvSpPr>
         <p:spPr>
           <a:xfrm>
-            <a:off x="6351124" y="1812531"/>
-            <a:ext cx="1175686" cy="400110"/>
+            <a:off x="6239877" y="1812531"/>
+            <a:ext cx="1286933" cy="461665"/>
           </a:xfrm>
           <a:prstGeom prst="rect">
             <a:avLst/>
@@ -33120,22 +33802,22 @@
           <a:p>
             <a:pPr algn="ctr" latinLnBrk="1"/>
             <a:r>
-              <a:rPr lang="en-US" altLang="ko-KR" sz="1000" b="1" dirty="0"/>
+              <a:rPr lang="en-US" altLang="ko-KR" sz="1200" b="1" dirty="0"/>
               <a:t>R2 : </a:t>
             </a:r>
             <a:r>
-              <a:rPr lang="en-US" altLang="ko-KR" sz="1000" dirty="0">
+              <a:rPr lang="en-US" altLang="ko-KR" sz="1200" dirty="0">
                 <a:solidFill>
                   <a:srgbClr val="FF0000"/>
                 </a:solidFill>
               </a:rPr>
               <a:t>-0.2634</a:t>
             </a:r>
-            <a:endParaRPr lang="ko-KR" altLang="en-US" sz="1000" dirty="0"/>
+            <a:endParaRPr lang="ko-KR" altLang="en-US" sz="1200" dirty="0"/>
           </a:p>
           <a:p>
             <a:pPr algn="ctr" latinLnBrk="1"/>
-            <a:endParaRPr lang="ko-KR" altLang="en-US" sz="1000" b="1" dirty="0"/>
+            <a:endParaRPr lang="ko-KR" altLang="en-US" sz="1200" b="1" dirty="0"/>
           </a:p>
         </p:txBody>
       </p:sp>
@@ -35051,10 +35733,10 @@
       </p:sp>
       <p:sp>
         <p:nvSpPr>
-          <p:cNvPr id="12" name="TextBox 11">
-            <a:extLst>
-              <a:ext uri="{FF2B5EF4-FFF2-40B4-BE49-F238E27FC236}">
-                <a16:creationId xmlns:a16="http://schemas.microsoft.com/office/drawing/2014/main" id="{80D0D07D-47A0-4F54-AA14-76475A666A01}"/>
+          <p:cNvPr id="11" name="TextBox 10">
+            <a:extLst>
+              <a:ext uri="{FF2B5EF4-FFF2-40B4-BE49-F238E27FC236}">
+                <a16:creationId xmlns:a16="http://schemas.microsoft.com/office/drawing/2014/main" id="{28CC2FD6-CBDF-4185-8EA1-EC2EB80DBF64}"/>
               </a:ext>
             </a:extLst>
           </p:cNvPr>
@@ -35063,8 +35745,8 @@
         </p:nvSpPr>
         <p:spPr>
           <a:xfrm>
-            <a:off x="0" y="431511"/>
-            <a:ext cx="2455334" cy="419101"/>
+            <a:off x="5018530" y="2914649"/>
+            <a:ext cx="6877480" cy="419101"/>
           </a:xfrm>
           <a:prstGeom prst="rect">
             <a:avLst/>
@@ -35181,22 +35863,58 @@
             </a:lvl9pPr>
           </a:lstStyle>
           <a:p>
-            <a:pPr marL="174625" indent="0" algn="dist">
+            <a:pPr marL="174625" indent="0">
               <a:buNone/>
             </a:pPr>
             <a:r>
-              <a:rPr lang="ko-KR" altLang="en-US" sz="1200" dirty="0"/>
-              <a:t>이전 모델 대비 </a:t>
-            </a:r>
-            <a:r>
-              <a:rPr lang="en-US" altLang="ko-KR" sz="1200" dirty="0"/>
-              <a:t>: </a:t>
-            </a:r>
-            <a:r>
-              <a:rPr lang="ko-KR" altLang="en-US" sz="1200" dirty="0"/>
-              <a:t>● 유사 </a:t>
-            </a:r>
-            <a:endParaRPr lang="en-US" altLang="ko-KR" sz="1200" dirty="0">
+              <a:rPr lang="ko-KR" altLang="en-US" dirty="0"/>
+              <a:t>이전 모델 대비 평균 </a:t>
+            </a:r>
+            <a:r>
+              <a:rPr lang="en-US" altLang="ko-KR" dirty="0"/>
+              <a:t>R2   :  </a:t>
+            </a:r>
+            <a:r>
+              <a:rPr lang="ko-KR" altLang="en-US" dirty="0" err="1"/>
+              <a:t>궁내교</a:t>
+            </a:r>
+            <a:r>
+              <a:rPr lang="ko-KR" altLang="en-US" dirty="0"/>
+              <a:t>  </a:t>
+            </a:r>
+            <a:r>
+              <a:rPr lang="ko-KR" altLang="en-US" dirty="0">
+                <a:solidFill>
+                  <a:srgbClr val="FF0000"/>
+                </a:solidFill>
+              </a:rPr>
+              <a:t>▼ 저하  </a:t>
+            </a:r>
+            <a:r>
+              <a:rPr lang="en-US" altLang="ko-KR" dirty="0"/>
+              <a:t>( -10.6% )  ,  </a:t>
+            </a:r>
+            <a:r>
+              <a:rPr lang="ko-KR" altLang="en-US" dirty="0" err="1"/>
+              <a:t>대곡교</a:t>
+            </a:r>
+            <a:r>
+              <a:rPr lang="ko-KR" altLang="en-US" dirty="0"/>
+              <a:t>  </a:t>
+            </a:r>
+            <a:r>
+              <a:rPr lang="ko-KR" altLang="en-US" dirty="0">
+                <a:solidFill>
+                  <a:srgbClr val="FF0000"/>
+                </a:solidFill>
+              </a:rPr>
+              <a:t>▼ 저하  </a:t>
+            </a:r>
+            <a:r>
+              <a:rPr lang="en-US" altLang="ko-KR" dirty="0"/>
+              <a:t>( -1.1% ) </a:t>
+            </a:r>
+            <a:endParaRPr lang="en-US" altLang="ko-KR" dirty="0">
               <a:solidFill>
                 <a:schemeClr val="bg2">
                   <a:lumMod val="50000"/>
@@ -35252,8 +35970,8 @@
         </p:nvSpPr>
         <p:spPr>
           <a:xfrm>
-            <a:off x="449914" y="5537725"/>
-            <a:ext cx="1175686" cy="246221"/>
+            <a:off x="338667" y="5537725"/>
+            <a:ext cx="1286933" cy="276999"/>
           </a:xfrm>
           <a:prstGeom prst="rect">
             <a:avLst/>
@@ -35268,10 +35986,10 @@
           <a:p>
             <a:pPr algn="ctr" latinLnBrk="1"/>
             <a:r>
-              <a:rPr lang="en-US" altLang="ko-KR" sz="1000" b="1" dirty="0"/>
+              <a:rPr lang="en-US" altLang="ko-KR" sz="1200" b="1" dirty="0"/>
               <a:t>testdata_230711</a:t>
             </a:r>
-            <a:endParaRPr lang="ko-KR" altLang="en-US" sz="1000" b="1" dirty="0"/>
+            <a:endParaRPr lang="ko-KR" altLang="en-US" sz="1200" b="1" dirty="0"/>
           </a:p>
         </p:txBody>
       </p:sp>
@@ -35289,8 +36007,8 @@
         </p:nvSpPr>
         <p:spPr>
           <a:xfrm>
-            <a:off x="453401" y="3552110"/>
-            <a:ext cx="1175686" cy="246221"/>
+            <a:off x="342154" y="3552110"/>
+            <a:ext cx="1286933" cy="276999"/>
           </a:xfrm>
           <a:prstGeom prst="rect">
             <a:avLst/>
@@ -35305,14 +36023,14 @@
           <a:p>
             <a:pPr latinLnBrk="1"/>
             <a:r>
-              <a:rPr lang="en-US" altLang="ko-KR" sz="1000" b="1" dirty="0" err="1"/>
+              <a:rPr lang="en-US" altLang="ko-KR" sz="1200" b="1" dirty="0" err="1"/>
               <a:t>testdata</a:t>
             </a:r>
             <a:r>
-              <a:rPr lang="en-US" altLang="ko-KR" sz="1000" b="1" dirty="0"/>
+              <a:rPr lang="en-US" altLang="ko-KR" sz="1200" b="1" dirty="0"/>
               <a:t>_ 220712</a:t>
             </a:r>
-            <a:endParaRPr lang="ko-KR" altLang="en-US" sz="1000" b="1" dirty="0"/>
+            <a:endParaRPr lang="ko-KR" altLang="en-US" sz="1200" b="1" dirty="0"/>
           </a:p>
         </p:txBody>
       </p:sp>
@@ -35330,8 +36048,8 @@
         </p:nvSpPr>
         <p:spPr>
           <a:xfrm>
-            <a:off x="449914" y="1566310"/>
-            <a:ext cx="1175686" cy="246221"/>
+            <a:off x="338667" y="1566310"/>
+            <a:ext cx="1286933" cy="276999"/>
           </a:xfrm>
           <a:prstGeom prst="rect">
             <a:avLst/>
@@ -35346,14 +36064,14 @@
           <a:p>
             <a:pPr algn="ctr" latinLnBrk="1"/>
             <a:r>
-              <a:rPr lang="en-US" altLang="ko-KR" sz="1000" b="1" dirty="0" err="1"/>
+              <a:rPr lang="en-US" altLang="ko-KR" sz="1200" b="1" dirty="0" err="1"/>
               <a:t>testdata</a:t>
             </a:r>
             <a:r>
-              <a:rPr lang="en-US" altLang="ko-KR" sz="1000" b="1" dirty="0"/>
+              <a:rPr lang="en-US" altLang="ko-KR" sz="1200" b="1" dirty="0"/>
               <a:t>_ 200802</a:t>
             </a:r>
-            <a:endParaRPr lang="ko-KR" altLang="en-US" sz="1000" b="1" dirty="0"/>
+            <a:endParaRPr lang="ko-KR" altLang="en-US" sz="1200" b="1" dirty="0"/>
           </a:p>
         </p:txBody>
       </p:sp>
@@ -35481,8 +36199,8 @@
         </p:nvSpPr>
         <p:spPr>
           <a:xfrm>
-            <a:off x="6344256" y="5503969"/>
-            <a:ext cx="1175686" cy="246221"/>
+            <a:off x="6233009" y="5503969"/>
+            <a:ext cx="1286933" cy="276999"/>
           </a:xfrm>
           <a:prstGeom prst="rect">
             <a:avLst/>
@@ -35497,10 +36215,10 @@
           <a:p>
             <a:pPr algn="ctr" latinLnBrk="1"/>
             <a:r>
-              <a:rPr lang="en-US" altLang="ko-KR" sz="1000" b="1" dirty="0"/>
+              <a:rPr lang="en-US" altLang="ko-KR" sz="1200" b="1" dirty="0"/>
               <a:t>testdata_250814</a:t>
             </a:r>
-            <a:endParaRPr lang="ko-KR" altLang="en-US" sz="1000" b="1" dirty="0"/>
+            <a:endParaRPr lang="ko-KR" altLang="en-US" sz="1200" b="1" dirty="0"/>
           </a:p>
         </p:txBody>
       </p:sp>
@@ -35518,8 +36236,8 @@
         </p:nvSpPr>
         <p:spPr>
           <a:xfrm>
-            <a:off x="6344256" y="3478697"/>
-            <a:ext cx="1175686" cy="246221"/>
+            <a:off x="6233009" y="3478697"/>
+            <a:ext cx="1286933" cy="276999"/>
           </a:xfrm>
           <a:prstGeom prst="rect">
             <a:avLst/>
@@ -35534,14 +36252,14 @@
           <a:p>
             <a:pPr latinLnBrk="1"/>
             <a:r>
-              <a:rPr lang="en-US" altLang="ko-KR" sz="1000" b="1" dirty="0" err="1"/>
+              <a:rPr lang="en-US" altLang="ko-KR" sz="1200" b="1" dirty="0" err="1"/>
               <a:t>testdata</a:t>
             </a:r>
             <a:r>
-              <a:rPr lang="en-US" altLang="ko-KR" sz="1000" b="1" dirty="0"/>
+              <a:rPr lang="en-US" altLang="ko-KR" sz="1200" b="1" dirty="0"/>
               <a:t>_ 250716</a:t>
             </a:r>
-            <a:endParaRPr lang="ko-KR" altLang="en-US" sz="1000" b="1" dirty="0"/>
+            <a:endParaRPr lang="ko-KR" altLang="en-US" sz="1200" b="1" dirty="0"/>
           </a:p>
         </p:txBody>
       </p:sp>
@@ -35559,8 +36277,8 @@
         </p:nvSpPr>
         <p:spPr>
           <a:xfrm>
-            <a:off x="6351124" y="1473154"/>
-            <a:ext cx="1175686" cy="246221"/>
+            <a:off x="6239877" y="1473154"/>
+            <a:ext cx="1286933" cy="276999"/>
           </a:xfrm>
           <a:prstGeom prst="rect">
             <a:avLst/>
@@ -35575,14 +36293,14 @@
           <a:p>
             <a:pPr algn="ctr" latinLnBrk="1"/>
             <a:r>
-              <a:rPr lang="en-US" altLang="ko-KR" sz="1000" b="1" dirty="0" err="1"/>
+              <a:rPr lang="en-US" altLang="ko-KR" sz="1200" b="1" dirty="0" err="1"/>
               <a:t>testdata</a:t>
             </a:r>
             <a:r>
-              <a:rPr lang="en-US" altLang="ko-KR" sz="1000" b="1" dirty="0"/>
+              <a:rPr lang="en-US" altLang="ko-KR" sz="1200" b="1" dirty="0"/>
               <a:t>_ 240723</a:t>
             </a:r>
-            <a:endParaRPr lang="ko-KR" altLang="en-US" sz="1000" b="1" dirty="0"/>
+            <a:endParaRPr lang="ko-KR" altLang="en-US" sz="1200" b="1" dirty="0"/>
           </a:p>
         </p:txBody>
       </p:sp>
@@ -36269,8 +36987,8 @@
         </p:nvSpPr>
         <p:spPr>
           <a:xfrm>
-            <a:off x="449914" y="5877102"/>
-            <a:ext cx="1175686" cy="246221"/>
+            <a:off x="338667" y="5877102"/>
+            <a:ext cx="1286933" cy="276999"/>
           </a:xfrm>
           <a:prstGeom prst="rect">
             <a:avLst/>
@@ -36285,18 +37003,18 @@
           <a:p>
             <a:pPr algn="ctr" latinLnBrk="1"/>
             <a:r>
-              <a:rPr lang="en-US" altLang="ko-KR" sz="1000" b="1" dirty="0"/>
+              <a:rPr lang="en-US" altLang="ko-KR" sz="1200" b="1" dirty="0"/>
               <a:t>R2 : </a:t>
             </a:r>
             <a:r>
-              <a:rPr lang="en-US" altLang="ko-KR" sz="1000" dirty="0">
+              <a:rPr lang="en-US" altLang="ko-KR" sz="1200" dirty="0">
                 <a:solidFill>
                   <a:srgbClr val="FF0000"/>
                 </a:solidFill>
               </a:rPr>
               <a:t>0.7232</a:t>
             </a:r>
-            <a:endParaRPr lang="ko-KR" altLang="en-US" sz="1000" b="1" dirty="0"/>
+            <a:endParaRPr lang="ko-KR" altLang="en-US" sz="1200" b="1" dirty="0"/>
           </a:p>
         </p:txBody>
       </p:sp>
@@ -36314,8 +37032,8 @@
         </p:nvSpPr>
         <p:spPr>
           <a:xfrm>
-            <a:off x="453401" y="3891487"/>
-            <a:ext cx="1175686" cy="246221"/>
+            <a:off x="342154" y="3891487"/>
+            <a:ext cx="1286933" cy="276999"/>
           </a:xfrm>
           <a:prstGeom prst="rect">
             <a:avLst/>
@@ -36330,18 +37048,18 @@
           <a:p>
             <a:pPr algn="ctr" latinLnBrk="1"/>
             <a:r>
-              <a:rPr lang="en-US" altLang="ko-KR" sz="1000" b="1" dirty="0"/>
+              <a:rPr lang="en-US" altLang="ko-KR" sz="1200" b="1" dirty="0"/>
               <a:t>R2 : </a:t>
             </a:r>
             <a:r>
-              <a:rPr lang="en-US" altLang="ko-KR" sz="1000" dirty="0">
+              <a:rPr lang="en-US" altLang="ko-KR" sz="1200" dirty="0">
                 <a:solidFill>
                   <a:srgbClr val="FF0000"/>
                 </a:solidFill>
               </a:rPr>
               <a:t>0.5566</a:t>
             </a:r>
-            <a:endParaRPr lang="ko-KR" altLang="en-US" sz="1000" b="1" dirty="0"/>
+            <a:endParaRPr lang="ko-KR" altLang="en-US" sz="1200" b="1" dirty="0"/>
           </a:p>
         </p:txBody>
       </p:sp>
@@ -36359,8 +37077,8 @@
         </p:nvSpPr>
         <p:spPr>
           <a:xfrm>
-            <a:off x="449914" y="1905687"/>
-            <a:ext cx="1175686" cy="246221"/>
+            <a:off x="338667" y="1905687"/>
+            <a:ext cx="1286933" cy="276999"/>
           </a:xfrm>
           <a:prstGeom prst="rect">
             <a:avLst/>
@@ -36375,14 +37093,14 @@
           <a:p>
             <a:pPr algn="ctr" latinLnBrk="1"/>
             <a:r>
-              <a:rPr lang="en-US" altLang="ko-KR" sz="1000" b="1" dirty="0"/>
+              <a:rPr lang="en-US" altLang="ko-KR" sz="1200" b="1" dirty="0"/>
               <a:t>R2 : </a:t>
             </a:r>
             <a:r>
-              <a:rPr lang="en-US" altLang="ko-KR" sz="1000" dirty="0"/>
+              <a:rPr lang="en-US" altLang="ko-KR" sz="1200" dirty="0"/>
               <a:t>0.9110</a:t>
             </a:r>
-            <a:endParaRPr lang="ko-KR" altLang="en-US" sz="1000" b="1" dirty="0"/>
+            <a:endParaRPr lang="ko-KR" altLang="en-US" sz="1200" b="1" dirty="0"/>
           </a:p>
         </p:txBody>
       </p:sp>
@@ -36400,8 +37118,8 @@
         </p:nvSpPr>
         <p:spPr>
           <a:xfrm>
-            <a:off x="6344256" y="5843346"/>
-            <a:ext cx="1175686" cy="246221"/>
+            <a:off x="6233009" y="5843346"/>
+            <a:ext cx="1286933" cy="276999"/>
           </a:xfrm>
           <a:prstGeom prst="rect">
             <a:avLst/>
@@ -36416,18 +37134,18 @@
           <a:p>
             <a:pPr algn="ctr" latinLnBrk="1"/>
             <a:r>
-              <a:rPr lang="en-US" altLang="ko-KR" sz="1000" b="1" dirty="0"/>
+              <a:rPr lang="en-US" altLang="ko-KR" sz="1200" b="1" dirty="0"/>
               <a:t>R2 : </a:t>
             </a:r>
             <a:r>
-              <a:rPr lang="en-US" altLang="ko-KR" sz="1000" dirty="0">
+              <a:rPr lang="en-US" altLang="ko-KR" sz="1200" dirty="0">
                 <a:solidFill>
                   <a:srgbClr val="FF0000"/>
                 </a:solidFill>
               </a:rPr>
               <a:t>0.6832</a:t>
             </a:r>
-            <a:endParaRPr lang="ko-KR" altLang="en-US" sz="1000" b="1" dirty="0"/>
+            <a:endParaRPr lang="ko-KR" altLang="en-US" sz="1200" b="1" dirty="0"/>
           </a:p>
         </p:txBody>
       </p:sp>
@@ -36445,8 +37163,8 @@
         </p:nvSpPr>
         <p:spPr>
           <a:xfrm>
-            <a:off x="6344256" y="3818074"/>
-            <a:ext cx="1175686" cy="246221"/>
+            <a:off x="6233009" y="3818074"/>
+            <a:ext cx="1286933" cy="276999"/>
           </a:xfrm>
           <a:prstGeom prst="rect">
             <a:avLst/>
@@ -36461,18 +37179,18 @@
           <a:p>
             <a:pPr algn="ctr" latinLnBrk="1"/>
             <a:r>
-              <a:rPr lang="en-US" altLang="ko-KR" sz="1000" b="1" dirty="0"/>
+              <a:rPr lang="en-US" altLang="ko-KR" sz="1200" b="1" dirty="0"/>
               <a:t>R2 : </a:t>
             </a:r>
             <a:r>
-              <a:rPr lang="en-US" altLang="ko-KR" sz="1000" dirty="0">
+              <a:rPr lang="en-US" altLang="ko-KR" sz="1200" dirty="0">
                 <a:solidFill>
                   <a:srgbClr val="FF0000"/>
                 </a:solidFill>
               </a:rPr>
               <a:t>0.6694</a:t>
             </a:r>
-            <a:endParaRPr lang="ko-KR" altLang="en-US" sz="1000" b="1" dirty="0"/>
+            <a:endParaRPr lang="ko-KR" altLang="en-US" sz="1200" b="1" dirty="0"/>
           </a:p>
         </p:txBody>
       </p:sp>
@@ -36490,8 +37208,8 @@
         </p:nvSpPr>
         <p:spPr>
           <a:xfrm>
-            <a:off x="6351124" y="1812531"/>
-            <a:ext cx="1175686" cy="246221"/>
+            <a:off x="6239877" y="1812531"/>
+            <a:ext cx="1286933" cy="276999"/>
           </a:xfrm>
           <a:prstGeom prst="rect">
             <a:avLst/>
@@ -36506,18 +37224,18 @@
           <a:p>
             <a:pPr algn="ctr" latinLnBrk="1"/>
             <a:r>
-              <a:rPr lang="en-US" altLang="ko-KR" sz="1000" b="1" dirty="0"/>
+              <a:rPr lang="en-US" altLang="ko-KR" sz="1200" b="1" dirty="0"/>
               <a:t>R2 : </a:t>
             </a:r>
             <a:r>
-              <a:rPr lang="en-US" altLang="ko-KR" sz="1000" dirty="0">
+              <a:rPr lang="en-US" altLang="ko-KR" sz="1200" dirty="0">
                 <a:solidFill>
                   <a:srgbClr val="FF0000"/>
                 </a:solidFill>
               </a:rPr>
               <a:t>0.5535</a:t>
             </a:r>
-            <a:endParaRPr lang="ko-KR" altLang="en-US" sz="1000" b="1" dirty="0"/>
+            <a:endParaRPr lang="ko-KR" altLang="en-US" sz="1200" b="1" dirty="0"/>
           </a:p>
         </p:txBody>
       </p:sp>
@@ -36565,8 +37283,8 @@
         </p:nvSpPr>
         <p:spPr>
           <a:xfrm>
-            <a:off x="449914" y="5537725"/>
-            <a:ext cx="1175686" cy="246221"/>
+            <a:off x="270933" y="5537725"/>
+            <a:ext cx="1354667" cy="276999"/>
           </a:xfrm>
           <a:prstGeom prst="rect">
             <a:avLst/>
@@ -36581,10 +37299,10 @@
           <a:p>
             <a:pPr algn="ctr" latinLnBrk="1"/>
             <a:r>
-              <a:rPr lang="en-US" altLang="ko-KR" sz="1000" b="1" dirty="0"/>
+              <a:rPr lang="en-US" altLang="ko-KR" sz="1200" b="1" dirty="0"/>
               <a:t>testdata_230711</a:t>
             </a:r>
-            <a:endParaRPr lang="ko-KR" altLang="en-US" sz="1000" b="1" dirty="0"/>
+            <a:endParaRPr lang="ko-KR" altLang="en-US" sz="1200" b="1" dirty="0"/>
           </a:p>
         </p:txBody>
       </p:sp>
@@ -36602,8 +37320,8 @@
         </p:nvSpPr>
         <p:spPr>
           <a:xfrm>
-            <a:off x="453401" y="3552110"/>
-            <a:ext cx="1175686" cy="246221"/>
+            <a:off x="274420" y="3552110"/>
+            <a:ext cx="1354667" cy="276999"/>
           </a:xfrm>
           <a:prstGeom prst="rect">
             <a:avLst/>
@@ -36618,14 +37336,14 @@
           <a:p>
             <a:pPr latinLnBrk="1"/>
             <a:r>
-              <a:rPr lang="en-US" altLang="ko-KR" sz="1000" b="1" dirty="0" err="1"/>
+              <a:rPr lang="en-US" altLang="ko-KR" sz="1200" b="1" dirty="0" err="1"/>
               <a:t>testdata</a:t>
             </a:r>
             <a:r>
-              <a:rPr lang="en-US" altLang="ko-KR" sz="1000" b="1" dirty="0"/>
+              <a:rPr lang="en-US" altLang="ko-KR" sz="1200" b="1" dirty="0"/>
               <a:t>_ 220712</a:t>
             </a:r>
-            <a:endParaRPr lang="ko-KR" altLang="en-US" sz="1000" b="1" dirty="0"/>
+            <a:endParaRPr lang="ko-KR" altLang="en-US" sz="1200" b="1" dirty="0"/>
           </a:p>
         </p:txBody>
       </p:sp>
@@ -36643,8 +37361,8 @@
         </p:nvSpPr>
         <p:spPr>
           <a:xfrm>
-            <a:off x="449914" y="1566310"/>
-            <a:ext cx="1175686" cy="246221"/>
+            <a:off x="270933" y="1566310"/>
+            <a:ext cx="1354667" cy="276999"/>
           </a:xfrm>
           <a:prstGeom prst="rect">
             <a:avLst/>
@@ -36659,14 +37377,14 @@
           <a:p>
             <a:pPr algn="ctr" latinLnBrk="1"/>
             <a:r>
-              <a:rPr lang="en-US" altLang="ko-KR" sz="1000" b="1" dirty="0" err="1"/>
+              <a:rPr lang="en-US" altLang="ko-KR" sz="1200" b="1" dirty="0" err="1"/>
               <a:t>testdata</a:t>
             </a:r>
             <a:r>
-              <a:rPr lang="en-US" altLang="ko-KR" sz="1000" b="1" dirty="0"/>
+              <a:rPr lang="en-US" altLang="ko-KR" sz="1200" b="1" dirty="0"/>
               <a:t>_ 200802</a:t>
             </a:r>
-            <a:endParaRPr lang="ko-KR" altLang="en-US" sz="1000" b="1" dirty="0"/>
+            <a:endParaRPr lang="ko-KR" altLang="en-US" sz="1200" b="1" dirty="0"/>
           </a:p>
         </p:txBody>
       </p:sp>
@@ -36794,8 +37512,8 @@
         </p:nvSpPr>
         <p:spPr>
           <a:xfrm>
-            <a:off x="6344256" y="5503969"/>
-            <a:ext cx="1175686" cy="246221"/>
+            <a:off x="6165275" y="5503969"/>
+            <a:ext cx="1354667" cy="276999"/>
           </a:xfrm>
           <a:prstGeom prst="rect">
             <a:avLst/>
@@ -36810,10 +37528,10 @@
           <a:p>
             <a:pPr algn="ctr" latinLnBrk="1"/>
             <a:r>
-              <a:rPr lang="en-US" altLang="ko-KR" sz="1000" b="1" dirty="0"/>
+              <a:rPr lang="en-US" altLang="ko-KR" sz="1200" b="1" dirty="0"/>
               <a:t>testdata_250814</a:t>
             </a:r>
-            <a:endParaRPr lang="ko-KR" altLang="en-US" sz="1000" b="1" dirty="0"/>
+            <a:endParaRPr lang="ko-KR" altLang="en-US" sz="1200" b="1" dirty="0"/>
           </a:p>
         </p:txBody>
       </p:sp>
@@ -36831,8 +37549,8 @@
         </p:nvSpPr>
         <p:spPr>
           <a:xfrm>
-            <a:off x="6344256" y="3478697"/>
-            <a:ext cx="1175686" cy="246221"/>
+            <a:off x="6165275" y="3478697"/>
+            <a:ext cx="1354667" cy="276999"/>
           </a:xfrm>
           <a:prstGeom prst="rect">
             <a:avLst/>
@@ -36847,14 +37565,14 @@
           <a:p>
             <a:pPr latinLnBrk="1"/>
             <a:r>
-              <a:rPr lang="en-US" altLang="ko-KR" sz="1000" b="1" dirty="0" err="1"/>
+              <a:rPr lang="en-US" altLang="ko-KR" sz="1200" b="1" dirty="0" err="1"/>
               <a:t>testdata</a:t>
             </a:r>
             <a:r>
-              <a:rPr lang="en-US" altLang="ko-KR" sz="1000" b="1" dirty="0"/>
+              <a:rPr lang="en-US" altLang="ko-KR" sz="1200" b="1" dirty="0"/>
               <a:t>_ 250716</a:t>
             </a:r>
-            <a:endParaRPr lang="ko-KR" altLang="en-US" sz="1000" b="1" dirty="0"/>
+            <a:endParaRPr lang="ko-KR" altLang="en-US" sz="1200" b="1" dirty="0"/>
           </a:p>
         </p:txBody>
       </p:sp>
@@ -36872,8 +37590,8 @@
         </p:nvSpPr>
         <p:spPr>
           <a:xfrm>
-            <a:off x="6351124" y="1473154"/>
-            <a:ext cx="1175686" cy="246221"/>
+            <a:off x="6172143" y="1473154"/>
+            <a:ext cx="1354667" cy="276999"/>
           </a:xfrm>
           <a:prstGeom prst="rect">
             <a:avLst/>
@@ -36888,14 +37606,14 @@
           <a:p>
             <a:pPr algn="ctr" latinLnBrk="1"/>
             <a:r>
-              <a:rPr lang="en-US" altLang="ko-KR" sz="1000" b="1" dirty="0" err="1"/>
+              <a:rPr lang="en-US" altLang="ko-KR" sz="1200" b="1" dirty="0" err="1"/>
               <a:t>testdata</a:t>
             </a:r>
             <a:r>
-              <a:rPr lang="en-US" altLang="ko-KR" sz="1000" b="1" dirty="0"/>
+              <a:rPr lang="en-US" altLang="ko-KR" sz="1200" b="1" dirty="0"/>
               <a:t>_ 240723</a:t>
             </a:r>
-            <a:endParaRPr lang="ko-KR" altLang="en-US" sz="1000" b="1" dirty="0"/>
+            <a:endParaRPr lang="ko-KR" altLang="en-US" sz="1200" b="1" dirty="0"/>
           </a:p>
         </p:txBody>
       </p:sp>
@@ -37549,8 +38267,8 @@
         </p:nvSpPr>
         <p:spPr>
           <a:xfrm>
-            <a:off x="449914" y="5877102"/>
-            <a:ext cx="1175686" cy="246221"/>
+            <a:off x="270933" y="5877102"/>
+            <a:ext cx="1354667" cy="276999"/>
           </a:xfrm>
           <a:prstGeom prst="rect">
             <a:avLst/>
@@ -37565,18 +38283,18 @@
           <a:p>
             <a:pPr algn="ctr" latinLnBrk="1"/>
             <a:r>
-              <a:rPr lang="en-US" altLang="ko-KR" sz="1000" b="1" dirty="0"/>
+              <a:rPr lang="en-US" altLang="ko-KR" sz="1200" b="1" dirty="0"/>
               <a:t>R2 : </a:t>
             </a:r>
             <a:r>
-              <a:rPr lang="en-US" altLang="ko-KR" sz="1000" dirty="0">
+              <a:rPr lang="en-US" altLang="ko-KR" sz="1200" dirty="0">
                 <a:solidFill>
                   <a:srgbClr val="FF0000"/>
                 </a:solidFill>
               </a:rPr>
               <a:t>0.6120</a:t>
             </a:r>
-            <a:endParaRPr lang="ko-KR" altLang="en-US" sz="1000" b="1" dirty="0"/>
+            <a:endParaRPr lang="ko-KR" altLang="en-US" sz="1200" b="1" dirty="0"/>
           </a:p>
         </p:txBody>
       </p:sp>
@@ -37594,8 +38312,8 @@
         </p:nvSpPr>
         <p:spPr>
           <a:xfrm>
-            <a:off x="453401" y="3891487"/>
-            <a:ext cx="1175686" cy="246221"/>
+            <a:off x="274420" y="3891487"/>
+            <a:ext cx="1354667" cy="276999"/>
           </a:xfrm>
           <a:prstGeom prst="rect">
             <a:avLst/>
@@ -37610,18 +38328,18 @@
           <a:p>
             <a:pPr algn="ctr" latinLnBrk="1"/>
             <a:r>
-              <a:rPr lang="en-US" altLang="ko-KR" sz="1000" b="1" dirty="0"/>
+              <a:rPr lang="en-US" altLang="ko-KR" sz="1200" b="1" dirty="0"/>
               <a:t>R2 : </a:t>
             </a:r>
             <a:r>
-              <a:rPr lang="en-US" altLang="ko-KR" sz="1000" dirty="0">
+              <a:rPr lang="en-US" altLang="ko-KR" sz="1200" dirty="0">
                 <a:solidFill>
                   <a:srgbClr val="FF0000"/>
                 </a:solidFill>
               </a:rPr>
               <a:t>0.2335</a:t>
             </a:r>
-            <a:endParaRPr lang="ko-KR" altLang="en-US" sz="1000" b="1" dirty="0"/>
+            <a:endParaRPr lang="ko-KR" altLang="en-US" sz="1200" b="1" dirty="0"/>
           </a:p>
         </p:txBody>
       </p:sp>
@@ -37639,8 +38357,8 @@
         </p:nvSpPr>
         <p:spPr>
           <a:xfrm>
-            <a:off x="449914" y="1905687"/>
-            <a:ext cx="1175686" cy="246221"/>
+            <a:off x="270933" y="1905687"/>
+            <a:ext cx="1354667" cy="276999"/>
           </a:xfrm>
           <a:prstGeom prst="rect">
             <a:avLst/>
@@ -37655,14 +38373,14 @@
           <a:p>
             <a:pPr algn="ctr" latinLnBrk="1"/>
             <a:r>
-              <a:rPr lang="en-US" altLang="ko-KR" sz="1000" b="1" dirty="0"/>
+              <a:rPr lang="en-US" altLang="ko-KR" sz="1200" b="1" dirty="0"/>
               <a:t>R2 : </a:t>
             </a:r>
             <a:r>
-              <a:rPr lang="en-US" altLang="ko-KR" sz="1000" dirty="0"/>
+              <a:rPr lang="en-US" altLang="ko-KR" sz="1200" dirty="0"/>
               <a:t>0.9067</a:t>
             </a:r>
-            <a:endParaRPr lang="ko-KR" altLang="en-US" sz="1000" b="1" dirty="0"/>
+            <a:endParaRPr lang="ko-KR" altLang="en-US" sz="1200" b="1" dirty="0"/>
           </a:p>
         </p:txBody>
       </p:sp>
@@ -37680,8 +38398,8 @@
         </p:nvSpPr>
         <p:spPr>
           <a:xfrm>
-            <a:off x="6344256" y="5843346"/>
-            <a:ext cx="1175686" cy="246221"/>
+            <a:off x="6165275" y="5843346"/>
+            <a:ext cx="1354667" cy="276999"/>
           </a:xfrm>
           <a:prstGeom prst="rect">
             <a:avLst/>
@@ -37696,18 +38414,18 @@
           <a:p>
             <a:pPr algn="ctr" latinLnBrk="1"/>
             <a:r>
-              <a:rPr lang="en-US" altLang="ko-KR" sz="1000" b="1" dirty="0"/>
+              <a:rPr lang="en-US" altLang="ko-KR" sz="1200" b="1" dirty="0"/>
               <a:t>R2 : </a:t>
             </a:r>
             <a:r>
-              <a:rPr lang="en-US" altLang="ko-KR" sz="1000" dirty="0">
+              <a:rPr lang="en-US" altLang="ko-KR" sz="1200" dirty="0">
                 <a:solidFill>
                   <a:srgbClr val="FF0000"/>
                 </a:solidFill>
               </a:rPr>
               <a:t>0.5747</a:t>
             </a:r>
-            <a:endParaRPr lang="ko-KR" altLang="en-US" sz="1000" b="1" dirty="0"/>
+            <a:endParaRPr lang="ko-KR" altLang="en-US" sz="1200" b="1" dirty="0"/>
           </a:p>
         </p:txBody>
       </p:sp>
@@ -37725,8 +38443,8 @@
         </p:nvSpPr>
         <p:spPr>
           <a:xfrm>
-            <a:off x="6344256" y="3818074"/>
-            <a:ext cx="1175686" cy="246221"/>
+            <a:off x="6165275" y="3818074"/>
+            <a:ext cx="1354667" cy="276999"/>
           </a:xfrm>
           <a:prstGeom prst="rect">
             <a:avLst/>
@@ -37741,14 +38459,14 @@
           <a:p>
             <a:pPr algn="ctr" latinLnBrk="1"/>
             <a:r>
-              <a:rPr lang="en-US" altLang="ko-KR" sz="1000" b="1" dirty="0"/>
+              <a:rPr lang="en-US" altLang="ko-KR" sz="1200" b="1" dirty="0"/>
               <a:t>R2 : </a:t>
             </a:r>
             <a:r>
-              <a:rPr lang="en-US" altLang="ko-KR" sz="1000" dirty="0"/>
+              <a:rPr lang="en-US" altLang="ko-KR" sz="1200" dirty="0"/>
               <a:t>0.8707</a:t>
             </a:r>
-            <a:endParaRPr lang="ko-KR" altLang="en-US" sz="1000" b="1" dirty="0"/>
+            <a:endParaRPr lang="ko-KR" altLang="en-US" sz="1200" b="1" dirty="0"/>
           </a:p>
         </p:txBody>
       </p:sp>
@@ -37766,8 +38484,8 @@
         </p:nvSpPr>
         <p:spPr>
           <a:xfrm>
-            <a:off x="6351124" y="1812531"/>
-            <a:ext cx="1175686" cy="246221"/>
+            <a:off x="6172143" y="1812531"/>
+            <a:ext cx="1354667" cy="276999"/>
           </a:xfrm>
           <a:prstGeom prst="rect">
             <a:avLst/>
@@ -37782,18 +38500,18 @@
           <a:p>
             <a:pPr algn="ctr" latinLnBrk="1"/>
             <a:r>
-              <a:rPr lang="en-US" altLang="ko-KR" sz="1000" b="1" dirty="0"/>
+              <a:rPr lang="en-US" altLang="ko-KR" sz="1200" b="1" dirty="0"/>
               <a:t>R2 : </a:t>
             </a:r>
             <a:r>
-              <a:rPr lang="en-US" altLang="ko-KR" sz="1000" dirty="0">
+              <a:rPr lang="en-US" altLang="ko-KR" sz="1200" dirty="0">
                 <a:solidFill>
                   <a:srgbClr val="FF0000"/>
                 </a:solidFill>
               </a:rPr>
               <a:t>0.0143</a:t>
             </a:r>
-            <a:endParaRPr lang="ko-KR" altLang="en-US" sz="1000" b="1" dirty="0"/>
+            <a:endParaRPr lang="ko-KR" altLang="en-US" sz="1200" b="1" dirty="0"/>
           </a:p>
         </p:txBody>
       </p:sp>

--- a/ParallelLSTM/result/Parallel LSTM 결과 보고.pptx
+++ b/ParallelLSTM/result/Parallel LSTM 결과 보고.pptx
@@ -24,9 +24,9 @@
     <p:sldId id="652" r:id="rId18"/>
     <p:sldId id="592" r:id="rId19"/>
     <p:sldId id="593" r:id="rId20"/>
-    <p:sldId id="643" r:id="rId21"/>
-    <p:sldId id="646" r:id="rId22"/>
-    <p:sldId id="653" r:id="rId23"/>
+    <p:sldId id="664" r:id="rId21"/>
+    <p:sldId id="665" r:id="rId22"/>
+    <p:sldId id="666" r:id="rId23"/>
     <p:sldId id="609" r:id="rId24"/>
     <p:sldId id="654" r:id="rId25"/>
     <p:sldId id="655" r:id="rId26"/>
@@ -280,7 +280,7 @@
           <a:p>
             <a:fld id="{B72759B8-7332-44BD-B1FF-13450B6DA7DC}" type="datetimeFigureOut">
               <a:rPr lang="ko-KR" altLang="en-US" smtClean="0"/>
-              <a:t>2026-01-19</a:t>
+              <a:t>2026-01-22</a:t>
             </a:fld>
             <a:endParaRPr lang="ko-KR" altLang="en-US"/>
           </a:p>
@@ -450,7 +450,7 @@
           <a:p>
             <a:fld id="{B72759B8-7332-44BD-B1FF-13450B6DA7DC}" type="datetimeFigureOut">
               <a:rPr lang="ko-KR" altLang="en-US" smtClean="0"/>
-              <a:t>2026-01-19</a:t>
+              <a:t>2026-01-22</a:t>
             </a:fld>
             <a:endParaRPr lang="ko-KR" altLang="en-US"/>
           </a:p>
@@ -630,7 +630,7 @@
           <a:p>
             <a:fld id="{B72759B8-7332-44BD-B1FF-13450B6DA7DC}" type="datetimeFigureOut">
               <a:rPr lang="ko-KR" altLang="en-US" smtClean="0"/>
-              <a:t>2026-01-19</a:t>
+              <a:t>2026-01-22</a:t>
             </a:fld>
             <a:endParaRPr lang="ko-KR" altLang="en-US"/>
           </a:p>
@@ -800,7 +800,7 @@
           <a:p>
             <a:fld id="{B72759B8-7332-44BD-B1FF-13450B6DA7DC}" type="datetimeFigureOut">
               <a:rPr lang="ko-KR" altLang="en-US" smtClean="0"/>
-              <a:t>2026-01-19</a:t>
+              <a:t>2026-01-22</a:t>
             </a:fld>
             <a:endParaRPr lang="ko-KR" altLang="en-US"/>
           </a:p>
@@ -1051,7 +1051,7 @@
           <a:p>
             <a:fld id="{B72759B8-7332-44BD-B1FF-13450B6DA7DC}" type="datetimeFigureOut">
               <a:rPr lang="ko-KR" altLang="en-US" smtClean="0"/>
-              <a:t>2026-01-19</a:t>
+              <a:t>2026-01-22</a:t>
             </a:fld>
             <a:endParaRPr lang="ko-KR" altLang="en-US"/>
           </a:p>
@@ -1283,7 +1283,7 @@
           <a:p>
             <a:fld id="{B72759B8-7332-44BD-B1FF-13450B6DA7DC}" type="datetimeFigureOut">
               <a:rPr lang="ko-KR" altLang="en-US" smtClean="0"/>
-              <a:t>2026-01-19</a:t>
+              <a:t>2026-01-22</a:t>
             </a:fld>
             <a:endParaRPr lang="ko-KR" altLang="en-US"/>
           </a:p>
@@ -1630,7 +1630,7 @@
           <a:p>
             <a:fld id="{B72759B8-7332-44BD-B1FF-13450B6DA7DC}" type="datetimeFigureOut">
               <a:rPr lang="ko-KR" altLang="en-US" smtClean="0"/>
-              <a:t>2026-01-19</a:t>
+              <a:t>2026-01-22</a:t>
             </a:fld>
             <a:endParaRPr lang="ko-KR" altLang="en-US"/>
           </a:p>
@@ -1748,7 +1748,7 @@
           <a:p>
             <a:fld id="{B72759B8-7332-44BD-B1FF-13450B6DA7DC}" type="datetimeFigureOut">
               <a:rPr lang="ko-KR" altLang="en-US" smtClean="0"/>
-              <a:t>2026-01-19</a:t>
+              <a:t>2026-01-22</a:t>
             </a:fld>
             <a:endParaRPr lang="ko-KR" altLang="en-US"/>
           </a:p>
@@ -1866,7 +1866,7 @@
           <a:p>
             <a:fld id="{B72759B8-7332-44BD-B1FF-13450B6DA7DC}" type="datetimeFigureOut">
               <a:rPr lang="ko-KR" altLang="en-US" smtClean="0"/>
-              <a:t>2026-01-19</a:t>
+              <a:t>2026-01-22</a:t>
             </a:fld>
             <a:endParaRPr lang="ko-KR" altLang="en-US"/>
           </a:p>
@@ -2150,7 +2150,7 @@
           <a:p>
             <a:fld id="{B72759B8-7332-44BD-B1FF-13450B6DA7DC}" type="datetimeFigureOut">
               <a:rPr lang="ko-KR" altLang="en-US" smtClean="0"/>
-              <a:t>2026-01-19</a:t>
+              <a:t>2026-01-22</a:t>
             </a:fld>
             <a:endParaRPr lang="ko-KR" altLang="en-US"/>
           </a:p>
@@ -2414,7 +2414,7 @@
           <a:p>
             <a:fld id="{B72759B8-7332-44BD-B1FF-13450B6DA7DC}" type="datetimeFigureOut">
               <a:rPr lang="ko-KR" altLang="en-US" smtClean="0"/>
-              <a:t>2026-01-19</a:t>
+              <a:t>2026-01-22</a:t>
             </a:fld>
             <a:endParaRPr lang="ko-KR" altLang="en-US"/>
           </a:p>
@@ -2628,7 +2628,7 @@
           <a:p>
             <a:fld id="{B72759B8-7332-44BD-B1FF-13450B6DA7DC}" type="datetimeFigureOut">
               <a:rPr lang="ko-KR" altLang="en-US" smtClean="0"/>
-              <a:t>2026-01-19</a:t>
+              <a:t>2026-01-22</a:t>
             </a:fld>
             <a:endParaRPr lang="ko-KR" altLang="en-US"/>
           </a:p>
@@ -16700,11 +16700,7 @@
             <a:graphicFrameLocks noGrp="1"/>
           </p:cNvGraphicFramePr>
           <p:nvPr>
-            <p:extLst>
-              <p:ext uri="{D42A27DB-BD31-4B8C-83A1-F6EECF244321}">
-                <p14:modId xmlns:p14="http://schemas.microsoft.com/office/powerpoint/2010/main" val="2500867857"/>
-              </p:ext>
-            </p:extLst>
+            <p:extLst/>
           </p:nvPr>
         </p:nvGraphicFramePr>
         <p:xfrm>
@@ -17154,7 +17150,7 @@
                       <a:pPr algn="ctr"/>
                       <a:r>
                         <a:rPr lang="en-US" altLang="ko-KR" sz="1200" dirty="0"/>
-                        <a:t>0.9086</a:t>
+                        <a:t>0.8748</a:t>
                       </a:r>
                       <a:endParaRPr lang="pt-BR" altLang="ko-KR" sz="1200" dirty="0"/>
                     </a:p>
@@ -17169,7 +17165,7 @@
                       <a:pPr algn="ctr"/>
                       <a:r>
                         <a:rPr lang="en-US" altLang="ko-KR" sz="1200" dirty="0"/>
-                        <a:t>0.0557</a:t>
+                        <a:t>0.0763</a:t>
                       </a:r>
                       <a:endParaRPr lang="pt-BR" altLang="ko-KR" sz="1200" dirty="0"/>
                     </a:p>
@@ -17184,7 +17180,7 @@
                       <a:pPr algn="ctr"/>
                       <a:r>
                         <a:rPr lang="en-US" altLang="ko-KR" sz="1200" dirty="0"/>
-                        <a:t>0.1438</a:t>
+                        <a:t>0.1754</a:t>
                       </a:r>
                       <a:endParaRPr lang="pt-BR" altLang="ko-KR" sz="1200" dirty="0"/>
                     </a:p>
@@ -17199,7 +17195,7 @@
                       <a:pPr algn="ctr"/>
                       <a:r>
                         <a:rPr lang="en-US" altLang="ko-KR" sz="1200" dirty="0"/>
-                        <a:t>0.2361</a:t>
+                        <a:t>0.2763</a:t>
                       </a:r>
                       <a:endParaRPr lang="pt-BR" altLang="ko-KR" sz="1200" dirty="0"/>
                     </a:p>
@@ -17298,8 +17294,27 @@
                     <a:p>
                       <a:pPr algn="ctr" latinLnBrk="1"/>
                       <a:r>
+                        <a:rPr lang="en-US" altLang="ko-KR" sz="1200" dirty="0">
+                          <a:solidFill>
+                            <a:srgbClr val="FF0000"/>
+                          </a:solidFill>
+                        </a:rPr>
+                        <a:t>0.5503</a:t>
+                      </a:r>
+                      <a:endParaRPr lang="ko-KR" altLang="en-US" sz="1200" b="0" dirty="0"/>
+                    </a:p>
+                  </a:txBody>
+                  <a:tcPr/>
+                </a:tc>
+                <a:tc>
+                  <a:txBody>
+                    <a:bodyPr/>
+                    <a:lstStyle/>
+                    <a:p>
+                      <a:pPr algn="ctr" latinLnBrk="1"/>
+                      <a:r>
                         <a:rPr lang="en-US" altLang="ko-KR" sz="1200" dirty="0"/>
-                        <a:t>0.8939</a:t>
+                        <a:t>0.0629</a:t>
                       </a:r>
                       <a:endParaRPr lang="ko-KR" altLang="en-US" sz="1200" b="0" dirty="0"/>
                     </a:p>
@@ -17314,7 +17329,7 @@
                       <a:pPr algn="ctr" latinLnBrk="1"/>
                       <a:r>
                         <a:rPr lang="en-US" altLang="ko-KR" sz="1200" dirty="0"/>
-                        <a:t>0.0148</a:t>
+                        <a:t>0.2047</a:t>
                       </a:r>
                       <a:endParaRPr lang="ko-KR" altLang="en-US" sz="1200" b="0" dirty="0"/>
                     </a:p>
@@ -17329,22 +17344,7 @@
                       <a:pPr algn="ctr" latinLnBrk="1"/>
                       <a:r>
                         <a:rPr lang="en-US" altLang="ko-KR" sz="1200" dirty="0"/>
-                        <a:t>0.0947</a:t>
-                      </a:r>
-                      <a:endParaRPr lang="ko-KR" altLang="en-US" sz="1200" b="0" dirty="0"/>
-                    </a:p>
-                  </a:txBody>
-                  <a:tcPr/>
-                </a:tc>
-                <a:tc>
-                  <a:txBody>
-                    <a:bodyPr/>
-                    <a:lstStyle/>
-                    <a:p>
-                      <a:pPr algn="ctr" latinLnBrk="1"/>
-                      <a:r>
-                        <a:rPr lang="en-US" altLang="ko-KR" sz="1200" dirty="0"/>
-                        <a:t>0.1218</a:t>
+                        <a:t>0.2509</a:t>
                       </a:r>
                       <a:endParaRPr lang="ko-KR" altLang="en-US" sz="1200" b="0" dirty="0"/>
                     </a:p>
@@ -17445,7 +17445,7 @@
                       <a:pPr algn="ctr" latinLnBrk="1"/>
                       <a:r>
                         <a:rPr lang="en-US" altLang="ko-KR" sz="1200" dirty="0"/>
-                        <a:t>0.9252</a:t>
+                        <a:t>0.8659</a:t>
                       </a:r>
                       <a:endParaRPr lang="ko-KR" altLang="en-US" sz="1200" b="0" dirty="0"/>
                     </a:p>
@@ -17460,7 +17460,7 @@
                       <a:pPr algn="ctr" latinLnBrk="1"/>
                       <a:r>
                         <a:rPr lang="en-US" altLang="ko-KR" sz="1200" dirty="0"/>
-                        <a:t>0.0680</a:t>
+                        <a:t>0.1219</a:t>
                       </a:r>
                       <a:endParaRPr lang="ko-KR" altLang="en-US" sz="1200" b="0" dirty="0"/>
                     </a:p>
@@ -17475,7 +17475,7 @@
                       <a:pPr algn="ctr" latinLnBrk="1"/>
                       <a:r>
                         <a:rPr lang="en-US" altLang="ko-KR" sz="1200" dirty="0"/>
-                        <a:t>0.2035</a:t>
+                        <a:t>0.2258</a:t>
                       </a:r>
                       <a:endParaRPr lang="ko-KR" altLang="en-US" sz="1200" b="0" dirty="0"/>
                     </a:p>
@@ -17490,7 +17490,7 @@
                       <a:pPr algn="ctr" latinLnBrk="1"/>
                       <a:r>
                         <a:rPr lang="en-US" altLang="ko-KR" sz="1200" dirty="0"/>
-                        <a:t>0.2608</a:t>
+                        <a:t>0.3492</a:t>
                       </a:r>
                       <a:endParaRPr lang="ko-KR" altLang="en-US" sz="1200" b="0" dirty="0"/>
                     </a:p>
@@ -17637,7 +17637,7 @@
                       <a:pPr algn="ctr" latinLnBrk="1"/>
                       <a:r>
                         <a:rPr lang="en-US" altLang="ko-KR" sz="1200" dirty="0"/>
-                        <a:t>0.0960</a:t>
+                        <a:t>0.0860</a:t>
                       </a:r>
                       <a:endParaRPr lang="ko-KR" altLang="en-US" sz="1200" b="0" dirty="0"/>
                     </a:p>
@@ -17652,7 +17652,7 @@
                       <a:pPr algn="ctr" latinLnBrk="1"/>
                       <a:r>
                         <a:rPr lang="en-US" altLang="ko-KR" sz="1200" dirty="0"/>
-                        <a:t>0.1243</a:t>
+                        <a:t>0.1244</a:t>
                       </a:r>
                       <a:endParaRPr lang="ko-KR" altLang="en-US" sz="1200" b="0" dirty="0"/>
                     </a:p>
@@ -17753,7 +17753,7 @@
                       <a:pPr algn="ctr" latinLnBrk="1"/>
                       <a:r>
                         <a:rPr lang="en-US" altLang="ko-KR" sz="1200" dirty="0"/>
-                        <a:t>0.9579</a:t>
+                        <a:t>0.9470</a:t>
                       </a:r>
                       <a:endParaRPr lang="ko-KR" altLang="en-US" sz="1200" b="0" dirty="0"/>
                     </a:p>
@@ -17768,7 +17768,7 @@
                       <a:pPr algn="ctr" latinLnBrk="1"/>
                       <a:r>
                         <a:rPr lang="en-US" altLang="ko-KR" sz="1200" dirty="0"/>
-                        <a:t>0.0194</a:t>
+                        <a:t>0.0244</a:t>
                       </a:r>
                       <a:endParaRPr lang="ko-KR" altLang="en-US" sz="1200" b="0" dirty="0"/>
                     </a:p>
@@ -17783,7 +17783,7 @@
                       <a:pPr algn="ctr" latinLnBrk="1"/>
                       <a:r>
                         <a:rPr lang="en-US" altLang="ko-KR" sz="1200" dirty="0"/>
-                        <a:t>0.0938</a:t>
+                        <a:t>0.1098</a:t>
                       </a:r>
                       <a:endParaRPr lang="ko-KR" altLang="en-US" sz="1200" b="0" dirty="0"/>
                     </a:p>
@@ -17798,7 +17798,7 @@
                       <a:pPr algn="ctr" latinLnBrk="1"/>
                       <a:r>
                         <a:rPr lang="en-US" altLang="ko-KR" sz="1200" dirty="0"/>
-                        <a:t>0.1393</a:t>
+                        <a:t>0.1563</a:t>
                       </a:r>
                       <a:endParaRPr lang="ko-KR" altLang="en-US" sz="1200" b="0" dirty="0"/>
                     </a:p>
@@ -17902,12 +17902,8 @@
                     <a:p>
                       <a:pPr algn="ctr" latinLnBrk="1"/>
                       <a:r>
-                        <a:rPr lang="en-US" altLang="ko-KR" sz="1200" dirty="0">
-                          <a:solidFill>
-                            <a:srgbClr val="FF0000"/>
-                          </a:solidFill>
-                        </a:rPr>
-                        <a:t>0.7833</a:t>
+                        <a:rPr lang="en-US" altLang="ko-KR" sz="1200" dirty="0"/>
+                        <a:t>0.8781</a:t>
                       </a:r>
                       <a:endParaRPr lang="ko-KR" altLang="en-US" sz="1200" b="0" dirty="0"/>
                     </a:p>
@@ -17922,7 +17918,7 @@
                       <a:pPr algn="ctr" latinLnBrk="1"/>
                       <a:r>
                         <a:rPr lang="en-US" altLang="ko-KR" sz="1200" dirty="0"/>
-                        <a:t>0.0752</a:t>
+                        <a:t>0.0423</a:t>
                       </a:r>
                       <a:endParaRPr lang="ko-KR" altLang="en-US" sz="1200" b="0" dirty="0"/>
                     </a:p>
@@ -17937,7 +17933,7 @@
                       <a:pPr algn="ctr" latinLnBrk="1"/>
                       <a:r>
                         <a:rPr lang="en-US" altLang="ko-KR" sz="1200" dirty="0"/>
-                        <a:t>0.2001</a:t>
+                        <a:t>0.1589</a:t>
                       </a:r>
                       <a:endParaRPr lang="ko-KR" altLang="en-US" sz="1200" b="0" dirty="0"/>
                     </a:p>
@@ -17952,7 +17948,7 @@
                       <a:pPr algn="ctr" latinLnBrk="1"/>
                       <a:r>
                         <a:rPr lang="en-US" altLang="ko-KR" sz="1200" dirty="0"/>
-                        <a:t>0.2742</a:t>
+                        <a:t>0.2056</a:t>
                       </a:r>
                       <a:endParaRPr lang="ko-KR" altLang="en-US" sz="1200" b="0" dirty="0"/>
                     </a:p>
@@ -18438,10 +18434,10 @@
       </p:sp>
       <p:sp>
         <p:nvSpPr>
-          <p:cNvPr id="11" name="TextBox 10">
-            <a:extLst>
-              <a:ext uri="{FF2B5EF4-FFF2-40B4-BE49-F238E27FC236}">
-                <a16:creationId xmlns:a16="http://schemas.microsoft.com/office/drawing/2014/main" id="{62133630-FB2D-41DD-A286-A0C97A4C9F7A}"/>
+          <p:cNvPr id="8" name="TextBox 7">
+            <a:extLst>
+              <a:ext uri="{FF2B5EF4-FFF2-40B4-BE49-F238E27FC236}">
+                <a16:creationId xmlns:a16="http://schemas.microsoft.com/office/drawing/2014/main" id="{DF942FA4-807E-4F41-8DC1-89BC1185848C}"/>
               </a:ext>
             </a:extLst>
           </p:cNvPr>
@@ -18616,8 +18612,12 @@
               <a:t>▲ 개선  </a:t>
             </a:r>
             <a:r>
+              <a:rPr lang="en-US" altLang="ko-KR"/>
+              <a:t>( + 15.7% </a:t>
+            </a:r>
+            <a:r>
               <a:rPr lang="en-US" altLang="ko-KR" dirty="0"/>
-              <a:t>( +20.6% ) </a:t>
+              <a:t>) </a:t>
             </a:r>
             <a:endParaRPr lang="en-US" altLang="ko-KR" dirty="0">
               <a:solidFill>
@@ -18634,7 +18634,7 @@
     </p:spTree>
     <p:extLst>
       <p:ext uri="{BB962C8B-B14F-4D97-AF65-F5344CB8AC3E}">
-        <p14:creationId xmlns:p14="http://schemas.microsoft.com/office/powerpoint/2010/main" val="1203589850"/>
+        <p14:creationId xmlns:p14="http://schemas.microsoft.com/office/powerpoint/2010/main" val="4002702478"/>
       </p:ext>
     </p:extLst>
   </p:cSld>
@@ -19938,7 +19938,7 @@
     </p:spTree>
     <p:extLst>
       <p:ext uri="{BB962C8B-B14F-4D97-AF65-F5344CB8AC3E}">
-        <p14:creationId xmlns:p14="http://schemas.microsoft.com/office/powerpoint/2010/main" val="1722502593"/>
+        <p14:creationId xmlns:p14="http://schemas.microsoft.com/office/powerpoint/2010/main" val="2193001176"/>
       </p:ext>
     </p:extLst>
   </p:cSld>
@@ -20332,8 +20332,8 @@
         </p:blipFill>
         <p:spPr>
           <a:xfrm>
-            <a:off x="3963248" y="5558979"/>
-            <a:ext cx="2144214" cy="1123159"/>
+            <a:off x="3963248" y="5560469"/>
+            <a:ext cx="2144214" cy="1120178"/>
           </a:xfrm>
           <a:prstGeom prst="rect">
             <a:avLst/>
@@ -20371,8 +20371,8 @@
         </p:blipFill>
         <p:spPr>
           <a:xfrm>
-            <a:off x="3959628" y="1545631"/>
-            <a:ext cx="2138738" cy="1115651"/>
+            <a:off x="3979806" y="1545631"/>
+            <a:ext cx="2098382" cy="1115651"/>
           </a:xfrm>
           <a:prstGeom prst="rect">
             <a:avLst/>
@@ -20410,8 +20410,8 @@
         </p:blipFill>
         <p:spPr>
           <a:xfrm>
-            <a:off x="3972482" y="3509223"/>
-            <a:ext cx="2123518" cy="1117135"/>
+            <a:off x="3982691" y="3509223"/>
+            <a:ext cx="2103099" cy="1117135"/>
           </a:xfrm>
           <a:prstGeom prst="rect">
             <a:avLst/>
@@ -20668,8 +20668,8 @@
         </p:blipFill>
         <p:spPr>
           <a:xfrm>
-            <a:off x="9880322" y="5562262"/>
-            <a:ext cx="2122486" cy="1116592"/>
+            <a:off x="9880322" y="5564564"/>
+            <a:ext cx="2122486" cy="1111988"/>
           </a:xfrm>
           <a:prstGeom prst="rect">
             <a:avLst/>
@@ -20707,8 +20707,8 @@
         </p:blipFill>
         <p:spPr>
           <a:xfrm>
-            <a:off x="9876280" y="1548055"/>
-            <a:ext cx="2117853" cy="1110804"/>
+            <a:off x="9886599" y="1548055"/>
+            <a:ext cx="2097215" cy="1110804"/>
           </a:xfrm>
           <a:prstGeom prst="rect">
             <a:avLst/>
@@ -20746,8 +20746,8 @@
         </p:blipFill>
         <p:spPr>
           <a:xfrm>
-            <a:off x="9878692" y="3516446"/>
-            <a:ext cx="2123518" cy="1102688"/>
+            <a:off x="9899505" y="3516446"/>
+            <a:ext cx="2081892" cy="1102688"/>
           </a:xfrm>
           <a:prstGeom prst="rect">
             <a:avLst/>
@@ -21011,7 +21011,7 @@
             </a:r>
             <a:r>
               <a:rPr lang="en-US" altLang="ko-KR" sz="1200" dirty="0"/>
-              <a:t>0.9252</a:t>
+              <a:t>0.8659</a:t>
             </a:r>
             <a:endParaRPr lang="ko-KR" altLang="en-US" sz="1200" b="1" dirty="0"/>
           </a:p>
@@ -21051,10 +21051,18 @@
               <a:t>R2 : </a:t>
             </a:r>
             <a:r>
-              <a:rPr lang="en-US" altLang="ko-KR" sz="1200" dirty="0"/>
-              <a:t>0.8939</a:t>
-            </a:r>
-            <a:endParaRPr lang="ko-KR" altLang="en-US" sz="1200" b="1" dirty="0"/>
+              <a:rPr lang="en-US" altLang="ko-KR" sz="1200" dirty="0">
+                <a:solidFill>
+                  <a:srgbClr val="FF0000"/>
+                </a:solidFill>
+              </a:rPr>
+              <a:t>0.5503</a:t>
+            </a:r>
+            <a:endParaRPr lang="ko-KR" altLang="en-US" sz="1200" b="1" dirty="0">
+              <a:solidFill>
+                <a:srgbClr val="FF0000"/>
+              </a:solidFill>
+            </a:endParaRPr>
           </a:p>
         </p:txBody>
       </p:sp>
@@ -21093,7 +21101,7 @@
             </a:r>
             <a:r>
               <a:rPr lang="en-US" altLang="ko-KR" sz="1200" dirty="0"/>
-              <a:t>0.9086</a:t>
+              <a:t>0.8748</a:t>
             </a:r>
             <a:endParaRPr lang="ko-KR" altLang="en-US" sz="1200" b="1" dirty="0"/>
           </a:p>
@@ -21133,12 +21141,8 @@
               <a:t>R2 : </a:t>
             </a:r>
             <a:r>
-              <a:rPr lang="en-US" altLang="ko-KR" sz="1200" dirty="0">
-                <a:solidFill>
-                  <a:srgbClr val="FF0000"/>
-                </a:solidFill>
-              </a:rPr>
-              <a:t>0.7833</a:t>
+              <a:rPr lang="en-US" altLang="ko-KR" sz="1200" dirty="0"/>
+              <a:t>0.8781</a:t>
             </a:r>
             <a:endParaRPr lang="ko-KR" altLang="en-US" sz="1200" b="1" dirty="0"/>
           </a:p>
@@ -21179,7 +21183,7 @@
             </a:r>
             <a:r>
               <a:rPr lang="en-US" altLang="ko-KR" sz="1200" dirty="0"/>
-              <a:t>0.9579</a:t>
+              <a:t>0.9470</a:t>
             </a:r>
             <a:endParaRPr lang="ko-KR" altLang="en-US" sz="1200" b="1" dirty="0"/>
           </a:p>
@@ -21237,7 +21241,7 @@
     </p:spTree>
     <p:extLst>
       <p:ext uri="{BB962C8B-B14F-4D97-AF65-F5344CB8AC3E}">
-        <p14:creationId xmlns:p14="http://schemas.microsoft.com/office/powerpoint/2010/main" val="2364129178"/>
+        <p14:creationId xmlns:p14="http://schemas.microsoft.com/office/powerpoint/2010/main" val="374699175"/>
       </p:ext>
     </p:extLst>
   </p:cSld>
